--- a/PLSQL/06장/6장_동적SQL과DBA자동화.pptx
+++ b/PLSQL/06장/6장_동적SQL과DBA자동화.pptx
@@ -4,62 +4,65 @@
   <p:sldMasterIdLst>
     <p:sldMasterId id="2147483648" r:id="rId1"/>
   </p:sldMasterIdLst>
+  <p:notesMasterIdLst>
+    <p:notesMasterId r:id="rId55"/>
+  </p:notesMasterIdLst>
   <p:sldIdLst>
-    <p:sldId id="256" r:id="rId7"/>
-    <p:sldId id="257" r:id="rId9"/>
-    <p:sldId id="258" r:id="rId10"/>
-    <p:sldId id="259" r:id="rId11"/>
-    <p:sldId id="260" r:id="rId12"/>
-    <p:sldId id="261" r:id="rId13"/>
-    <p:sldId id="262" r:id="rId14"/>
-    <p:sldId id="263" r:id="rId15"/>
-    <p:sldId id="264" r:id="rId16"/>
-    <p:sldId id="265" r:id="rId17"/>
-    <p:sldId id="266" r:id="rId18"/>
-    <p:sldId id="267" r:id="rId19"/>
-    <p:sldId id="268" r:id="rId20"/>
-    <p:sldId id="269" r:id="rId21"/>
-    <p:sldId id="270" r:id="rId22"/>
-    <p:sldId id="271" r:id="rId23"/>
-    <p:sldId id="272" r:id="rId24"/>
-    <p:sldId id="273" r:id="rId25"/>
-    <p:sldId id="274" r:id="rId26"/>
-    <p:sldId id="275" r:id="rId27"/>
-    <p:sldId id="276" r:id="rId28"/>
-    <p:sldId id="277" r:id="rId29"/>
-    <p:sldId id="278" r:id="rId30"/>
-    <p:sldId id="279" r:id="rId31"/>
-    <p:sldId id="280" r:id="rId32"/>
-    <p:sldId id="281" r:id="rId33"/>
-    <p:sldId id="282" r:id="rId34"/>
-    <p:sldId id="283" r:id="rId35"/>
-    <p:sldId id="284" r:id="rId36"/>
-    <p:sldId id="285" r:id="rId37"/>
-    <p:sldId id="286" r:id="rId38"/>
-    <p:sldId id="287" r:id="rId39"/>
-    <p:sldId id="288" r:id="rId40"/>
-    <p:sldId id="289" r:id="rId41"/>
-    <p:sldId id="290" r:id="rId42"/>
-    <p:sldId id="291" r:id="rId43"/>
-    <p:sldId id="292" r:id="rId44"/>
-    <p:sldId id="293" r:id="rId45"/>
-    <p:sldId id="294" r:id="rId46"/>
-    <p:sldId id="295" r:id="rId47"/>
-    <p:sldId id="296" r:id="rId48"/>
-    <p:sldId id="297" r:id="rId49"/>
-    <p:sldId id="298" r:id="rId50"/>
-    <p:sldId id="299" r:id="rId51"/>
-    <p:sldId id="300" r:id="rId52"/>
-    <p:sldId id="301" r:id="rId53"/>
-    <p:sldId id="302" r:id="rId54"/>
-    <p:sldId id="303" r:id="rId55"/>
-    <p:sldId id="304" r:id="rId56"/>
-    <p:sldId id="305" r:id="rId57"/>
-    <p:sldId id="306" r:id="rId58"/>
-    <p:sldId id="307" r:id="rId59"/>
-    <p:sldId id="308" r:id="rId60"/>
+    <p:sldId id="256" r:id="rId2"/>
+    <p:sldId id="257" r:id="rId3"/>
+    <p:sldId id="258" r:id="rId4"/>
+    <p:sldId id="259" r:id="rId5"/>
+    <p:sldId id="260" r:id="rId6"/>
+    <p:sldId id="261" r:id="rId7"/>
+    <p:sldId id="262" r:id="rId8"/>
+    <p:sldId id="263" r:id="rId9"/>
+    <p:sldId id="264" r:id="rId10"/>
+    <p:sldId id="265" r:id="rId11"/>
+    <p:sldId id="266" r:id="rId12"/>
+    <p:sldId id="267" r:id="rId13"/>
+    <p:sldId id="268" r:id="rId14"/>
+    <p:sldId id="269" r:id="rId15"/>
+    <p:sldId id="270" r:id="rId16"/>
+    <p:sldId id="271" r:id="rId17"/>
+    <p:sldId id="272" r:id="rId18"/>
+    <p:sldId id="273" r:id="rId19"/>
+    <p:sldId id="274" r:id="rId20"/>
+    <p:sldId id="275" r:id="rId21"/>
+    <p:sldId id="276" r:id="rId22"/>
+    <p:sldId id="277" r:id="rId23"/>
+    <p:sldId id="278" r:id="rId24"/>
+    <p:sldId id="279" r:id="rId25"/>
+    <p:sldId id="280" r:id="rId26"/>
+    <p:sldId id="281" r:id="rId27"/>
+    <p:sldId id="282" r:id="rId28"/>
+    <p:sldId id="283" r:id="rId29"/>
+    <p:sldId id="284" r:id="rId30"/>
+    <p:sldId id="285" r:id="rId31"/>
+    <p:sldId id="286" r:id="rId32"/>
+    <p:sldId id="287" r:id="rId33"/>
+    <p:sldId id="288" r:id="rId34"/>
+    <p:sldId id="289" r:id="rId35"/>
+    <p:sldId id="290" r:id="rId36"/>
+    <p:sldId id="291" r:id="rId37"/>
+    <p:sldId id="292" r:id="rId38"/>
+    <p:sldId id="293" r:id="rId39"/>
+    <p:sldId id="294" r:id="rId40"/>
+    <p:sldId id="295" r:id="rId41"/>
+    <p:sldId id="296" r:id="rId42"/>
+    <p:sldId id="297" r:id="rId43"/>
+    <p:sldId id="298" r:id="rId44"/>
+    <p:sldId id="299" r:id="rId45"/>
+    <p:sldId id="300" r:id="rId46"/>
+    <p:sldId id="301" r:id="rId47"/>
+    <p:sldId id="302" r:id="rId48"/>
+    <p:sldId id="303" r:id="rId49"/>
+    <p:sldId id="304" r:id="rId50"/>
+    <p:sldId id="305" r:id="rId51"/>
+    <p:sldId id="306" r:id="rId52"/>
+    <p:sldId id="307" r:id="rId53"/>
+    <p:sldId id="308" r:id="rId54"/>
   </p:sldIdLst>
-  <p:sldSz cx="12191695" cy="6858000" type="screen4x3"/>
+  <p:sldSz cx="12192000" cy="6858000"/>
   <p:notesSz cx="6858000" cy="9144000"/>
   <p:defaultTextStyle>
     <a:defPPr>
@@ -156,11 +159,27 @@
       </a:defRPr>
     </a:lvl9pPr>
   </p:defaultTextStyle>
+  <p:extLst>
+    <p:ext uri="{EFAFB233-063F-42B5-8137-9DF3F51BA10A}">
+      <p15:sldGuideLst xmlns:p15="http://schemas.microsoft.com/office/powerpoint/2012/main">
+        <p15:guide id="1" orient="horz" pos="2160">
+          <p15:clr>
+            <a:srgbClr val="A4A3A4"/>
+          </p15:clr>
+        </p15:guide>
+        <p15:guide id="2" pos="2880">
+          <p15:clr>
+            <a:srgbClr val="A4A3A4"/>
+          </p15:clr>
+        </p15:guide>
+      </p15:sldGuideLst>
+    </p:ext>
+  </p:extLst>
 </p:presentation>
 </file>
 
 <file path=ppt/notesMasters/notesMaster1.xml><?xml version="1.0" encoding="utf-8"?>
-<p:notesMaster xmlns:a="http://schemas.openxmlformats.org/drawingml/2006/main" xmlns:p="http://schemas.openxmlformats.org/presentationml/2006/main" xmlns:r="http://schemas.openxmlformats.org/officeDocument/2006/relationships">
+<p:notesMaster xmlns:a="http://schemas.openxmlformats.org/drawingml/2006/main" xmlns:r="http://schemas.openxmlformats.org/officeDocument/2006/relationships" xmlns:p="http://schemas.openxmlformats.org/presentationml/2006/main">
   <p:cSld>
     <p:bg>
       <p:bgRef idx="1001">
@@ -181,241 +200,16 @@
           <a:chExt cx="0" cy="0"/>
         </a:xfrm>
       </p:grpSpPr>
-      <p:sp>
-        <p:nvSpPr>
-          <p:cNvPr id="2" name="Header Placeholder 1"/>
-          <p:cNvSpPr>
-            <a:spLocks noGrp="1"/>
-          </p:cNvSpPr>
-          <p:nvPr>
-            <p:ph type="hdr" sz="quarter"/>
-          </p:nvPr>
-        </p:nvSpPr>
-        <p:spPr>
-          <a:xfrm>
-            <a:off x="0" y="0"/>
-            <a:ext cx="2971800" cy="457200"/>
-          </a:xfrm>
-          <a:prstGeom prst="rect">
-            <a:avLst/>
-          </a:prstGeom>
-        </p:spPr>
-        <p:txBody>
-          <a:bodyPr vert="horz" lIns="91440" tIns="45720" rIns="91440" bIns="45720" rtlCol="0"/>
-          <a:lstStyle>
-            <a:lvl1pPr algn="l">
-              <a:defRPr sz="1200"/>
-            </a:lvl1pPr>
-          </a:lstStyle>
-          <a:p>
-            <a:endParaRPr lang="en-US"/>
-          </a:p>
-        </p:txBody>
-      </p:sp>
-      <p:sp>
-        <p:nvSpPr>
-          <p:cNvPr id="3" name="Date Placeholder 2"/>
-          <p:cNvSpPr>
-            <a:spLocks noGrp="1"/>
-          </p:cNvSpPr>
-          <p:nvPr>
-            <p:ph type="dt" idx="1"/>
-          </p:nvPr>
-        </p:nvSpPr>
-        <p:spPr>
-          <a:xfrm>
-            <a:off x="3884613" y="0"/>
-            <a:ext cx="2971800" cy="457200"/>
-          </a:xfrm>
-          <a:prstGeom prst="rect">
-            <a:avLst/>
-          </a:prstGeom>
-        </p:spPr>
-        <p:txBody>
-          <a:bodyPr vert="horz" lIns="91440" tIns="45720" rIns="91440" bIns="45720" rtlCol="0"/>
-          <a:lstStyle>
-            <a:lvl1pPr algn="r">
-              <a:defRPr sz="1200"/>
-            </a:lvl1pPr>
-          </a:lstStyle>
-          <a:p>
-            <a:fld id="{0F89C1C7-3DCD-1040-A9CF-14679D8B5DDD}" type="datetimeFigureOut">
-              <a:rPr lang="en-US" smtClean="0"/>
-              <a:t>10/17/16</a:t>
-            </a:fld>
-            <a:endParaRPr lang="en-US"/>
-          </a:p>
-        </p:txBody>
-      </p:sp>
-      <p:sp>
-        <p:nvSpPr>
-          <p:cNvPr id="4" name="Slide Image Placeholder 3"/>
-          <p:cNvSpPr>
-            <a:spLocks noGrp="1" noRot="1" noChangeAspect="1"/>
-          </p:cNvSpPr>
-          <p:nvPr>
-            <p:ph type="sldImg" idx="2"/>
-          </p:nvPr>
-        </p:nvSpPr>
-        <p:spPr>
-          <a:xfrm>
-            <a:off x="1143000" y="685800"/>
-            <a:ext cx="4572000" cy="3429000"/>
-          </a:xfrm>
-          <a:prstGeom prst="rect">
-            <a:avLst/>
-          </a:prstGeom>
-          <a:noFill/>
-          <a:ln w="12700">
-            <a:solidFill>
-              <a:prstClr val="black"/>
-            </a:solidFill>
-          </a:ln>
-        </p:spPr>
-        <p:txBody>
-          <a:bodyPr vert="horz" lIns="91440" tIns="45720" rIns="91440" bIns="45720" rtlCol="0" anchor="ctr"/>
-          <a:lstStyle/>
-          <a:p>
-            <a:endParaRPr lang="en-US"/>
-          </a:p>
-        </p:txBody>
-      </p:sp>
-      <p:sp>
-        <p:nvSpPr>
-          <p:cNvPr id="5" name="Notes Placeholder 4"/>
-          <p:cNvSpPr>
-            <a:spLocks noGrp="1"/>
-          </p:cNvSpPr>
-          <p:nvPr>
-            <p:ph type="body" sz="quarter" idx="3"/>
-          </p:nvPr>
-        </p:nvSpPr>
-        <p:spPr>
-          <a:xfrm>
-            <a:off x="685800" y="4343400"/>
-            <a:ext cx="5486400" cy="4114800"/>
-          </a:xfrm>
-          <a:prstGeom prst="rect">
-            <a:avLst/>
-          </a:prstGeom>
-        </p:spPr>
-        <p:txBody>
-          <a:bodyPr vert="horz" lIns="91440" tIns="45720" rIns="91440" bIns="45720" rtlCol="0"/>
-          <a:lstStyle/>
-          <a:p>
-            <a:pPr lvl="0"/>
-            <a:r>
-              <a:rPr lang="en-US" smtClean="0"/>
-              <a:t>Click to edit Master text styles</a:t>
-            </a:r>
-          </a:p>
-          <a:p>
-            <a:pPr lvl="1"/>
-            <a:r>
-              <a:rPr lang="en-US" smtClean="0"/>
-              <a:t>Second level</a:t>
-            </a:r>
-          </a:p>
-          <a:p>
-            <a:pPr lvl="2"/>
-            <a:r>
-              <a:rPr lang="en-US" smtClean="0"/>
-              <a:t>Third level</a:t>
-            </a:r>
-          </a:p>
-          <a:p>
-            <a:pPr lvl="3"/>
-            <a:r>
-              <a:rPr lang="en-US" smtClean="0"/>
-              <a:t>Fourth level</a:t>
-            </a:r>
-          </a:p>
-          <a:p>
-            <a:pPr lvl="4"/>
-            <a:r>
-              <a:rPr lang="en-US" smtClean="0"/>
-              <a:t>Fifth level</a:t>
-            </a:r>
-            <a:endParaRPr lang="en-US"/>
-          </a:p>
-        </p:txBody>
-      </p:sp>
-      <p:sp>
-        <p:nvSpPr>
-          <p:cNvPr id="6" name="Footer Placeholder 5"/>
-          <p:cNvSpPr>
-            <a:spLocks noGrp="1"/>
-          </p:cNvSpPr>
-          <p:nvPr>
-            <p:ph type="ftr" sz="quarter" idx="4"/>
-          </p:nvPr>
-        </p:nvSpPr>
-        <p:spPr>
-          <a:xfrm>
-            <a:off x="0" y="8685213"/>
-            <a:ext cx="2971800" cy="457200"/>
-          </a:xfrm>
-          <a:prstGeom prst="rect">
-            <a:avLst/>
-          </a:prstGeom>
-        </p:spPr>
-        <p:txBody>
-          <a:bodyPr vert="horz" lIns="91440" tIns="45720" rIns="91440" bIns="45720" rtlCol="0" anchor="b"/>
-          <a:lstStyle>
-            <a:lvl1pPr algn="l">
-              <a:defRPr sz="1200"/>
-            </a:lvl1pPr>
-          </a:lstStyle>
-          <a:p>
-            <a:endParaRPr lang="en-US"/>
-          </a:p>
-        </p:txBody>
-      </p:sp>
-      <p:sp>
-        <p:nvSpPr>
-          <p:cNvPr id="7" name="Slide Number Placeholder 6"/>
-          <p:cNvSpPr>
-            <a:spLocks noGrp="1"/>
-          </p:cNvSpPr>
-          <p:nvPr>
-            <p:ph type="sldNum" sz="quarter" idx="5"/>
-          </p:nvPr>
-        </p:nvSpPr>
-        <p:spPr>
-          <a:xfrm>
-            <a:off x="3884613" y="8685213"/>
-            <a:ext cx="2971800" cy="457200"/>
-          </a:xfrm>
-          <a:prstGeom prst="rect">
-            <a:avLst/>
-          </a:prstGeom>
-        </p:spPr>
-        <p:txBody>
-          <a:bodyPr vert="horz" lIns="91440" tIns="45720" rIns="91440" bIns="45720" rtlCol="0" anchor="b"/>
-          <a:lstStyle>
-            <a:lvl1pPr algn="r">
-              <a:defRPr sz="1200"/>
-            </a:lvl1pPr>
-          </a:lstStyle>
-          <a:p>
-            <a:fld id="{BB5E49A5-4136-284D-997B-48E1D791AD67}" type="slidenum">
-              <a:rPr lang="en-US" smtClean="0"/>
-              <a:t>‹#›</a:t>
-            </a:fld>
-            <a:endParaRPr lang="en-US"/>
-          </a:p>
-        </p:txBody>
-      </p:sp>
     </p:spTree>
     <p:extLst>
       <p:ext uri="{BB962C8B-B14F-4D97-AF65-F5344CB8AC3E}">
-        <p14:creationId xmlns:p14="http://schemas.microsoft.com/office/powerpoint/2010/main" val="2623252185"/>
+        <p14:creationId xmlns:p14="http://schemas.microsoft.com/office/powerpoint/2010/main" val="454516485"/>
       </p:ext>
     </p:extLst>
   </p:cSld>
   <p:clrMap bg1="lt1" tx1="dk1" bg2="lt2" tx2="dk2" accent1="accent1" accent2="accent2" accent3="accent3" accent4="accent4" accent5="accent5" accent6="accent6" hlink="hlink" folHlink="folHlink"/>
   <p:notesStyle>
-    <a:lvl1pPr marL="0" algn="l" defTabSz="457200" rtl="0" eaLnBrk="1" latinLnBrk="0" hangingPunct="1">
+    <a:lvl1pPr marL="0" algn="l" defTabSz="914400" rtl="0" eaLnBrk="1" latinLnBrk="1" hangingPunct="1">
       <a:defRPr sz="1200" kern="1200">
         <a:solidFill>
           <a:schemeClr val="tx1"/>
@@ -425,7 +219,7 @@
         <a:cs typeface="+mn-cs"/>
       </a:defRPr>
     </a:lvl1pPr>
-    <a:lvl2pPr marL="457200" algn="l" defTabSz="457200" rtl="0" eaLnBrk="1" latinLnBrk="0" hangingPunct="1">
+    <a:lvl2pPr marL="457200" algn="l" defTabSz="914400" rtl="0" eaLnBrk="1" latinLnBrk="1" hangingPunct="1">
       <a:defRPr sz="1200" kern="1200">
         <a:solidFill>
           <a:schemeClr val="tx1"/>
@@ -435,7 +229,7 @@
         <a:cs typeface="+mn-cs"/>
       </a:defRPr>
     </a:lvl2pPr>
-    <a:lvl3pPr marL="914400" algn="l" defTabSz="457200" rtl="0" eaLnBrk="1" latinLnBrk="0" hangingPunct="1">
+    <a:lvl3pPr marL="914400" algn="l" defTabSz="914400" rtl="0" eaLnBrk="1" latinLnBrk="1" hangingPunct="1">
       <a:defRPr sz="1200" kern="1200">
         <a:solidFill>
           <a:schemeClr val="tx1"/>
@@ -445,7 +239,7 @@
         <a:cs typeface="+mn-cs"/>
       </a:defRPr>
     </a:lvl3pPr>
-    <a:lvl4pPr marL="1371600" algn="l" defTabSz="457200" rtl="0" eaLnBrk="1" latinLnBrk="0" hangingPunct="1">
+    <a:lvl4pPr marL="1371600" algn="l" defTabSz="914400" rtl="0" eaLnBrk="1" latinLnBrk="1" hangingPunct="1">
       <a:defRPr sz="1200" kern="1200">
         <a:solidFill>
           <a:schemeClr val="tx1"/>
@@ -455,7 +249,7 @@
         <a:cs typeface="+mn-cs"/>
       </a:defRPr>
     </a:lvl4pPr>
-    <a:lvl5pPr marL="1828800" algn="l" defTabSz="457200" rtl="0" eaLnBrk="1" latinLnBrk="0" hangingPunct="1">
+    <a:lvl5pPr marL="1828800" algn="l" defTabSz="914400" rtl="0" eaLnBrk="1" latinLnBrk="1" hangingPunct="1">
       <a:defRPr sz="1200" kern="1200">
         <a:solidFill>
           <a:schemeClr val="tx1"/>
@@ -465,7 +259,7 @@
         <a:cs typeface="+mn-cs"/>
       </a:defRPr>
     </a:lvl5pPr>
-    <a:lvl6pPr marL="2286000" algn="l" defTabSz="457200" rtl="0" eaLnBrk="1" latinLnBrk="0" hangingPunct="1">
+    <a:lvl6pPr marL="2286000" algn="l" defTabSz="914400" rtl="0" eaLnBrk="1" latinLnBrk="1" hangingPunct="1">
       <a:defRPr sz="1200" kern="1200">
         <a:solidFill>
           <a:schemeClr val="tx1"/>
@@ -475,7 +269,7 @@
         <a:cs typeface="+mn-cs"/>
       </a:defRPr>
     </a:lvl6pPr>
-    <a:lvl7pPr marL="2743200" algn="l" defTabSz="457200" rtl="0" eaLnBrk="1" latinLnBrk="0" hangingPunct="1">
+    <a:lvl7pPr marL="2743200" algn="l" defTabSz="914400" rtl="0" eaLnBrk="1" latinLnBrk="1" hangingPunct="1">
       <a:defRPr sz="1200" kern="1200">
         <a:solidFill>
           <a:schemeClr val="tx1"/>
@@ -485,7 +279,7 @@
         <a:cs typeface="+mn-cs"/>
       </a:defRPr>
     </a:lvl7pPr>
-    <a:lvl8pPr marL="3200400" algn="l" defTabSz="457200" rtl="0" eaLnBrk="1" latinLnBrk="0" hangingPunct="1">
+    <a:lvl8pPr marL="3200400" algn="l" defTabSz="914400" rtl="0" eaLnBrk="1" latinLnBrk="1" hangingPunct="1">
       <a:defRPr sz="1200" kern="1200">
         <a:solidFill>
           <a:schemeClr val="tx1"/>
@@ -495,7 +289,7 @@
         <a:cs typeface="+mn-cs"/>
       </a:defRPr>
     </a:lvl8pPr>
-    <a:lvl9pPr marL="3657600" algn="l" defTabSz="457200" rtl="0" eaLnBrk="1" latinLnBrk="0" hangingPunct="1">
+    <a:lvl9pPr marL="3657600" algn="l" defTabSz="914400" rtl="0" eaLnBrk="1" latinLnBrk="1" hangingPunct="1">
       <a:defRPr sz="1200" kern="1200">
         <a:solidFill>
           <a:schemeClr val="tx1"/>
@@ -510,7 +304,7 @@
 </file>
 
 <file path=ppt/notesSlides/notesSlide1.xml><?xml version="1.0" encoding="utf-8"?>
-<p:notes xmlns:a="http://schemas.openxmlformats.org/drawingml/2006/main" xmlns:p="http://schemas.openxmlformats.org/presentationml/2006/main" xmlns:r="http://schemas.openxmlformats.org/officeDocument/2006/relationships">
+<p:notes xmlns:a="http://schemas.openxmlformats.org/drawingml/2006/main" xmlns:r="http://schemas.openxmlformats.org/officeDocument/2006/relationships" xmlns:p="http://schemas.openxmlformats.org/presentationml/2006/main">
   <p:cSld>
     <p:spTree>
       <p:nvGrpSpPr>
@@ -530,7 +324,7 @@
         <p:nvSpPr>
           <p:cNvPr id="2" name="Slide Image Placeholder 1"/>
           <p:cNvSpPr>
-            <a:spLocks noGrp="1"/>
+            <a:spLocks noGrp="1" noRot="1" noChangeAspect="1"/>
           </p:cNvSpPr>
           <p:nvPr>
             <p:ph type="sldImg" idx="2"/>
@@ -545,7 +339,7 @@
             <a:spLocks noGrp="1"/>
           </p:cNvSpPr>
           <p:nvPr>
-            <p:ph type="body" idx="3" sz="quarter"/>
+            <p:ph type="body" sz="quarter" idx="3"/>
           </p:nvPr>
         </p:nvSpPr>
         <p:spPr/>
@@ -566,7 +360,7 @@
             <a:spLocks noGrp="1"/>
           </p:cNvSpPr>
           <p:nvPr>
-            <p:ph type="sldNum" idx="5" sz="quarter"/>
+            <p:ph type="sldNum" sz="quarter" idx="5"/>
           </p:nvPr>
         </p:nvSpPr>
         <p:spPr/>
@@ -580,7 +374,7 @@
 </file>
 
 <file path=ppt/notesSlides/notesSlide10.xml><?xml version="1.0" encoding="utf-8"?>
-<p:notes xmlns:a="http://schemas.openxmlformats.org/drawingml/2006/main" xmlns:p="http://schemas.openxmlformats.org/presentationml/2006/main" xmlns:r="http://schemas.openxmlformats.org/officeDocument/2006/relationships">
+<p:notes xmlns:a="http://schemas.openxmlformats.org/drawingml/2006/main" xmlns:r="http://schemas.openxmlformats.org/officeDocument/2006/relationships" xmlns:p="http://schemas.openxmlformats.org/presentationml/2006/main">
   <p:cSld>
     <p:spTree>
       <p:nvGrpSpPr>
@@ -600,7 +394,7 @@
         <p:nvSpPr>
           <p:cNvPr id="2" name="Slide Image Placeholder 1"/>
           <p:cNvSpPr>
-            <a:spLocks noGrp="1"/>
+            <a:spLocks noGrp="1" noRot="1" noChangeAspect="1"/>
           </p:cNvSpPr>
           <p:nvPr>
             <p:ph type="sldImg" idx="2"/>
@@ -615,7 +409,7 @@
             <a:spLocks noGrp="1"/>
           </p:cNvSpPr>
           <p:nvPr>
-            <p:ph type="body" idx="3" sz="quarter"/>
+            <p:ph type="body" sz="quarter" idx="3"/>
           </p:nvPr>
         </p:nvSpPr>
         <p:spPr/>
@@ -636,7 +430,7 @@
             <a:spLocks noGrp="1"/>
           </p:cNvSpPr>
           <p:nvPr>
-            <p:ph type="sldNum" idx="5" sz="quarter"/>
+            <p:ph type="sldNum" sz="quarter" idx="5"/>
           </p:nvPr>
         </p:nvSpPr>
         <p:spPr/>
@@ -650,7 +444,7 @@
 </file>
 
 <file path=ppt/notesSlides/notesSlide11.xml><?xml version="1.0" encoding="utf-8"?>
-<p:notes xmlns:a="http://schemas.openxmlformats.org/drawingml/2006/main" xmlns:p="http://schemas.openxmlformats.org/presentationml/2006/main" xmlns:r="http://schemas.openxmlformats.org/officeDocument/2006/relationships">
+<p:notes xmlns:a="http://schemas.openxmlformats.org/drawingml/2006/main" xmlns:r="http://schemas.openxmlformats.org/officeDocument/2006/relationships" xmlns:p="http://schemas.openxmlformats.org/presentationml/2006/main">
   <p:cSld>
     <p:spTree>
       <p:nvGrpSpPr>
@@ -670,7 +464,7 @@
         <p:nvSpPr>
           <p:cNvPr id="2" name="Slide Image Placeholder 1"/>
           <p:cNvSpPr>
-            <a:spLocks noGrp="1"/>
+            <a:spLocks noGrp="1" noRot="1" noChangeAspect="1"/>
           </p:cNvSpPr>
           <p:nvPr>
             <p:ph type="sldImg" idx="2"/>
@@ -685,7 +479,7 @@
             <a:spLocks noGrp="1"/>
           </p:cNvSpPr>
           <p:nvPr>
-            <p:ph type="body" idx="3" sz="quarter"/>
+            <p:ph type="body" sz="quarter" idx="3"/>
           </p:nvPr>
         </p:nvSpPr>
         <p:spPr/>
@@ -706,7 +500,7 @@
             <a:spLocks noGrp="1"/>
           </p:cNvSpPr>
           <p:nvPr>
-            <p:ph type="sldNum" idx="5" sz="quarter"/>
+            <p:ph type="sldNum" sz="quarter" idx="5"/>
           </p:nvPr>
         </p:nvSpPr>
         <p:spPr/>
@@ -720,7 +514,7 @@
 </file>
 
 <file path=ppt/notesSlides/notesSlide12.xml><?xml version="1.0" encoding="utf-8"?>
-<p:notes xmlns:a="http://schemas.openxmlformats.org/drawingml/2006/main" xmlns:p="http://schemas.openxmlformats.org/presentationml/2006/main" xmlns:r="http://schemas.openxmlformats.org/officeDocument/2006/relationships">
+<p:notes xmlns:a="http://schemas.openxmlformats.org/drawingml/2006/main" xmlns:r="http://schemas.openxmlformats.org/officeDocument/2006/relationships" xmlns:p="http://schemas.openxmlformats.org/presentationml/2006/main">
   <p:cSld>
     <p:spTree>
       <p:nvGrpSpPr>
@@ -740,7 +534,7 @@
         <p:nvSpPr>
           <p:cNvPr id="2" name="Slide Image Placeholder 1"/>
           <p:cNvSpPr>
-            <a:spLocks noGrp="1"/>
+            <a:spLocks noGrp="1" noRot="1" noChangeAspect="1"/>
           </p:cNvSpPr>
           <p:nvPr>
             <p:ph type="sldImg" idx="2"/>
@@ -755,7 +549,7 @@
             <a:spLocks noGrp="1"/>
           </p:cNvSpPr>
           <p:nvPr>
-            <p:ph type="body" idx="3" sz="quarter"/>
+            <p:ph type="body" sz="quarter" idx="3"/>
           </p:nvPr>
         </p:nvSpPr>
         <p:spPr/>
@@ -776,7 +570,7 @@
             <a:spLocks noGrp="1"/>
           </p:cNvSpPr>
           <p:nvPr>
-            <p:ph type="sldNum" idx="5" sz="quarter"/>
+            <p:ph type="sldNum" sz="quarter" idx="5"/>
           </p:nvPr>
         </p:nvSpPr>
         <p:spPr/>
@@ -790,7 +584,7 @@
 </file>
 
 <file path=ppt/notesSlides/notesSlide13.xml><?xml version="1.0" encoding="utf-8"?>
-<p:notes xmlns:a="http://schemas.openxmlformats.org/drawingml/2006/main" xmlns:p="http://schemas.openxmlformats.org/presentationml/2006/main" xmlns:r="http://schemas.openxmlformats.org/officeDocument/2006/relationships">
+<p:notes xmlns:a="http://schemas.openxmlformats.org/drawingml/2006/main" xmlns:r="http://schemas.openxmlformats.org/officeDocument/2006/relationships" xmlns:p="http://schemas.openxmlformats.org/presentationml/2006/main">
   <p:cSld>
     <p:spTree>
       <p:nvGrpSpPr>
@@ -810,7 +604,7 @@
         <p:nvSpPr>
           <p:cNvPr id="2" name="Slide Image Placeholder 1"/>
           <p:cNvSpPr>
-            <a:spLocks noGrp="1"/>
+            <a:spLocks noGrp="1" noRot="1" noChangeAspect="1"/>
           </p:cNvSpPr>
           <p:nvPr>
             <p:ph type="sldImg" idx="2"/>
@@ -825,7 +619,7 @@
             <a:spLocks noGrp="1"/>
           </p:cNvSpPr>
           <p:nvPr>
-            <p:ph type="body" idx="3" sz="quarter"/>
+            <p:ph type="body" sz="quarter" idx="3"/>
           </p:nvPr>
         </p:nvSpPr>
         <p:spPr/>
@@ -846,7 +640,7 @@
             <a:spLocks noGrp="1"/>
           </p:cNvSpPr>
           <p:nvPr>
-            <p:ph type="sldNum" idx="5" sz="quarter"/>
+            <p:ph type="sldNum" sz="quarter" idx="5"/>
           </p:nvPr>
         </p:nvSpPr>
         <p:spPr/>
@@ -860,7 +654,7 @@
 </file>
 
 <file path=ppt/notesSlides/notesSlide14.xml><?xml version="1.0" encoding="utf-8"?>
-<p:notes xmlns:a="http://schemas.openxmlformats.org/drawingml/2006/main" xmlns:p="http://schemas.openxmlformats.org/presentationml/2006/main" xmlns:r="http://schemas.openxmlformats.org/officeDocument/2006/relationships">
+<p:notes xmlns:a="http://schemas.openxmlformats.org/drawingml/2006/main" xmlns:r="http://schemas.openxmlformats.org/officeDocument/2006/relationships" xmlns:p="http://schemas.openxmlformats.org/presentationml/2006/main">
   <p:cSld>
     <p:spTree>
       <p:nvGrpSpPr>
@@ -880,7 +674,7 @@
         <p:nvSpPr>
           <p:cNvPr id="2" name="Slide Image Placeholder 1"/>
           <p:cNvSpPr>
-            <a:spLocks noGrp="1"/>
+            <a:spLocks noGrp="1" noRot="1" noChangeAspect="1"/>
           </p:cNvSpPr>
           <p:nvPr>
             <p:ph type="sldImg" idx="2"/>
@@ -895,7 +689,7 @@
             <a:spLocks noGrp="1"/>
           </p:cNvSpPr>
           <p:nvPr>
-            <p:ph type="body" idx="3" sz="quarter"/>
+            <p:ph type="body" sz="quarter" idx="3"/>
           </p:nvPr>
         </p:nvSpPr>
         <p:spPr/>
@@ -916,7 +710,7 @@
             <a:spLocks noGrp="1"/>
           </p:cNvSpPr>
           <p:nvPr>
-            <p:ph type="sldNum" idx="5" sz="quarter"/>
+            <p:ph type="sldNum" sz="quarter" idx="5"/>
           </p:nvPr>
         </p:nvSpPr>
         <p:spPr/>
@@ -930,7 +724,7 @@
 </file>
 
 <file path=ppt/notesSlides/notesSlide15.xml><?xml version="1.0" encoding="utf-8"?>
-<p:notes xmlns:a="http://schemas.openxmlformats.org/drawingml/2006/main" xmlns:p="http://schemas.openxmlformats.org/presentationml/2006/main" xmlns:r="http://schemas.openxmlformats.org/officeDocument/2006/relationships">
+<p:notes xmlns:a="http://schemas.openxmlformats.org/drawingml/2006/main" xmlns:r="http://schemas.openxmlformats.org/officeDocument/2006/relationships" xmlns:p="http://schemas.openxmlformats.org/presentationml/2006/main">
   <p:cSld>
     <p:spTree>
       <p:nvGrpSpPr>
@@ -950,7 +744,7 @@
         <p:nvSpPr>
           <p:cNvPr id="2" name="Slide Image Placeholder 1"/>
           <p:cNvSpPr>
-            <a:spLocks noGrp="1"/>
+            <a:spLocks noGrp="1" noRot="1" noChangeAspect="1"/>
           </p:cNvSpPr>
           <p:nvPr>
             <p:ph type="sldImg" idx="2"/>
@@ -965,7 +759,7 @@
             <a:spLocks noGrp="1"/>
           </p:cNvSpPr>
           <p:nvPr>
-            <p:ph type="body" idx="3" sz="quarter"/>
+            <p:ph type="body" sz="quarter" idx="3"/>
           </p:nvPr>
         </p:nvSpPr>
         <p:spPr/>
@@ -986,7 +780,7 @@
             <a:spLocks noGrp="1"/>
           </p:cNvSpPr>
           <p:nvPr>
-            <p:ph type="sldNum" idx="5" sz="quarter"/>
+            <p:ph type="sldNum" sz="quarter" idx="5"/>
           </p:nvPr>
         </p:nvSpPr>
         <p:spPr/>
@@ -1000,7 +794,7 @@
 </file>
 
 <file path=ppt/notesSlides/notesSlide16.xml><?xml version="1.0" encoding="utf-8"?>
-<p:notes xmlns:a="http://schemas.openxmlformats.org/drawingml/2006/main" xmlns:p="http://schemas.openxmlformats.org/presentationml/2006/main" xmlns:r="http://schemas.openxmlformats.org/officeDocument/2006/relationships">
+<p:notes xmlns:a="http://schemas.openxmlformats.org/drawingml/2006/main" xmlns:r="http://schemas.openxmlformats.org/officeDocument/2006/relationships" xmlns:p="http://schemas.openxmlformats.org/presentationml/2006/main">
   <p:cSld>
     <p:spTree>
       <p:nvGrpSpPr>
@@ -1020,7 +814,7 @@
         <p:nvSpPr>
           <p:cNvPr id="2" name="Slide Image Placeholder 1"/>
           <p:cNvSpPr>
-            <a:spLocks noGrp="1"/>
+            <a:spLocks noGrp="1" noRot="1" noChangeAspect="1"/>
           </p:cNvSpPr>
           <p:nvPr>
             <p:ph type="sldImg" idx="2"/>
@@ -1035,7 +829,7 @@
             <a:spLocks noGrp="1"/>
           </p:cNvSpPr>
           <p:nvPr>
-            <p:ph type="body" idx="3" sz="quarter"/>
+            <p:ph type="body" sz="quarter" idx="3"/>
           </p:nvPr>
         </p:nvSpPr>
         <p:spPr/>
@@ -1056,7 +850,7 @@
             <a:spLocks noGrp="1"/>
           </p:cNvSpPr>
           <p:nvPr>
-            <p:ph type="sldNum" idx="5" sz="quarter"/>
+            <p:ph type="sldNum" sz="quarter" idx="5"/>
           </p:nvPr>
         </p:nvSpPr>
         <p:spPr/>
@@ -1070,7 +864,7 @@
 </file>
 
 <file path=ppt/notesSlides/notesSlide17.xml><?xml version="1.0" encoding="utf-8"?>
-<p:notes xmlns:a="http://schemas.openxmlformats.org/drawingml/2006/main" xmlns:p="http://schemas.openxmlformats.org/presentationml/2006/main" xmlns:r="http://schemas.openxmlformats.org/officeDocument/2006/relationships">
+<p:notes xmlns:a="http://schemas.openxmlformats.org/drawingml/2006/main" xmlns:r="http://schemas.openxmlformats.org/officeDocument/2006/relationships" xmlns:p="http://schemas.openxmlformats.org/presentationml/2006/main">
   <p:cSld>
     <p:spTree>
       <p:nvGrpSpPr>
@@ -1090,7 +884,7 @@
         <p:nvSpPr>
           <p:cNvPr id="2" name="Slide Image Placeholder 1"/>
           <p:cNvSpPr>
-            <a:spLocks noGrp="1"/>
+            <a:spLocks noGrp="1" noRot="1" noChangeAspect="1"/>
           </p:cNvSpPr>
           <p:nvPr>
             <p:ph type="sldImg" idx="2"/>
@@ -1105,7 +899,7 @@
             <a:spLocks noGrp="1"/>
           </p:cNvSpPr>
           <p:nvPr>
-            <p:ph type="body" idx="3" sz="quarter"/>
+            <p:ph type="body" sz="quarter" idx="3"/>
           </p:nvPr>
         </p:nvSpPr>
         <p:spPr/>
@@ -1126,7 +920,7 @@
             <a:spLocks noGrp="1"/>
           </p:cNvSpPr>
           <p:nvPr>
-            <p:ph type="sldNum" idx="5" sz="quarter"/>
+            <p:ph type="sldNum" sz="quarter" idx="5"/>
           </p:nvPr>
         </p:nvSpPr>
         <p:spPr/>
@@ -1140,7 +934,7 @@
 </file>
 
 <file path=ppt/notesSlides/notesSlide18.xml><?xml version="1.0" encoding="utf-8"?>
-<p:notes xmlns:a="http://schemas.openxmlformats.org/drawingml/2006/main" xmlns:p="http://schemas.openxmlformats.org/presentationml/2006/main" xmlns:r="http://schemas.openxmlformats.org/officeDocument/2006/relationships">
+<p:notes xmlns:a="http://schemas.openxmlformats.org/drawingml/2006/main" xmlns:r="http://schemas.openxmlformats.org/officeDocument/2006/relationships" xmlns:p="http://schemas.openxmlformats.org/presentationml/2006/main">
   <p:cSld>
     <p:spTree>
       <p:nvGrpSpPr>
@@ -1160,7 +954,7 @@
         <p:nvSpPr>
           <p:cNvPr id="2" name="Slide Image Placeholder 1"/>
           <p:cNvSpPr>
-            <a:spLocks noGrp="1"/>
+            <a:spLocks noGrp="1" noRot="1" noChangeAspect="1"/>
           </p:cNvSpPr>
           <p:nvPr>
             <p:ph type="sldImg" idx="2"/>
@@ -1175,7 +969,7 @@
             <a:spLocks noGrp="1"/>
           </p:cNvSpPr>
           <p:nvPr>
-            <p:ph type="body" idx="3" sz="quarter"/>
+            <p:ph type="body" sz="quarter" idx="3"/>
           </p:nvPr>
         </p:nvSpPr>
         <p:spPr/>
@@ -1196,7 +990,7 @@
             <a:spLocks noGrp="1"/>
           </p:cNvSpPr>
           <p:nvPr>
-            <p:ph type="sldNum" idx="5" sz="quarter"/>
+            <p:ph type="sldNum" sz="quarter" idx="5"/>
           </p:nvPr>
         </p:nvSpPr>
         <p:spPr/>
@@ -1210,7 +1004,7 @@
 </file>
 
 <file path=ppt/notesSlides/notesSlide19.xml><?xml version="1.0" encoding="utf-8"?>
-<p:notes xmlns:a="http://schemas.openxmlformats.org/drawingml/2006/main" xmlns:p="http://schemas.openxmlformats.org/presentationml/2006/main" xmlns:r="http://schemas.openxmlformats.org/officeDocument/2006/relationships">
+<p:notes xmlns:a="http://schemas.openxmlformats.org/drawingml/2006/main" xmlns:r="http://schemas.openxmlformats.org/officeDocument/2006/relationships" xmlns:p="http://schemas.openxmlformats.org/presentationml/2006/main">
   <p:cSld>
     <p:spTree>
       <p:nvGrpSpPr>
@@ -1230,7 +1024,7 @@
         <p:nvSpPr>
           <p:cNvPr id="2" name="Slide Image Placeholder 1"/>
           <p:cNvSpPr>
-            <a:spLocks noGrp="1"/>
+            <a:spLocks noGrp="1" noRot="1" noChangeAspect="1"/>
           </p:cNvSpPr>
           <p:nvPr>
             <p:ph type="sldImg" idx="2"/>
@@ -1245,7 +1039,7 @@
             <a:spLocks noGrp="1"/>
           </p:cNvSpPr>
           <p:nvPr>
-            <p:ph type="body" idx="3" sz="quarter"/>
+            <p:ph type="body" sz="quarter" idx="3"/>
           </p:nvPr>
         </p:nvSpPr>
         <p:spPr/>
@@ -1266,7 +1060,7 @@
             <a:spLocks noGrp="1"/>
           </p:cNvSpPr>
           <p:nvPr>
-            <p:ph type="sldNum" idx="5" sz="quarter"/>
+            <p:ph type="sldNum" sz="quarter" idx="5"/>
           </p:nvPr>
         </p:nvSpPr>
         <p:spPr/>
@@ -1280,7 +1074,7 @@
 </file>
 
 <file path=ppt/notesSlides/notesSlide2.xml><?xml version="1.0" encoding="utf-8"?>
-<p:notes xmlns:a="http://schemas.openxmlformats.org/drawingml/2006/main" xmlns:p="http://schemas.openxmlformats.org/presentationml/2006/main" xmlns:r="http://schemas.openxmlformats.org/officeDocument/2006/relationships">
+<p:notes xmlns:a="http://schemas.openxmlformats.org/drawingml/2006/main" xmlns:r="http://schemas.openxmlformats.org/officeDocument/2006/relationships" xmlns:p="http://schemas.openxmlformats.org/presentationml/2006/main">
   <p:cSld>
     <p:spTree>
       <p:nvGrpSpPr>
@@ -1300,7 +1094,7 @@
         <p:nvSpPr>
           <p:cNvPr id="2" name="Slide Image Placeholder 1"/>
           <p:cNvSpPr>
-            <a:spLocks noGrp="1"/>
+            <a:spLocks noGrp="1" noRot="1" noChangeAspect="1"/>
           </p:cNvSpPr>
           <p:nvPr>
             <p:ph type="sldImg" idx="2"/>
@@ -1315,7 +1109,7 @@
             <a:spLocks noGrp="1"/>
           </p:cNvSpPr>
           <p:nvPr>
-            <p:ph type="body" idx="3" sz="quarter"/>
+            <p:ph type="body" sz="quarter" idx="3"/>
           </p:nvPr>
         </p:nvSpPr>
         <p:spPr/>
@@ -1336,7 +1130,7 @@
             <a:spLocks noGrp="1"/>
           </p:cNvSpPr>
           <p:nvPr>
-            <p:ph type="sldNum" idx="5" sz="quarter"/>
+            <p:ph type="sldNum" sz="quarter" idx="5"/>
           </p:nvPr>
         </p:nvSpPr>
         <p:spPr/>
@@ -1350,7 +1144,7 @@
 </file>
 
 <file path=ppt/notesSlides/notesSlide20.xml><?xml version="1.0" encoding="utf-8"?>
-<p:notes xmlns:a="http://schemas.openxmlformats.org/drawingml/2006/main" xmlns:p="http://schemas.openxmlformats.org/presentationml/2006/main" xmlns:r="http://schemas.openxmlformats.org/officeDocument/2006/relationships">
+<p:notes xmlns:a="http://schemas.openxmlformats.org/drawingml/2006/main" xmlns:r="http://schemas.openxmlformats.org/officeDocument/2006/relationships" xmlns:p="http://schemas.openxmlformats.org/presentationml/2006/main">
   <p:cSld>
     <p:spTree>
       <p:nvGrpSpPr>
@@ -1370,7 +1164,7 @@
         <p:nvSpPr>
           <p:cNvPr id="2" name="Slide Image Placeholder 1"/>
           <p:cNvSpPr>
-            <a:spLocks noGrp="1"/>
+            <a:spLocks noGrp="1" noRot="1" noChangeAspect="1"/>
           </p:cNvSpPr>
           <p:nvPr>
             <p:ph type="sldImg" idx="2"/>
@@ -1385,7 +1179,7 @@
             <a:spLocks noGrp="1"/>
           </p:cNvSpPr>
           <p:nvPr>
-            <p:ph type="body" idx="3" sz="quarter"/>
+            <p:ph type="body" sz="quarter" idx="3"/>
           </p:nvPr>
         </p:nvSpPr>
         <p:spPr/>
@@ -1406,7 +1200,7 @@
             <a:spLocks noGrp="1"/>
           </p:cNvSpPr>
           <p:nvPr>
-            <p:ph type="sldNum" idx="5" sz="quarter"/>
+            <p:ph type="sldNum" sz="quarter" idx="5"/>
           </p:nvPr>
         </p:nvSpPr>
         <p:spPr/>
@@ -1420,7 +1214,7 @@
 </file>
 
 <file path=ppt/notesSlides/notesSlide21.xml><?xml version="1.0" encoding="utf-8"?>
-<p:notes xmlns:a="http://schemas.openxmlformats.org/drawingml/2006/main" xmlns:p="http://schemas.openxmlformats.org/presentationml/2006/main" xmlns:r="http://schemas.openxmlformats.org/officeDocument/2006/relationships">
+<p:notes xmlns:a="http://schemas.openxmlformats.org/drawingml/2006/main" xmlns:r="http://schemas.openxmlformats.org/officeDocument/2006/relationships" xmlns:p="http://schemas.openxmlformats.org/presentationml/2006/main">
   <p:cSld>
     <p:spTree>
       <p:nvGrpSpPr>
@@ -1440,7 +1234,7 @@
         <p:nvSpPr>
           <p:cNvPr id="2" name="Slide Image Placeholder 1"/>
           <p:cNvSpPr>
-            <a:spLocks noGrp="1"/>
+            <a:spLocks noGrp="1" noRot="1" noChangeAspect="1"/>
           </p:cNvSpPr>
           <p:nvPr>
             <p:ph type="sldImg" idx="2"/>
@@ -1455,7 +1249,7 @@
             <a:spLocks noGrp="1"/>
           </p:cNvSpPr>
           <p:nvPr>
-            <p:ph type="body" idx="3" sz="quarter"/>
+            <p:ph type="body" sz="quarter" idx="3"/>
           </p:nvPr>
         </p:nvSpPr>
         <p:spPr/>
@@ -1476,7 +1270,7 @@
             <a:spLocks noGrp="1"/>
           </p:cNvSpPr>
           <p:nvPr>
-            <p:ph type="sldNum" idx="5" sz="quarter"/>
+            <p:ph type="sldNum" sz="quarter" idx="5"/>
           </p:nvPr>
         </p:nvSpPr>
         <p:spPr/>
@@ -1490,7 +1284,7 @@
 </file>
 
 <file path=ppt/notesSlides/notesSlide22.xml><?xml version="1.0" encoding="utf-8"?>
-<p:notes xmlns:a="http://schemas.openxmlformats.org/drawingml/2006/main" xmlns:p="http://schemas.openxmlformats.org/presentationml/2006/main" xmlns:r="http://schemas.openxmlformats.org/officeDocument/2006/relationships">
+<p:notes xmlns:a="http://schemas.openxmlformats.org/drawingml/2006/main" xmlns:r="http://schemas.openxmlformats.org/officeDocument/2006/relationships" xmlns:p="http://schemas.openxmlformats.org/presentationml/2006/main">
   <p:cSld>
     <p:spTree>
       <p:nvGrpSpPr>
@@ -1510,7 +1304,7 @@
         <p:nvSpPr>
           <p:cNvPr id="2" name="Slide Image Placeholder 1"/>
           <p:cNvSpPr>
-            <a:spLocks noGrp="1"/>
+            <a:spLocks noGrp="1" noRot="1" noChangeAspect="1"/>
           </p:cNvSpPr>
           <p:nvPr>
             <p:ph type="sldImg" idx="2"/>
@@ -1525,7 +1319,7 @@
             <a:spLocks noGrp="1"/>
           </p:cNvSpPr>
           <p:nvPr>
-            <p:ph type="body" idx="3" sz="quarter"/>
+            <p:ph type="body" sz="quarter" idx="3"/>
           </p:nvPr>
         </p:nvSpPr>
         <p:spPr/>
@@ -1546,7 +1340,7 @@
             <a:spLocks noGrp="1"/>
           </p:cNvSpPr>
           <p:nvPr>
-            <p:ph type="sldNum" idx="5" sz="quarter"/>
+            <p:ph type="sldNum" sz="quarter" idx="5"/>
           </p:nvPr>
         </p:nvSpPr>
         <p:spPr/>
@@ -1560,7 +1354,7 @@
 </file>
 
 <file path=ppt/notesSlides/notesSlide23.xml><?xml version="1.0" encoding="utf-8"?>
-<p:notes xmlns:a="http://schemas.openxmlformats.org/drawingml/2006/main" xmlns:p="http://schemas.openxmlformats.org/presentationml/2006/main" xmlns:r="http://schemas.openxmlformats.org/officeDocument/2006/relationships">
+<p:notes xmlns:a="http://schemas.openxmlformats.org/drawingml/2006/main" xmlns:r="http://schemas.openxmlformats.org/officeDocument/2006/relationships" xmlns:p="http://schemas.openxmlformats.org/presentationml/2006/main">
   <p:cSld>
     <p:spTree>
       <p:nvGrpSpPr>
@@ -1580,7 +1374,7 @@
         <p:nvSpPr>
           <p:cNvPr id="2" name="Slide Image Placeholder 1"/>
           <p:cNvSpPr>
-            <a:spLocks noGrp="1"/>
+            <a:spLocks noGrp="1" noRot="1" noChangeAspect="1"/>
           </p:cNvSpPr>
           <p:nvPr>
             <p:ph type="sldImg" idx="2"/>
@@ -1595,7 +1389,7 @@
             <a:spLocks noGrp="1"/>
           </p:cNvSpPr>
           <p:nvPr>
-            <p:ph type="body" idx="3" sz="quarter"/>
+            <p:ph type="body" sz="quarter" idx="3"/>
           </p:nvPr>
         </p:nvSpPr>
         <p:spPr/>
@@ -1616,7 +1410,7 @@
             <a:spLocks noGrp="1"/>
           </p:cNvSpPr>
           <p:nvPr>
-            <p:ph type="sldNum" idx="5" sz="quarter"/>
+            <p:ph type="sldNum" sz="quarter" idx="5"/>
           </p:nvPr>
         </p:nvSpPr>
         <p:spPr/>
@@ -1630,7 +1424,7 @@
 </file>
 
 <file path=ppt/notesSlides/notesSlide24.xml><?xml version="1.0" encoding="utf-8"?>
-<p:notes xmlns:a="http://schemas.openxmlformats.org/drawingml/2006/main" xmlns:p="http://schemas.openxmlformats.org/presentationml/2006/main" xmlns:r="http://schemas.openxmlformats.org/officeDocument/2006/relationships">
+<p:notes xmlns:a="http://schemas.openxmlformats.org/drawingml/2006/main" xmlns:r="http://schemas.openxmlformats.org/officeDocument/2006/relationships" xmlns:p="http://schemas.openxmlformats.org/presentationml/2006/main">
   <p:cSld>
     <p:spTree>
       <p:nvGrpSpPr>
@@ -1650,7 +1444,7 @@
         <p:nvSpPr>
           <p:cNvPr id="2" name="Slide Image Placeholder 1"/>
           <p:cNvSpPr>
-            <a:spLocks noGrp="1"/>
+            <a:spLocks noGrp="1" noRot="1" noChangeAspect="1"/>
           </p:cNvSpPr>
           <p:nvPr>
             <p:ph type="sldImg" idx="2"/>
@@ -1665,7 +1459,7 @@
             <a:spLocks noGrp="1"/>
           </p:cNvSpPr>
           <p:nvPr>
-            <p:ph type="body" idx="3" sz="quarter"/>
+            <p:ph type="body" sz="quarter" idx="3"/>
           </p:nvPr>
         </p:nvSpPr>
         <p:spPr/>
@@ -1686,7 +1480,7 @@
             <a:spLocks noGrp="1"/>
           </p:cNvSpPr>
           <p:nvPr>
-            <p:ph type="sldNum" idx="5" sz="quarter"/>
+            <p:ph type="sldNum" sz="quarter" idx="5"/>
           </p:nvPr>
         </p:nvSpPr>
         <p:spPr/>
@@ -1700,7 +1494,7 @@
 </file>
 
 <file path=ppt/notesSlides/notesSlide25.xml><?xml version="1.0" encoding="utf-8"?>
-<p:notes xmlns:a="http://schemas.openxmlformats.org/drawingml/2006/main" xmlns:p="http://schemas.openxmlformats.org/presentationml/2006/main" xmlns:r="http://schemas.openxmlformats.org/officeDocument/2006/relationships">
+<p:notes xmlns:a="http://schemas.openxmlformats.org/drawingml/2006/main" xmlns:r="http://schemas.openxmlformats.org/officeDocument/2006/relationships" xmlns:p="http://schemas.openxmlformats.org/presentationml/2006/main">
   <p:cSld>
     <p:spTree>
       <p:nvGrpSpPr>
@@ -1720,7 +1514,7 @@
         <p:nvSpPr>
           <p:cNvPr id="2" name="Slide Image Placeholder 1"/>
           <p:cNvSpPr>
-            <a:spLocks noGrp="1"/>
+            <a:spLocks noGrp="1" noRot="1" noChangeAspect="1"/>
           </p:cNvSpPr>
           <p:nvPr>
             <p:ph type="sldImg" idx="2"/>
@@ -1735,7 +1529,7 @@
             <a:spLocks noGrp="1"/>
           </p:cNvSpPr>
           <p:nvPr>
-            <p:ph type="body" idx="3" sz="quarter"/>
+            <p:ph type="body" sz="quarter" idx="3"/>
           </p:nvPr>
         </p:nvSpPr>
         <p:spPr/>
@@ -1756,7 +1550,7 @@
             <a:spLocks noGrp="1"/>
           </p:cNvSpPr>
           <p:nvPr>
-            <p:ph type="sldNum" idx="5" sz="quarter"/>
+            <p:ph type="sldNum" sz="quarter" idx="5"/>
           </p:nvPr>
         </p:nvSpPr>
         <p:spPr/>
@@ -1770,7 +1564,7 @@
 </file>
 
 <file path=ppt/notesSlides/notesSlide26.xml><?xml version="1.0" encoding="utf-8"?>
-<p:notes xmlns:a="http://schemas.openxmlformats.org/drawingml/2006/main" xmlns:p="http://schemas.openxmlformats.org/presentationml/2006/main" xmlns:r="http://schemas.openxmlformats.org/officeDocument/2006/relationships">
+<p:notes xmlns:a="http://schemas.openxmlformats.org/drawingml/2006/main" xmlns:r="http://schemas.openxmlformats.org/officeDocument/2006/relationships" xmlns:p="http://schemas.openxmlformats.org/presentationml/2006/main">
   <p:cSld>
     <p:spTree>
       <p:nvGrpSpPr>
@@ -1790,7 +1584,7 @@
         <p:nvSpPr>
           <p:cNvPr id="2" name="Slide Image Placeholder 1"/>
           <p:cNvSpPr>
-            <a:spLocks noGrp="1"/>
+            <a:spLocks noGrp="1" noRot="1" noChangeAspect="1"/>
           </p:cNvSpPr>
           <p:nvPr>
             <p:ph type="sldImg" idx="2"/>
@@ -1805,7 +1599,7 @@
             <a:spLocks noGrp="1"/>
           </p:cNvSpPr>
           <p:nvPr>
-            <p:ph type="body" idx="3" sz="quarter"/>
+            <p:ph type="body" sz="quarter" idx="3"/>
           </p:nvPr>
         </p:nvSpPr>
         <p:spPr/>
@@ -1826,7 +1620,7 @@
             <a:spLocks noGrp="1"/>
           </p:cNvSpPr>
           <p:nvPr>
-            <p:ph type="sldNum" idx="5" sz="quarter"/>
+            <p:ph type="sldNum" sz="quarter" idx="5"/>
           </p:nvPr>
         </p:nvSpPr>
         <p:spPr/>
@@ -1840,7 +1634,7 @@
 </file>
 
 <file path=ppt/notesSlides/notesSlide27.xml><?xml version="1.0" encoding="utf-8"?>
-<p:notes xmlns:a="http://schemas.openxmlformats.org/drawingml/2006/main" xmlns:p="http://schemas.openxmlformats.org/presentationml/2006/main" xmlns:r="http://schemas.openxmlformats.org/officeDocument/2006/relationships">
+<p:notes xmlns:a="http://schemas.openxmlformats.org/drawingml/2006/main" xmlns:r="http://schemas.openxmlformats.org/officeDocument/2006/relationships" xmlns:p="http://schemas.openxmlformats.org/presentationml/2006/main">
   <p:cSld>
     <p:spTree>
       <p:nvGrpSpPr>
@@ -1860,7 +1654,7 @@
         <p:nvSpPr>
           <p:cNvPr id="2" name="Slide Image Placeholder 1"/>
           <p:cNvSpPr>
-            <a:spLocks noGrp="1"/>
+            <a:spLocks noGrp="1" noRot="1" noChangeAspect="1"/>
           </p:cNvSpPr>
           <p:nvPr>
             <p:ph type="sldImg" idx="2"/>
@@ -1875,7 +1669,7 @@
             <a:spLocks noGrp="1"/>
           </p:cNvSpPr>
           <p:nvPr>
-            <p:ph type="body" idx="3" sz="quarter"/>
+            <p:ph type="body" sz="quarter" idx="3"/>
           </p:nvPr>
         </p:nvSpPr>
         <p:spPr/>
@@ -1896,7 +1690,7 @@
             <a:spLocks noGrp="1"/>
           </p:cNvSpPr>
           <p:nvPr>
-            <p:ph type="sldNum" idx="5" sz="quarter"/>
+            <p:ph type="sldNum" sz="quarter" idx="5"/>
           </p:nvPr>
         </p:nvSpPr>
         <p:spPr/>
@@ -1910,7 +1704,7 @@
 </file>
 
 <file path=ppt/notesSlides/notesSlide28.xml><?xml version="1.0" encoding="utf-8"?>
-<p:notes xmlns:a="http://schemas.openxmlformats.org/drawingml/2006/main" xmlns:p="http://schemas.openxmlformats.org/presentationml/2006/main" xmlns:r="http://schemas.openxmlformats.org/officeDocument/2006/relationships">
+<p:notes xmlns:a="http://schemas.openxmlformats.org/drawingml/2006/main" xmlns:r="http://schemas.openxmlformats.org/officeDocument/2006/relationships" xmlns:p="http://schemas.openxmlformats.org/presentationml/2006/main">
   <p:cSld>
     <p:spTree>
       <p:nvGrpSpPr>
@@ -1930,7 +1724,7 @@
         <p:nvSpPr>
           <p:cNvPr id="2" name="Slide Image Placeholder 1"/>
           <p:cNvSpPr>
-            <a:spLocks noGrp="1"/>
+            <a:spLocks noGrp="1" noRot="1" noChangeAspect="1"/>
           </p:cNvSpPr>
           <p:nvPr>
             <p:ph type="sldImg" idx="2"/>
@@ -1945,7 +1739,7 @@
             <a:spLocks noGrp="1"/>
           </p:cNvSpPr>
           <p:nvPr>
-            <p:ph type="body" idx="3" sz="quarter"/>
+            <p:ph type="body" sz="quarter" idx="3"/>
           </p:nvPr>
         </p:nvSpPr>
         <p:spPr/>
@@ -1966,7 +1760,7 @@
             <a:spLocks noGrp="1"/>
           </p:cNvSpPr>
           <p:nvPr>
-            <p:ph type="sldNum" idx="5" sz="quarter"/>
+            <p:ph type="sldNum" sz="quarter" idx="5"/>
           </p:nvPr>
         </p:nvSpPr>
         <p:spPr/>
@@ -1980,7 +1774,7 @@
 </file>
 
 <file path=ppt/notesSlides/notesSlide29.xml><?xml version="1.0" encoding="utf-8"?>
-<p:notes xmlns:a="http://schemas.openxmlformats.org/drawingml/2006/main" xmlns:p="http://schemas.openxmlformats.org/presentationml/2006/main" xmlns:r="http://schemas.openxmlformats.org/officeDocument/2006/relationships">
+<p:notes xmlns:a="http://schemas.openxmlformats.org/drawingml/2006/main" xmlns:r="http://schemas.openxmlformats.org/officeDocument/2006/relationships" xmlns:p="http://schemas.openxmlformats.org/presentationml/2006/main">
   <p:cSld>
     <p:spTree>
       <p:nvGrpSpPr>
@@ -2000,7 +1794,7 @@
         <p:nvSpPr>
           <p:cNvPr id="2" name="Slide Image Placeholder 1"/>
           <p:cNvSpPr>
-            <a:spLocks noGrp="1"/>
+            <a:spLocks noGrp="1" noRot="1" noChangeAspect="1"/>
           </p:cNvSpPr>
           <p:nvPr>
             <p:ph type="sldImg" idx="2"/>
@@ -2015,7 +1809,7 @@
             <a:spLocks noGrp="1"/>
           </p:cNvSpPr>
           <p:nvPr>
-            <p:ph type="body" idx="3" sz="quarter"/>
+            <p:ph type="body" sz="quarter" idx="3"/>
           </p:nvPr>
         </p:nvSpPr>
         <p:spPr/>
@@ -2036,7 +1830,7 @@
             <a:spLocks noGrp="1"/>
           </p:cNvSpPr>
           <p:nvPr>
-            <p:ph type="sldNum" idx="5" sz="quarter"/>
+            <p:ph type="sldNum" sz="quarter" idx="5"/>
           </p:nvPr>
         </p:nvSpPr>
         <p:spPr/>
@@ -2050,7 +1844,7 @@
 </file>
 
 <file path=ppt/notesSlides/notesSlide3.xml><?xml version="1.0" encoding="utf-8"?>
-<p:notes xmlns:a="http://schemas.openxmlformats.org/drawingml/2006/main" xmlns:p="http://schemas.openxmlformats.org/presentationml/2006/main" xmlns:r="http://schemas.openxmlformats.org/officeDocument/2006/relationships">
+<p:notes xmlns:a="http://schemas.openxmlformats.org/drawingml/2006/main" xmlns:r="http://schemas.openxmlformats.org/officeDocument/2006/relationships" xmlns:p="http://schemas.openxmlformats.org/presentationml/2006/main">
   <p:cSld>
     <p:spTree>
       <p:nvGrpSpPr>
@@ -2070,7 +1864,7 @@
         <p:nvSpPr>
           <p:cNvPr id="2" name="Slide Image Placeholder 1"/>
           <p:cNvSpPr>
-            <a:spLocks noGrp="1"/>
+            <a:spLocks noGrp="1" noRot="1" noChangeAspect="1"/>
           </p:cNvSpPr>
           <p:nvPr>
             <p:ph type="sldImg" idx="2"/>
@@ -2085,7 +1879,7 @@
             <a:spLocks noGrp="1"/>
           </p:cNvSpPr>
           <p:nvPr>
-            <p:ph type="body" idx="3" sz="quarter"/>
+            <p:ph type="body" sz="quarter" idx="3"/>
           </p:nvPr>
         </p:nvSpPr>
         <p:spPr/>
@@ -2106,7 +1900,7 @@
             <a:spLocks noGrp="1"/>
           </p:cNvSpPr>
           <p:nvPr>
-            <p:ph type="sldNum" idx="5" sz="quarter"/>
+            <p:ph type="sldNum" sz="quarter" idx="5"/>
           </p:nvPr>
         </p:nvSpPr>
         <p:spPr/>
@@ -2120,7 +1914,7 @@
 </file>
 
 <file path=ppt/notesSlides/notesSlide30.xml><?xml version="1.0" encoding="utf-8"?>
-<p:notes xmlns:a="http://schemas.openxmlformats.org/drawingml/2006/main" xmlns:p="http://schemas.openxmlformats.org/presentationml/2006/main" xmlns:r="http://schemas.openxmlformats.org/officeDocument/2006/relationships">
+<p:notes xmlns:a="http://schemas.openxmlformats.org/drawingml/2006/main" xmlns:r="http://schemas.openxmlformats.org/officeDocument/2006/relationships" xmlns:p="http://schemas.openxmlformats.org/presentationml/2006/main">
   <p:cSld>
     <p:spTree>
       <p:nvGrpSpPr>
@@ -2140,7 +1934,7 @@
         <p:nvSpPr>
           <p:cNvPr id="2" name="Slide Image Placeholder 1"/>
           <p:cNvSpPr>
-            <a:spLocks noGrp="1"/>
+            <a:spLocks noGrp="1" noRot="1" noChangeAspect="1"/>
           </p:cNvSpPr>
           <p:nvPr>
             <p:ph type="sldImg" idx="2"/>
@@ -2155,7 +1949,7 @@
             <a:spLocks noGrp="1"/>
           </p:cNvSpPr>
           <p:nvPr>
-            <p:ph type="body" idx="3" sz="quarter"/>
+            <p:ph type="body" sz="quarter" idx="3"/>
           </p:nvPr>
         </p:nvSpPr>
         <p:spPr/>
@@ -2176,7 +1970,7 @@
             <a:spLocks noGrp="1"/>
           </p:cNvSpPr>
           <p:nvPr>
-            <p:ph type="sldNum" idx="5" sz="quarter"/>
+            <p:ph type="sldNum" sz="quarter" idx="5"/>
           </p:nvPr>
         </p:nvSpPr>
         <p:spPr/>
@@ -2190,7 +1984,7 @@
 </file>
 
 <file path=ppt/notesSlides/notesSlide31.xml><?xml version="1.0" encoding="utf-8"?>
-<p:notes xmlns:a="http://schemas.openxmlformats.org/drawingml/2006/main" xmlns:p="http://schemas.openxmlformats.org/presentationml/2006/main" xmlns:r="http://schemas.openxmlformats.org/officeDocument/2006/relationships">
+<p:notes xmlns:a="http://schemas.openxmlformats.org/drawingml/2006/main" xmlns:r="http://schemas.openxmlformats.org/officeDocument/2006/relationships" xmlns:p="http://schemas.openxmlformats.org/presentationml/2006/main">
   <p:cSld>
     <p:spTree>
       <p:nvGrpSpPr>
@@ -2210,7 +2004,7 @@
         <p:nvSpPr>
           <p:cNvPr id="2" name="Slide Image Placeholder 1"/>
           <p:cNvSpPr>
-            <a:spLocks noGrp="1"/>
+            <a:spLocks noGrp="1" noRot="1" noChangeAspect="1"/>
           </p:cNvSpPr>
           <p:nvPr>
             <p:ph type="sldImg" idx="2"/>
@@ -2225,7 +2019,7 @@
             <a:spLocks noGrp="1"/>
           </p:cNvSpPr>
           <p:nvPr>
-            <p:ph type="body" idx="3" sz="quarter"/>
+            <p:ph type="body" sz="quarter" idx="3"/>
           </p:nvPr>
         </p:nvSpPr>
         <p:spPr/>
@@ -2246,7 +2040,7 @@
             <a:spLocks noGrp="1"/>
           </p:cNvSpPr>
           <p:nvPr>
-            <p:ph type="sldNum" idx="5" sz="quarter"/>
+            <p:ph type="sldNum" sz="quarter" idx="5"/>
           </p:nvPr>
         </p:nvSpPr>
         <p:spPr/>
@@ -2260,7 +2054,7 @@
 </file>
 
 <file path=ppt/notesSlides/notesSlide32.xml><?xml version="1.0" encoding="utf-8"?>
-<p:notes xmlns:a="http://schemas.openxmlformats.org/drawingml/2006/main" xmlns:p="http://schemas.openxmlformats.org/presentationml/2006/main" xmlns:r="http://schemas.openxmlformats.org/officeDocument/2006/relationships">
+<p:notes xmlns:a="http://schemas.openxmlformats.org/drawingml/2006/main" xmlns:r="http://schemas.openxmlformats.org/officeDocument/2006/relationships" xmlns:p="http://schemas.openxmlformats.org/presentationml/2006/main">
   <p:cSld>
     <p:spTree>
       <p:nvGrpSpPr>
@@ -2280,7 +2074,7 @@
         <p:nvSpPr>
           <p:cNvPr id="2" name="Slide Image Placeholder 1"/>
           <p:cNvSpPr>
-            <a:spLocks noGrp="1"/>
+            <a:spLocks noGrp="1" noRot="1" noChangeAspect="1"/>
           </p:cNvSpPr>
           <p:nvPr>
             <p:ph type="sldImg" idx="2"/>
@@ -2295,7 +2089,7 @@
             <a:spLocks noGrp="1"/>
           </p:cNvSpPr>
           <p:nvPr>
-            <p:ph type="body" idx="3" sz="quarter"/>
+            <p:ph type="body" sz="quarter" idx="3"/>
           </p:nvPr>
         </p:nvSpPr>
         <p:spPr/>
@@ -2316,7 +2110,7 @@
             <a:spLocks noGrp="1"/>
           </p:cNvSpPr>
           <p:nvPr>
-            <p:ph type="sldNum" idx="5" sz="quarter"/>
+            <p:ph type="sldNum" sz="quarter" idx="5"/>
           </p:nvPr>
         </p:nvSpPr>
         <p:spPr/>
@@ -2330,7 +2124,7 @@
 </file>
 
 <file path=ppt/notesSlides/notesSlide33.xml><?xml version="1.0" encoding="utf-8"?>
-<p:notes xmlns:a="http://schemas.openxmlformats.org/drawingml/2006/main" xmlns:p="http://schemas.openxmlformats.org/presentationml/2006/main" xmlns:r="http://schemas.openxmlformats.org/officeDocument/2006/relationships">
+<p:notes xmlns:a="http://schemas.openxmlformats.org/drawingml/2006/main" xmlns:r="http://schemas.openxmlformats.org/officeDocument/2006/relationships" xmlns:p="http://schemas.openxmlformats.org/presentationml/2006/main">
   <p:cSld>
     <p:spTree>
       <p:nvGrpSpPr>
@@ -2350,7 +2144,7 @@
         <p:nvSpPr>
           <p:cNvPr id="2" name="Slide Image Placeholder 1"/>
           <p:cNvSpPr>
-            <a:spLocks noGrp="1"/>
+            <a:spLocks noGrp="1" noRot="1" noChangeAspect="1"/>
           </p:cNvSpPr>
           <p:nvPr>
             <p:ph type="sldImg" idx="2"/>
@@ -2365,7 +2159,7 @@
             <a:spLocks noGrp="1"/>
           </p:cNvSpPr>
           <p:nvPr>
-            <p:ph type="body" idx="3" sz="quarter"/>
+            <p:ph type="body" sz="quarter" idx="3"/>
           </p:nvPr>
         </p:nvSpPr>
         <p:spPr/>
@@ -2386,7 +2180,7 @@
             <a:spLocks noGrp="1"/>
           </p:cNvSpPr>
           <p:nvPr>
-            <p:ph type="sldNum" idx="5" sz="quarter"/>
+            <p:ph type="sldNum" sz="quarter" idx="5"/>
           </p:nvPr>
         </p:nvSpPr>
         <p:spPr/>
@@ -2400,7 +2194,7 @@
 </file>
 
 <file path=ppt/notesSlides/notesSlide34.xml><?xml version="1.0" encoding="utf-8"?>
-<p:notes xmlns:a="http://schemas.openxmlformats.org/drawingml/2006/main" xmlns:p="http://schemas.openxmlformats.org/presentationml/2006/main" xmlns:r="http://schemas.openxmlformats.org/officeDocument/2006/relationships">
+<p:notes xmlns:a="http://schemas.openxmlformats.org/drawingml/2006/main" xmlns:r="http://schemas.openxmlformats.org/officeDocument/2006/relationships" xmlns:p="http://schemas.openxmlformats.org/presentationml/2006/main">
   <p:cSld>
     <p:spTree>
       <p:nvGrpSpPr>
@@ -2420,7 +2214,7 @@
         <p:nvSpPr>
           <p:cNvPr id="2" name="Slide Image Placeholder 1"/>
           <p:cNvSpPr>
-            <a:spLocks noGrp="1"/>
+            <a:spLocks noGrp="1" noRot="1" noChangeAspect="1"/>
           </p:cNvSpPr>
           <p:nvPr>
             <p:ph type="sldImg" idx="2"/>
@@ -2435,7 +2229,7 @@
             <a:spLocks noGrp="1"/>
           </p:cNvSpPr>
           <p:nvPr>
-            <p:ph type="body" idx="3" sz="quarter"/>
+            <p:ph type="body" sz="quarter" idx="3"/>
           </p:nvPr>
         </p:nvSpPr>
         <p:spPr/>
@@ -2456,7 +2250,7 @@
             <a:spLocks noGrp="1"/>
           </p:cNvSpPr>
           <p:nvPr>
-            <p:ph type="sldNum" idx="5" sz="quarter"/>
+            <p:ph type="sldNum" sz="quarter" idx="5"/>
           </p:nvPr>
         </p:nvSpPr>
         <p:spPr/>
@@ -2470,7 +2264,7 @@
 </file>
 
 <file path=ppt/notesSlides/notesSlide35.xml><?xml version="1.0" encoding="utf-8"?>
-<p:notes xmlns:a="http://schemas.openxmlformats.org/drawingml/2006/main" xmlns:p="http://schemas.openxmlformats.org/presentationml/2006/main" xmlns:r="http://schemas.openxmlformats.org/officeDocument/2006/relationships">
+<p:notes xmlns:a="http://schemas.openxmlformats.org/drawingml/2006/main" xmlns:r="http://schemas.openxmlformats.org/officeDocument/2006/relationships" xmlns:p="http://schemas.openxmlformats.org/presentationml/2006/main">
   <p:cSld>
     <p:spTree>
       <p:nvGrpSpPr>
@@ -2490,7 +2284,7 @@
         <p:nvSpPr>
           <p:cNvPr id="2" name="Slide Image Placeholder 1"/>
           <p:cNvSpPr>
-            <a:spLocks noGrp="1"/>
+            <a:spLocks noGrp="1" noRot="1" noChangeAspect="1"/>
           </p:cNvSpPr>
           <p:nvPr>
             <p:ph type="sldImg" idx="2"/>
@@ -2505,7 +2299,7 @@
             <a:spLocks noGrp="1"/>
           </p:cNvSpPr>
           <p:nvPr>
-            <p:ph type="body" idx="3" sz="quarter"/>
+            <p:ph type="body" sz="quarter" idx="3"/>
           </p:nvPr>
         </p:nvSpPr>
         <p:spPr/>
@@ -2526,7 +2320,7 @@
             <a:spLocks noGrp="1"/>
           </p:cNvSpPr>
           <p:nvPr>
-            <p:ph type="sldNum" idx="5" sz="quarter"/>
+            <p:ph type="sldNum" sz="quarter" idx="5"/>
           </p:nvPr>
         </p:nvSpPr>
         <p:spPr/>
@@ -2540,7 +2334,7 @@
 </file>
 
 <file path=ppt/notesSlides/notesSlide36.xml><?xml version="1.0" encoding="utf-8"?>
-<p:notes xmlns:a="http://schemas.openxmlformats.org/drawingml/2006/main" xmlns:p="http://schemas.openxmlformats.org/presentationml/2006/main" xmlns:r="http://schemas.openxmlformats.org/officeDocument/2006/relationships">
+<p:notes xmlns:a="http://schemas.openxmlformats.org/drawingml/2006/main" xmlns:r="http://schemas.openxmlformats.org/officeDocument/2006/relationships" xmlns:p="http://schemas.openxmlformats.org/presentationml/2006/main">
   <p:cSld>
     <p:spTree>
       <p:nvGrpSpPr>
@@ -2560,7 +2354,7 @@
         <p:nvSpPr>
           <p:cNvPr id="2" name="Slide Image Placeholder 1"/>
           <p:cNvSpPr>
-            <a:spLocks noGrp="1"/>
+            <a:spLocks noGrp="1" noRot="1" noChangeAspect="1"/>
           </p:cNvSpPr>
           <p:nvPr>
             <p:ph type="sldImg" idx="2"/>
@@ -2575,7 +2369,7 @@
             <a:spLocks noGrp="1"/>
           </p:cNvSpPr>
           <p:nvPr>
-            <p:ph type="body" idx="3" sz="quarter"/>
+            <p:ph type="body" sz="quarter" idx="3"/>
           </p:nvPr>
         </p:nvSpPr>
         <p:spPr/>
@@ -2596,7 +2390,7 @@
             <a:spLocks noGrp="1"/>
           </p:cNvSpPr>
           <p:nvPr>
-            <p:ph type="sldNum" idx="5" sz="quarter"/>
+            <p:ph type="sldNum" sz="quarter" idx="5"/>
           </p:nvPr>
         </p:nvSpPr>
         <p:spPr/>
@@ -2610,7 +2404,7 @@
 </file>
 
 <file path=ppt/notesSlides/notesSlide37.xml><?xml version="1.0" encoding="utf-8"?>
-<p:notes xmlns:a="http://schemas.openxmlformats.org/drawingml/2006/main" xmlns:p="http://schemas.openxmlformats.org/presentationml/2006/main" xmlns:r="http://schemas.openxmlformats.org/officeDocument/2006/relationships">
+<p:notes xmlns:a="http://schemas.openxmlformats.org/drawingml/2006/main" xmlns:r="http://schemas.openxmlformats.org/officeDocument/2006/relationships" xmlns:p="http://schemas.openxmlformats.org/presentationml/2006/main">
   <p:cSld>
     <p:spTree>
       <p:nvGrpSpPr>
@@ -2630,7 +2424,7 @@
         <p:nvSpPr>
           <p:cNvPr id="2" name="Slide Image Placeholder 1"/>
           <p:cNvSpPr>
-            <a:spLocks noGrp="1"/>
+            <a:spLocks noGrp="1" noRot="1" noChangeAspect="1"/>
           </p:cNvSpPr>
           <p:nvPr>
             <p:ph type="sldImg" idx="2"/>
@@ -2645,7 +2439,7 @@
             <a:spLocks noGrp="1"/>
           </p:cNvSpPr>
           <p:nvPr>
-            <p:ph type="body" idx="3" sz="quarter"/>
+            <p:ph type="body" sz="quarter" idx="3"/>
           </p:nvPr>
         </p:nvSpPr>
         <p:spPr/>
@@ -2654,7 +2448,7 @@
           <a:lstStyle/>
           <a:p>
             <a:r>
-              <a:t>코드 리뷰에서 그대로 쓸 수 있는 체크리스트다. 특히 네 번째 항목이 중요하다. 동적 SQL은 롤로 받은 권한도 사용하므로, 자동화 계정에 DBA 롤이나 ANY 계열 권한을 주면 주입 성공 시 피해 범위가 데이터베이스 전체로 확대된다. 마지막 항목도 실무에서 자주 놓친다. 조립한 문장을 변수에 담아 두고 예외 절에서 로그에 기록하면 ORA-00904 같은 오류의 원인을 몇 초 만에 찾을 수 있다.</a:t>
+              <a:t>코드 리뷰에서 그대로 쓸 수 있는 체크리스트다. 특히 네 번째 항목이 중요하다. 자동화 코드가 익명 블록이나 호출자 권한 프로그램으로 돌면 롤 권한이 그대로 살아 있으므로, 자동화 계정에 DBA 롤이나 ANY 계열 권한을 주면 주입 성공 시 피해 범위가 데이터베이스 전체로 확대된다. 마지막 항목도 실무에서 자주 놓친다. 조립한 문장을 변수에 담아 두고 예외 절에서 로그에 기록하면 ORA-00904 같은 오류의 원인을 몇 초 만에 찾을 수 있다.</a:t>
             </a:r>
           </a:p>
         </p:txBody>
@@ -2666,7 +2460,7 @@
             <a:spLocks noGrp="1"/>
           </p:cNvSpPr>
           <p:nvPr>
-            <p:ph type="sldNum" idx="5" sz="quarter"/>
+            <p:ph type="sldNum" sz="quarter" idx="5"/>
           </p:nvPr>
         </p:nvSpPr>
         <p:spPr/>
@@ -2680,7 +2474,7 @@
 </file>
 
 <file path=ppt/notesSlides/notesSlide38.xml><?xml version="1.0" encoding="utf-8"?>
-<p:notes xmlns:a="http://schemas.openxmlformats.org/drawingml/2006/main" xmlns:p="http://schemas.openxmlformats.org/presentationml/2006/main" xmlns:r="http://schemas.openxmlformats.org/officeDocument/2006/relationships">
+<p:notes xmlns:a="http://schemas.openxmlformats.org/drawingml/2006/main" xmlns:r="http://schemas.openxmlformats.org/officeDocument/2006/relationships" xmlns:p="http://schemas.openxmlformats.org/presentationml/2006/main">
   <p:cSld>
     <p:spTree>
       <p:nvGrpSpPr>
@@ -2700,7 +2494,7 @@
         <p:nvSpPr>
           <p:cNvPr id="2" name="Slide Image Placeholder 1"/>
           <p:cNvSpPr>
-            <a:spLocks noGrp="1"/>
+            <a:spLocks noGrp="1" noRot="1" noChangeAspect="1"/>
           </p:cNvSpPr>
           <p:nvPr>
             <p:ph type="sldImg" idx="2"/>
@@ -2715,7 +2509,7 @@
             <a:spLocks noGrp="1"/>
           </p:cNvSpPr>
           <p:nvPr>
-            <p:ph type="body" idx="3" sz="quarter"/>
+            <p:ph type="body" sz="quarter" idx="3"/>
           </p:nvPr>
         </p:nvSpPr>
         <p:spPr/>
@@ -2736,7 +2530,7 @@
             <a:spLocks noGrp="1"/>
           </p:cNvSpPr>
           <p:nvPr>
-            <p:ph type="sldNum" idx="5" sz="quarter"/>
+            <p:ph type="sldNum" sz="quarter" idx="5"/>
           </p:nvPr>
         </p:nvSpPr>
         <p:spPr/>
@@ -2750,7 +2544,7 @@
 </file>
 
 <file path=ppt/notesSlides/notesSlide39.xml><?xml version="1.0" encoding="utf-8"?>
-<p:notes xmlns:a="http://schemas.openxmlformats.org/drawingml/2006/main" xmlns:p="http://schemas.openxmlformats.org/presentationml/2006/main" xmlns:r="http://schemas.openxmlformats.org/officeDocument/2006/relationships">
+<p:notes xmlns:a="http://schemas.openxmlformats.org/drawingml/2006/main" xmlns:r="http://schemas.openxmlformats.org/officeDocument/2006/relationships" xmlns:p="http://schemas.openxmlformats.org/presentationml/2006/main">
   <p:cSld>
     <p:spTree>
       <p:nvGrpSpPr>
@@ -2770,7 +2564,7 @@
         <p:nvSpPr>
           <p:cNvPr id="2" name="Slide Image Placeholder 1"/>
           <p:cNvSpPr>
-            <a:spLocks noGrp="1"/>
+            <a:spLocks noGrp="1" noRot="1" noChangeAspect="1"/>
           </p:cNvSpPr>
           <p:nvPr>
             <p:ph type="sldImg" idx="2"/>
@@ -2785,7 +2579,7 @@
             <a:spLocks noGrp="1"/>
           </p:cNvSpPr>
           <p:nvPr>
-            <p:ph type="body" idx="3" sz="quarter"/>
+            <p:ph type="body" sz="quarter" idx="3"/>
           </p:nvPr>
         </p:nvSpPr>
         <p:spPr/>
@@ -2806,7 +2600,7 @@
             <a:spLocks noGrp="1"/>
           </p:cNvSpPr>
           <p:nvPr>
-            <p:ph type="sldNum" idx="5" sz="quarter"/>
+            <p:ph type="sldNum" sz="quarter" idx="5"/>
           </p:nvPr>
         </p:nvSpPr>
         <p:spPr/>
@@ -2820,7 +2614,7 @@
 </file>
 
 <file path=ppt/notesSlides/notesSlide4.xml><?xml version="1.0" encoding="utf-8"?>
-<p:notes xmlns:a="http://schemas.openxmlformats.org/drawingml/2006/main" xmlns:p="http://schemas.openxmlformats.org/presentationml/2006/main" xmlns:r="http://schemas.openxmlformats.org/officeDocument/2006/relationships">
+<p:notes xmlns:a="http://schemas.openxmlformats.org/drawingml/2006/main" xmlns:r="http://schemas.openxmlformats.org/officeDocument/2006/relationships" xmlns:p="http://schemas.openxmlformats.org/presentationml/2006/main">
   <p:cSld>
     <p:spTree>
       <p:nvGrpSpPr>
@@ -2840,7 +2634,7 @@
         <p:nvSpPr>
           <p:cNvPr id="2" name="Slide Image Placeholder 1"/>
           <p:cNvSpPr>
-            <a:spLocks noGrp="1"/>
+            <a:spLocks noGrp="1" noRot="1" noChangeAspect="1"/>
           </p:cNvSpPr>
           <p:nvPr>
             <p:ph type="sldImg" idx="2"/>
@@ -2855,7 +2649,7 @@
             <a:spLocks noGrp="1"/>
           </p:cNvSpPr>
           <p:nvPr>
-            <p:ph type="body" idx="3" sz="quarter"/>
+            <p:ph type="body" sz="quarter" idx="3"/>
           </p:nvPr>
         </p:nvSpPr>
         <p:spPr/>
@@ -2876,7 +2670,7 @@
             <a:spLocks noGrp="1"/>
           </p:cNvSpPr>
           <p:nvPr>
-            <p:ph type="sldNum" idx="5" sz="quarter"/>
+            <p:ph type="sldNum" sz="quarter" idx="5"/>
           </p:nvPr>
         </p:nvSpPr>
         <p:spPr/>
@@ -2890,7 +2684,7 @@
 </file>
 
 <file path=ppt/notesSlides/notesSlide40.xml><?xml version="1.0" encoding="utf-8"?>
-<p:notes xmlns:a="http://schemas.openxmlformats.org/drawingml/2006/main" xmlns:p="http://schemas.openxmlformats.org/presentationml/2006/main" xmlns:r="http://schemas.openxmlformats.org/officeDocument/2006/relationships">
+<p:notes xmlns:a="http://schemas.openxmlformats.org/drawingml/2006/main" xmlns:r="http://schemas.openxmlformats.org/officeDocument/2006/relationships" xmlns:p="http://schemas.openxmlformats.org/presentationml/2006/main">
   <p:cSld>
     <p:spTree>
       <p:nvGrpSpPr>
@@ -2910,7 +2704,7 @@
         <p:nvSpPr>
           <p:cNvPr id="2" name="Slide Image Placeholder 1"/>
           <p:cNvSpPr>
-            <a:spLocks noGrp="1"/>
+            <a:spLocks noGrp="1" noRot="1" noChangeAspect="1"/>
           </p:cNvSpPr>
           <p:nvPr>
             <p:ph type="sldImg" idx="2"/>
@@ -2925,7 +2719,7 @@
             <a:spLocks noGrp="1"/>
           </p:cNvSpPr>
           <p:nvPr>
-            <p:ph type="body" idx="3" sz="quarter"/>
+            <p:ph type="body" sz="quarter" idx="3"/>
           </p:nvPr>
         </p:nvSpPr>
         <p:spPr/>
@@ -2946,7 +2740,7 @@
             <a:spLocks noGrp="1"/>
           </p:cNvSpPr>
           <p:nvPr>
-            <p:ph type="sldNum" idx="5" sz="quarter"/>
+            <p:ph type="sldNum" sz="quarter" idx="5"/>
           </p:nvPr>
         </p:nvSpPr>
         <p:spPr/>
@@ -2960,7 +2754,7 @@
 </file>
 
 <file path=ppt/notesSlides/notesSlide41.xml><?xml version="1.0" encoding="utf-8"?>
-<p:notes xmlns:a="http://schemas.openxmlformats.org/drawingml/2006/main" xmlns:p="http://schemas.openxmlformats.org/presentationml/2006/main" xmlns:r="http://schemas.openxmlformats.org/officeDocument/2006/relationships">
+<p:notes xmlns:a="http://schemas.openxmlformats.org/drawingml/2006/main" xmlns:r="http://schemas.openxmlformats.org/officeDocument/2006/relationships" xmlns:p="http://schemas.openxmlformats.org/presentationml/2006/main">
   <p:cSld>
     <p:spTree>
       <p:nvGrpSpPr>
@@ -2980,7 +2774,7 @@
         <p:nvSpPr>
           <p:cNvPr id="2" name="Slide Image Placeholder 1"/>
           <p:cNvSpPr>
-            <a:spLocks noGrp="1"/>
+            <a:spLocks noGrp="1" noRot="1" noChangeAspect="1"/>
           </p:cNvSpPr>
           <p:nvPr>
             <p:ph type="sldImg" idx="2"/>
@@ -2995,7 +2789,7 @@
             <a:spLocks noGrp="1"/>
           </p:cNvSpPr>
           <p:nvPr>
-            <p:ph type="body" idx="3" sz="quarter"/>
+            <p:ph type="body" sz="quarter" idx="3"/>
           </p:nvPr>
         </p:nvSpPr>
         <p:spPr/>
@@ -3016,7 +2810,7 @@
             <a:spLocks noGrp="1"/>
           </p:cNvSpPr>
           <p:nvPr>
-            <p:ph type="sldNum" idx="5" sz="quarter"/>
+            <p:ph type="sldNum" sz="quarter" idx="5"/>
           </p:nvPr>
         </p:nvSpPr>
         <p:spPr/>
@@ -3030,7 +2824,7 @@
 </file>
 
 <file path=ppt/notesSlides/notesSlide42.xml><?xml version="1.0" encoding="utf-8"?>
-<p:notes xmlns:a="http://schemas.openxmlformats.org/drawingml/2006/main" xmlns:p="http://schemas.openxmlformats.org/presentationml/2006/main" xmlns:r="http://schemas.openxmlformats.org/officeDocument/2006/relationships">
+<p:notes xmlns:a="http://schemas.openxmlformats.org/drawingml/2006/main" xmlns:r="http://schemas.openxmlformats.org/officeDocument/2006/relationships" xmlns:p="http://schemas.openxmlformats.org/presentationml/2006/main">
   <p:cSld>
     <p:spTree>
       <p:nvGrpSpPr>
@@ -3050,7 +2844,7 @@
         <p:nvSpPr>
           <p:cNvPr id="2" name="Slide Image Placeholder 1"/>
           <p:cNvSpPr>
-            <a:spLocks noGrp="1"/>
+            <a:spLocks noGrp="1" noRot="1" noChangeAspect="1"/>
           </p:cNvSpPr>
           <p:nvPr>
             <p:ph type="sldImg" idx="2"/>
@@ -3065,7 +2859,7 @@
             <a:spLocks noGrp="1"/>
           </p:cNvSpPr>
           <p:nvPr>
-            <p:ph type="body" idx="3" sz="quarter"/>
+            <p:ph type="body" sz="quarter" idx="3"/>
           </p:nvPr>
         </p:nvSpPr>
         <p:spPr/>
@@ -3086,7 +2880,7 @@
             <a:spLocks noGrp="1"/>
           </p:cNvSpPr>
           <p:nvPr>
-            <p:ph type="sldNum" idx="5" sz="quarter"/>
+            <p:ph type="sldNum" sz="quarter" idx="5"/>
           </p:nvPr>
         </p:nvSpPr>
         <p:spPr/>
@@ -3100,7 +2894,7 @@
 </file>
 
 <file path=ppt/notesSlides/notesSlide43.xml><?xml version="1.0" encoding="utf-8"?>
-<p:notes xmlns:a="http://schemas.openxmlformats.org/drawingml/2006/main" xmlns:p="http://schemas.openxmlformats.org/presentationml/2006/main" xmlns:r="http://schemas.openxmlformats.org/officeDocument/2006/relationships">
+<p:notes xmlns:a="http://schemas.openxmlformats.org/drawingml/2006/main" xmlns:r="http://schemas.openxmlformats.org/officeDocument/2006/relationships" xmlns:p="http://schemas.openxmlformats.org/presentationml/2006/main">
   <p:cSld>
     <p:spTree>
       <p:nvGrpSpPr>
@@ -3120,7 +2914,7 @@
         <p:nvSpPr>
           <p:cNvPr id="2" name="Slide Image Placeholder 1"/>
           <p:cNvSpPr>
-            <a:spLocks noGrp="1"/>
+            <a:spLocks noGrp="1" noRot="1" noChangeAspect="1"/>
           </p:cNvSpPr>
           <p:nvPr>
             <p:ph type="sldImg" idx="2"/>
@@ -3135,7 +2929,7 @@
             <a:spLocks noGrp="1"/>
           </p:cNvSpPr>
           <p:nvPr>
-            <p:ph type="body" idx="3" sz="quarter"/>
+            <p:ph type="body" sz="quarter" idx="3"/>
           </p:nvPr>
         </p:nvSpPr>
         <p:spPr/>
@@ -3156,7 +2950,7 @@
             <a:spLocks noGrp="1"/>
           </p:cNvSpPr>
           <p:nvPr>
-            <p:ph type="sldNum" idx="5" sz="quarter"/>
+            <p:ph type="sldNum" sz="quarter" idx="5"/>
           </p:nvPr>
         </p:nvSpPr>
         <p:spPr/>
@@ -3170,7 +2964,7 @@
 </file>
 
 <file path=ppt/notesSlides/notesSlide44.xml><?xml version="1.0" encoding="utf-8"?>
-<p:notes xmlns:a="http://schemas.openxmlformats.org/drawingml/2006/main" xmlns:p="http://schemas.openxmlformats.org/presentationml/2006/main" xmlns:r="http://schemas.openxmlformats.org/officeDocument/2006/relationships">
+<p:notes xmlns:a="http://schemas.openxmlformats.org/drawingml/2006/main" xmlns:r="http://schemas.openxmlformats.org/officeDocument/2006/relationships" xmlns:p="http://schemas.openxmlformats.org/presentationml/2006/main">
   <p:cSld>
     <p:spTree>
       <p:nvGrpSpPr>
@@ -3190,7 +2984,7 @@
         <p:nvSpPr>
           <p:cNvPr id="2" name="Slide Image Placeholder 1"/>
           <p:cNvSpPr>
-            <a:spLocks noGrp="1"/>
+            <a:spLocks noGrp="1" noRot="1" noChangeAspect="1"/>
           </p:cNvSpPr>
           <p:nvPr>
             <p:ph type="sldImg" idx="2"/>
@@ -3205,7 +2999,7 @@
             <a:spLocks noGrp="1"/>
           </p:cNvSpPr>
           <p:nvPr>
-            <p:ph type="body" idx="3" sz="quarter"/>
+            <p:ph type="body" sz="quarter" idx="3"/>
           </p:nvPr>
         </p:nvSpPr>
         <p:spPr/>
@@ -3226,7 +3020,7 @@
             <a:spLocks noGrp="1"/>
           </p:cNvSpPr>
           <p:nvPr>
-            <p:ph type="sldNum" idx="5" sz="quarter"/>
+            <p:ph type="sldNum" sz="quarter" idx="5"/>
           </p:nvPr>
         </p:nvSpPr>
         <p:spPr/>
@@ -3240,7 +3034,7 @@
 </file>
 
 <file path=ppt/notesSlides/notesSlide45.xml><?xml version="1.0" encoding="utf-8"?>
-<p:notes xmlns:a="http://schemas.openxmlformats.org/drawingml/2006/main" xmlns:p="http://schemas.openxmlformats.org/presentationml/2006/main" xmlns:r="http://schemas.openxmlformats.org/officeDocument/2006/relationships">
+<p:notes xmlns:a="http://schemas.openxmlformats.org/drawingml/2006/main" xmlns:r="http://schemas.openxmlformats.org/officeDocument/2006/relationships" xmlns:p="http://schemas.openxmlformats.org/presentationml/2006/main">
   <p:cSld>
     <p:spTree>
       <p:nvGrpSpPr>
@@ -3260,7 +3054,7 @@
         <p:nvSpPr>
           <p:cNvPr id="2" name="Slide Image Placeholder 1"/>
           <p:cNvSpPr>
-            <a:spLocks noGrp="1"/>
+            <a:spLocks noGrp="1" noRot="1" noChangeAspect="1"/>
           </p:cNvSpPr>
           <p:nvPr>
             <p:ph type="sldImg" idx="2"/>
@@ -3275,7 +3069,7 @@
             <a:spLocks noGrp="1"/>
           </p:cNvSpPr>
           <p:nvPr>
-            <p:ph type="body" idx="3" sz="quarter"/>
+            <p:ph type="body" sz="quarter" idx="3"/>
           </p:nvPr>
         </p:nvSpPr>
         <p:spPr/>
@@ -3296,7 +3090,7 @@
             <a:spLocks noGrp="1"/>
           </p:cNvSpPr>
           <p:nvPr>
-            <p:ph type="sldNum" idx="5" sz="quarter"/>
+            <p:ph type="sldNum" sz="quarter" idx="5"/>
           </p:nvPr>
         </p:nvSpPr>
         <p:spPr/>
@@ -3310,7 +3104,7 @@
 </file>
 
 <file path=ppt/notesSlides/notesSlide46.xml><?xml version="1.0" encoding="utf-8"?>
-<p:notes xmlns:a="http://schemas.openxmlformats.org/drawingml/2006/main" xmlns:p="http://schemas.openxmlformats.org/presentationml/2006/main" xmlns:r="http://schemas.openxmlformats.org/officeDocument/2006/relationships">
+<p:notes xmlns:a="http://schemas.openxmlformats.org/drawingml/2006/main" xmlns:r="http://schemas.openxmlformats.org/officeDocument/2006/relationships" xmlns:p="http://schemas.openxmlformats.org/presentationml/2006/main">
   <p:cSld>
     <p:spTree>
       <p:nvGrpSpPr>
@@ -3330,7 +3124,7 @@
         <p:nvSpPr>
           <p:cNvPr id="2" name="Slide Image Placeholder 1"/>
           <p:cNvSpPr>
-            <a:spLocks noGrp="1"/>
+            <a:spLocks noGrp="1" noRot="1" noChangeAspect="1"/>
           </p:cNvSpPr>
           <p:nvPr>
             <p:ph type="sldImg" idx="2"/>
@@ -3345,7 +3139,7 @@
             <a:spLocks noGrp="1"/>
           </p:cNvSpPr>
           <p:nvPr>
-            <p:ph type="body" idx="3" sz="quarter"/>
+            <p:ph type="body" sz="quarter" idx="3"/>
           </p:nvPr>
         </p:nvSpPr>
         <p:spPr/>
@@ -3366,7 +3160,7 @@
             <a:spLocks noGrp="1"/>
           </p:cNvSpPr>
           <p:nvPr>
-            <p:ph type="sldNum" idx="5" sz="quarter"/>
+            <p:ph type="sldNum" sz="quarter" idx="5"/>
           </p:nvPr>
         </p:nvSpPr>
         <p:spPr/>
@@ -3380,7 +3174,7 @@
 </file>
 
 <file path=ppt/notesSlides/notesSlide47.xml><?xml version="1.0" encoding="utf-8"?>
-<p:notes xmlns:a="http://schemas.openxmlformats.org/drawingml/2006/main" xmlns:p="http://schemas.openxmlformats.org/presentationml/2006/main" xmlns:r="http://schemas.openxmlformats.org/officeDocument/2006/relationships">
+<p:notes xmlns:a="http://schemas.openxmlformats.org/drawingml/2006/main" xmlns:r="http://schemas.openxmlformats.org/officeDocument/2006/relationships" xmlns:p="http://schemas.openxmlformats.org/presentationml/2006/main">
   <p:cSld>
     <p:spTree>
       <p:nvGrpSpPr>
@@ -3400,7 +3194,7 @@
         <p:nvSpPr>
           <p:cNvPr id="2" name="Slide Image Placeholder 1"/>
           <p:cNvSpPr>
-            <a:spLocks noGrp="1"/>
+            <a:spLocks noGrp="1" noRot="1" noChangeAspect="1"/>
           </p:cNvSpPr>
           <p:nvPr>
             <p:ph type="sldImg" idx="2"/>
@@ -3415,7 +3209,7 @@
             <a:spLocks noGrp="1"/>
           </p:cNvSpPr>
           <p:nvPr>
-            <p:ph type="body" idx="3" sz="quarter"/>
+            <p:ph type="body" sz="quarter" idx="3"/>
           </p:nvPr>
         </p:nvSpPr>
         <p:spPr/>
@@ -3436,7 +3230,7 @@
             <a:spLocks noGrp="1"/>
           </p:cNvSpPr>
           <p:nvPr>
-            <p:ph type="sldNum" idx="5" sz="quarter"/>
+            <p:ph type="sldNum" sz="quarter" idx="5"/>
           </p:nvPr>
         </p:nvSpPr>
         <p:spPr/>
@@ -3450,7 +3244,7 @@
 </file>
 
 <file path=ppt/notesSlides/notesSlide48.xml><?xml version="1.0" encoding="utf-8"?>
-<p:notes xmlns:a="http://schemas.openxmlformats.org/drawingml/2006/main" xmlns:p="http://schemas.openxmlformats.org/presentationml/2006/main" xmlns:r="http://schemas.openxmlformats.org/officeDocument/2006/relationships">
+<p:notes xmlns:a="http://schemas.openxmlformats.org/drawingml/2006/main" xmlns:r="http://schemas.openxmlformats.org/officeDocument/2006/relationships" xmlns:p="http://schemas.openxmlformats.org/presentationml/2006/main">
   <p:cSld>
     <p:spTree>
       <p:nvGrpSpPr>
@@ -3470,7 +3264,7 @@
         <p:nvSpPr>
           <p:cNvPr id="2" name="Slide Image Placeholder 1"/>
           <p:cNvSpPr>
-            <a:spLocks noGrp="1"/>
+            <a:spLocks noGrp="1" noRot="1" noChangeAspect="1"/>
           </p:cNvSpPr>
           <p:nvPr>
             <p:ph type="sldImg" idx="2"/>
@@ -3485,7 +3279,7 @@
             <a:spLocks noGrp="1"/>
           </p:cNvSpPr>
           <p:nvPr>
-            <p:ph type="body" idx="3" sz="quarter"/>
+            <p:ph type="body" sz="quarter" idx="3"/>
           </p:nvPr>
         </p:nvSpPr>
         <p:spPr/>
@@ -3506,7 +3300,7 @@
             <a:spLocks noGrp="1"/>
           </p:cNvSpPr>
           <p:nvPr>
-            <p:ph type="sldNum" idx="5" sz="quarter"/>
+            <p:ph type="sldNum" sz="quarter" idx="5"/>
           </p:nvPr>
         </p:nvSpPr>
         <p:spPr/>
@@ -3520,7 +3314,7 @@
 </file>
 
 <file path=ppt/notesSlides/notesSlide49.xml><?xml version="1.0" encoding="utf-8"?>
-<p:notes xmlns:a="http://schemas.openxmlformats.org/drawingml/2006/main" xmlns:p="http://schemas.openxmlformats.org/presentationml/2006/main" xmlns:r="http://schemas.openxmlformats.org/officeDocument/2006/relationships">
+<p:notes xmlns:a="http://schemas.openxmlformats.org/drawingml/2006/main" xmlns:r="http://schemas.openxmlformats.org/officeDocument/2006/relationships" xmlns:p="http://schemas.openxmlformats.org/presentationml/2006/main">
   <p:cSld>
     <p:spTree>
       <p:nvGrpSpPr>
@@ -3540,7 +3334,7 @@
         <p:nvSpPr>
           <p:cNvPr id="2" name="Slide Image Placeholder 1"/>
           <p:cNvSpPr>
-            <a:spLocks noGrp="1"/>
+            <a:spLocks noGrp="1" noRot="1" noChangeAspect="1"/>
           </p:cNvSpPr>
           <p:nvPr>
             <p:ph type="sldImg" idx="2"/>
@@ -3555,7 +3349,7 @@
             <a:spLocks noGrp="1"/>
           </p:cNvSpPr>
           <p:nvPr>
-            <p:ph type="body" idx="3" sz="quarter"/>
+            <p:ph type="body" sz="quarter" idx="3"/>
           </p:nvPr>
         </p:nvSpPr>
         <p:spPr/>
@@ -3576,7 +3370,7 @@
             <a:spLocks noGrp="1"/>
           </p:cNvSpPr>
           <p:nvPr>
-            <p:ph type="sldNum" idx="5" sz="quarter"/>
+            <p:ph type="sldNum" sz="quarter" idx="5"/>
           </p:nvPr>
         </p:nvSpPr>
         <p:spPr/>
@@ -3590,7 +3384,7 @@
 </file>
 
 <file path=ppt/notesSlides/notesSlide5.xml><?xml version="1.0" encoding="utf-8"?>
-<p:notes xmlns:a="http://schemas.openxmlformats.org/drawingml/2006/main" xmlns:p="http://schemas.openxmlformats.org/presentationml/2006/main" xmlns:r="http://schemas.openxmlformats.org/officeDocument/2006/relationships">
+<p:notes xmlns:a="http://schemas.openxmlformats.org/drawingml/2006/main" xmlns:r="http://schemas.openxmlformats.org/officeDocument/2006/relationships" xmlns:p="http://schemas.openxmlformats.org/presentationml/2006/main">
   <p:cSld>
     <p:spTree>
       <p:nvGrpSpPr>
@@ -3610,7 +3404,7 @@
         <p:nvSpPr>
           <p:cNvPr id="2" name="Slide Image Placeholder 1"/>
           <p:cNvSpPr>
-            <a:spLocks noGrp="1"/>
+            <a:spLocks noGrp="1" noRot="1" noChangeAspect="1"/>
           </p:cNvSpPr>
           <p:nvPr>
             <p:ph type="sldImg" idx="2"/>
@@ -3625,7 +3419,7 @@
             <a:spLocks noGrp="1"/>
           </p:cNvSpPr>
           <p:nvPr>
-            <p:ph type="body" idx="3" sz="quarter"/>
+            <p:ph type="body" sz="quarter" idx="3"/>
           </p:nvPr>
         </p:nvSpPr>
         <p:spPr/>
@@ -3646,7 +3440,7 @@
             <a:spLocks noGrp="1"/>
           </p:cNvSpPr>
           <p:nvPr>
-            <p:ph type="sldNum" idx="5" sz="quarter"/>
+            <p:ph type="sldNum" sz="quarter" idx="5"/>
           </p:nvPr>
         </p:nvSpPr>
         <p:spPr/>
@@ -3660,7 +3454,7 @@
 </file>
 
 <file path=ppt/notesSlides/notesSlide50.xml><?xml version="1.0" encoding="utf-8"?>
-<p:notes xmlns:a="http://schemas.openxmlformats.org/drawingml/2006/main" xmlns:p="http://schemas.openxmlformats.org/presentationml/2006/main" xmlns:r="http://schemas.openxmlformats.org/officeDocument/2006/relationships">
+<p:notes xmlns:a="http://schemas.openxmlformats.org/drawingml/2006/main" xmlns:r="http://schemas.openxmlformats.org/officeDocument/2006/relationships" xmlns:p="http://schemas.openxmlformats.org/presentationml/2006/main">
   <p:cSld>
     <p:spTree>
       <p:nvGrpSpPr>
@@ -3680,7 +3474,7 @@
         <p:nvSpPr>
           <p:cNvPr id="2" name="Slide Image Placeholder 1"/>
           <p:cNvSpPr>
-            <a:spLocks noGrp="1"/>
+            <a:spLocks noGrp="1" noRot="1" noChangeAspect="1"/>
           </p:cNvSpPr>
           <p:nvPr>
             <p:ph type="sldImg" idx="2"/>
@@ -3695,7 +3489,7 @@
             <a:spLocks noGrp="1"/>
           </p:cNvSpPr>
           <p:nvPr>
-            <p:ph type="body" idx="3" sz="quarter"/>
+            <p:ph type="body" sz="quarter" idx="3"/>
           </p:nvPr>
         </p:nvSpPr>
         <p:spPr/>
@@ -3716,7 +3510,7 @@
             <a:spLocks noGrp="1"/>
           </p:cNvSpPr>
           <p:nvPr>
-            <p:ph type="sldNum" idx="5" sz="quarter"/>
+            <p:ph type="sldNum" sz="quarter" idx="5"/>
           </p:nvPr>
         </p:nvSpPr>
         <p:spPr/>
@@ -3730,7 +3524,7 @@
 </file>
 
 <file path=ppt/notesSlides/notesSlide51.xml><?xml version="1.0" encoding="utf-8"?>
-<p:notes xmlns:a="http://schemas.openxmlformats.org/drawingml/2006/main" xmlns:p="http://schemas.openxmlformats.org/presentationml/2006/main" xmlns:r="http://schemas.openxmlformats.org/officeDocument/2006/relationships">
+<p:notes xmlns:a="http://schemas.openxmlformats.org/drawingml/2006/main" xmlns:r="http://schemas.openxmlformats.org/officeDocument/2006/relationships" xmlns:p="http://schemas.openxmlformats.org/presentationml/2006/main">
   <p:cSld>
     <p:spTree>
       <p:nvGrpSpPr>
@@ -3750,7 +3544,7 @@
         <p:nvSpPr>
           <p:cNvPr id="2" name="Slide Image Placeholder 1"/>
           <p:cNvSpPr>
-            <a:spLocks noGrp="1"/>
+            <a:spLocks noGrp="1" noRot="1" noChangeAspect="1"/>
           </p:cNvSpPr>
           <p:nvPr>
             <p:ph type="sldImg" idx="2"/>
@@ -3765,7 +3559,7 @@
             <a:spLocks noGrp="1"/>
           </p:cNvSpPr>
           <p:nvPr>
-            <p:ph type="body" idx="3" sz="quarter"/>
+            <p:ph type="body" sz="quarter" idx="3"/>
           </p:nvPr>
         </p:nvSpPr>
         <p:spPr/>
@@ -3786,7 +3580,7 @@
             <a:spLocks noGrp="1"/>
           </p:cNvSpPr>
           <p:nvPr>
-            <p:ph type="sldNum" idx="5" sz="quarter"/>
+            <p:ph type="sldNum" sz="quarter" idx="5"/>
           </p:nvPr>
         </p:nvSpPr>
         <p:spPr/>
@@ -3800,7 +3594,7 @@
 </file>
 
 <file path=ppt/notesSlides/notesSlide52.xml><?xml version="1.0" encoding="utf-8"?>
-<p:notes xmlns:a="http://schemas.openxmlformats.org/drawingml/2006/main" xmlns:p="http://schemas.openxmlformats.org/presentationml/2006/main" xmlns:r="http://schemas.openxmlformats.org/officeDocument/2006/relationships">
+<p:notes xmlns:a="http://schemas.openxmlformats.org/drawingml/2006/main" xmlns:r="http://schemas.openxmlformats.org/officeDocument/2006/relationships" xmlns:p="http://schemas.openxmlformats.org/presentationml/2006/main">
   <p:cSld>
     <p:spTree>
       <p:nvGrpSpPr>
@@ -3820,7 +3614,7 @@
         <p:nvSpPr>
           <p:cNvPr id="2" name="Slide Image Placeholder 1"/>
           <p:cNvSpPr>
-            <a:spLocks noGrp="1"/>
+            <a:spLocks noGrp="1" noRot="1" noChangeAspect="1"/>
           </p:cNvSpPr>
           <p:nvPr>
             <p:ph type="sldImg" idx="2"/>
@@ -3835,7 +3629,7 @@
             <a:spLocks noGrp="1"/>
           </p:cNvSpPr>
           <p:nvPr>
-            <p:ph type="body" idx="3" sz="quarter"/>
+            <p:ph type="body" sz="quarter" idx="3"/>
           </p:nvPr>
         </p:nvSpPr>
         <p:spPr/>
@@ -3856,7 +3650,7 @@
             <a:spLocks noGrp="1"/>
           </p:cNvSpPr>
           <p:nvPr>
-            <p:ph type="sldNum" idx="5" sz="quarter"/>
+            <p:ph type="sldNum" sz="quarter" idx="5"/>
           </p:nvPr>
         </p:nvSpPr>
         <p:spPr/>
@@ -3870,7 +3664,7 @@
 </file>
 
 <file path=ppt/notesSlides/notesSlide53.xml><?xml version="1.0" encoding="utf-8"?>
-<p:notes xmlns:a="http://schemas.openxmlformats.org/drawingml/2006/main" xmlns:p="http://schemas.openxmlformats.org/presentationml/2006/main" xmlns:r="http://schemas.openxmlformats.org/officeDocument/2006/relationships">
+<p:notes xmlns:a="http://schemas.openxmlformats.org/drawingml/2006/main" xmlns:r="http://schemas.openxmlformats.org/officeDocument/2006/relationships" xmlns:p="http://schemas.openxmlformats.org/presentationml/2006/main">
   <p:cSld>
     <p:spTree>
       <p:nvGrpSpPr>
@@ -3890,7 +3684,7 @@
         <p:nvSpPr>
           <p:cNvPr id="2" name="Slide Image Placeholder 1"/>
           <p:cNvSpPr>
-            <a:spLocks noGrp="1"/>
+            <a:spLocks noGrp="1" noRot="1" noChangeAspect="1"/>
           </p:cNvSpPr>
           <p:nvPr>
             <p:ph type="sldImg" idx="2"/>
@@ -3905,7 +3699,7 @@
             <a:spLocks noGrp="1"/>
           </p:cNvSpPr>
           <p:nvPr>
-            <p:ph type="body" idx="3" sz="quarter"/>
+            <p:ph type="body" sz="quarter" idx="3"/>
           </p:nvPr>
         </p:nvSpPr>
         <p:spPr/>
@@ -3926,7 +3720,7 @@
             <a:spLocks noGrp="1"/>
           </p:cNvSpPr>
           <p:nvPr>
-            <p:ph type="sldNum" idx="5" sz="quarter"/>
+            <p:ph type="sldNum" sz="quarter" idx="5"/>
           </p:nvPr>
         </p:nvSpPr>
         <p:spPr/>
@@ -3940,7 +3734,7 @@
 </file>
 
 <file path=ppt/notesSlides/notesSlide6.xml><?xml version="1.0" encoding="utf-8"?>
-<p:notes xmlns:a="http://schemas.openxmlformats.org/drawingml/2006/main" xmlns:p="http://schemas.openxmlformats.org/presentationml/2006/main" xmlns:r="http://schemas.openxmlformats.org/officeDocument/2006/relationships">
+<p:notes xmlns:a="http://schemas.openxmlformats.org/drawingml/2006/main" xmlns:r="http://schemas.openxmlformats.org/officeDocument/2006/relationships" xmlns:p="http://schemas.openxmlformats.org/presentationml/2006/main">
   <p:cSld>
     <p:spTree>
       <p:nvGrpSpPr>
@@ -3960,7 +3754,7 @@
         <p:nvSpPr>
           <p:cNvPr id="2" name="Slide Image Placeholder 1"/>
           <p:cNvSpPr>
-            <a:spLocks noGrp="1"/>
+            <a:spLocks noGrp="1" noRot="1" noChangeAspect="1"/>
           </p:cNvSpPr>
           <p:nvPr>
             <p:ph type="sldImg" idx="2"/>
@@ -3975,7 +3769,7 @@
             <a:spLocks noGrp="1"/>
           </p:cNvSpPr>
           <p:nvPr>
-            <p:ph type="body" idx="3" sz="quarter"/>
+            <p:ph type="body" sz="quarter" idx="3"/>
           </p:nvPr>
         </p:nvSpPr>
         <p:spPr/>
@@ -3984,7 +3778,7 @@
           <a:lstStyle/>
           <a:p>
             <a:r>
-              <a:t>표 형태로 여섯 가지 관점을 비교한다. 특히 권한 항목은 실무 사고의 단골 원인이므로 시간을 들여 설명한다. 롤로만 권한을 받은 계정이 정의자 권한 프로시저 안에서 정적 SQL을 실행하면 ORA-01031 이 나지만, 같은 문장을 동적으로 실행하면 성공한다. 반대로 이 성질에 기대어 코드를 짜면 나중에 AUTHID 를 바꾸는 순간 동작이 달라진다. 편법이 아니라 이해하고 선택해야 할 설계 요소임을 강조한다.</a:t>
+              <a:t>표 형태로 여섯 가지 관점을 비교한다. 특히 권한 항목은 실무 사고의 단골 원인이므로 시간을 들여 설명한다. 롤로만 권한을 받은 계정이 정의자 권한 프로시저 안에서 정적 SQL을 실행하면 ORA-01031 이 난다. 같은 문장을 동적으로 바꿔도 결과는 같고, 실패 시점만 컴파일에서 실행으로 옮겨진다. 정의자 권한 단위에서는 롤이 통째로 비활성화되기 때문이다. 헷갈리는 지점은 여기다. 같은 계정이 SQL*Plus 익명 블록에서 실행하면 롤이 살아 있어 성공한다. 그래서 '수동으로는 되는데 프로시저에 넣으면 안 되는' 현상이 생긴다. AUTHID CURRENT_USER 로 바꾸면 호출자의 롤을 쓰므로 또 달라진다. 자동화 계정에는 롤이 아니라 필요한 객체에 직접 GRANT 를 받아 두는 것이 정답임을 강조한다.</a:t>
             </a:r>
           </a:p>
         </p:txBody>
@@ -3996,7 +3790,7 @@
             <a:spLocks noGrp="1"/>
           </p:cNvSpPr>
           <p:nvPr>
-            <p:ph type="sldNum" idx="5" sz="quarter"/>
+            <p:ph type="sldNum" sz="quarter" idx="5"/>
           </p:nvPr>
         </p:nvSpPr>
         <p:spPr/>
@@ -4010,7 +3804,7 @@
 </file>
 
 <file path=ppt/notesSlides/notesSlide7.xml><?xml version="1.0" encoding="utf-8"?>
-<p:notes xmlns:a="http://schemas.openxmlformats.org/drawingml/2006/main" xmlns:p="http://schemas.openxmlformats.org/presentationml/2006/main" xmlns:r="http://schemas.openxmlformats.org/officeDocument/2006/relationships">
+<p:notes xmlns:a="http://schemas.openxmlformats.org/drawingml/2006/main" xmlns:r="http://schemas.openxmlformats.org/officeDocument/2006/relationships" xmlns:p="http://schemas.openxmlformats.org/presentationml/2006/main">
   <p:cSld>
     <p:spTree>
       <p:nvGrpSpPr>
@@ -4030,7 +3824,7 @@
         <p:nvSpPr>
           <p:cNvPr id="2" name="Slide Image Placeholder 1"/>
           <p:cNvSpPr>
-            <a:spLocks noGrp="1"/>
+            <a:spLocks noGrp="1" noRot="1" noChangeAspect="1"/>
           </p:cNvSpPr>
           <p:nvPr>
             <p:ph type="sldImg" idx="2"/>
@@ -4045,7 +3839,7 @@
             <a:spLocks noGrp="1"/>
           </p:cNvSpPr>
           <p:nvPr>
-            <p:ph type="body" idx="3" sz="quarter"/>
+            <p:ph type="body" sz="quarter" idx="3"/>
           </p:nvPr>
         </p:nvSpPr>
         <p:spPr/>
@@ -4066,7 +3860,7 @@
             <a:spLocks noGrp="1"/>
           </p:cNvSpPr>
           <p:nvPr>
-            <p:ph type="sldNum" idx="5" sz="quarter"/>
+            <p:ph type="sldNum" sz="quarter" idx="5"/>
           </p:nvPr>
         </p:nvSpPr>
         <p:spPr/>
@@ -4080,7 +3874,7 @@
 </file>
 
 <file path=ppt/notesSlides/notesSlide8.xml><?xml version="1.0" encoding="utf-8"?>
-<p:notes xmlns:a="http://schemas.openxmlformats.org/drawingml/2006/main" xmlns:p="http://schemas.openxmlformats.org/presentationml/2006/main" xmlns:r="http://schemas.openxmlformats.org/officeDocument/2006/relationships">
+<p:notes xmlns:a="http://schemas.openxmlformats.org/drawingml/2006/main" xmlns:r="http://schemas.openxmlformats.org/officeDocument/2006/relationships" xmlns:p="http://schemas.openxmlformats.org/presentationml/2006/main">
   <p:cSld>
     <p:spTree>
       <p:nvGrpSpPr>
@@ -4100,7 +3894,7 @@
         <p:nvSpPr>
           <p:cNvPr id="2" name="Slide Image Placeholder 1"/>
           <p:cNvSpPr>
-            <a:spLocks noGrp="1"/>
+            <a:spLocks noGrp="1" noRot="1" noChangeAspect="1"/>
           </p:cNvSpPr>
           <p:nvPr>
             <p:ph type="sldImg" idx="2"/>
@@ -4115,7 +3909,7 @@
             <a:spLocks noGrp="1"/>
           </p:cNvSpPr>
           <p:nvPr>
-            <p:ph type="body" idx="3" sz="quarter"/>
+            <p:ph type="body" sz="quarter" idx="3"/>
           </p:nvPr>
         </p:nvSpPr>
         <p:spPr/>
@@ -4136,7 +3930,7 @@
             <a:spLocks noGrp="1"/>
           </p:cNvSpPr>
           <p:nvPr>
-            <p:ph type="sldNum" idx="5" sz="quarter"/>
+            <p:ph type="sldNum" sz="quarter" idx="5"/>
           </p:nvPr>
         </p:nvSpPr>
         <p:spPr/>
@@ -4150,7 +3944,7 @@
 </file>
 
 <file path=ppt/notesSlides/notesSlide9.xml><?xml version="1.0" encoding="utf-8"?>
-<p:notes xmlns:a="http://schemas.openxmlformats.org/drawingml/2006/main" xmlns:p="http://schemas.openxmlformats.org/presentationml/2006/main" xmlns:r="http://schemas.openxmlformats.org/officeDocument/2006/relationships">
+<p:notes xmlns:a="http://schemas.openxmlformats.org/drawingml/2006/main" xmlns:r="http://schemas.openxmlformats.org/officeDocument/2006/relationships" xmlns:p="http://schemas.openxmlformats.org/presentationml/2006/main">
   <p:cSld>
     <p:spTree>
       <p:nvGrpSpPr>
@@ -4170,7 +3964,7 @@
         <p:nvSpPr>
           <p:cNvPr id="2" name="Slide Image Placeholder 1"/>
           <p:cNvSpPr>
-            <a:spLocks noGrp="1"/>
+            <a:spLocks noGrp="1" noRot="1" noChangeAspect="1"/>
           </p:cNvSpPr>
           <p:nvPr>
             <p:ph type="sldImg" idx="2"/>
@@ -4185,7 +3979,7 @@
             <a:spLocks noGrp="1"/>
           </p:cNvSpPr>
           <p:nvPr>
-            <p:ph type="body" idx="3" sz="quarter"/>
+            <p:ph type="body" sz="quarter" idx="3"/>
           </p:nvPr>
         </p:nvSpPr>
         <p:spPr/>
@@ -4206,7 +4000,7 @@
             <a:spLocks noGrp="1"/>
           </p:cNvSpPr>
           <p:nvPr>
-            <p:ph type="sldNum" idx="5" sz="quarter"/>
+            <p:ph type="sldNum" sz="quarter" idx="5"/>
           </p:nvPr>
         </p:nvSpPr>
         <p:spPr/>
@@ -4257,10 +4051,9 @@
           <a:lstStyle/>
           <a:p>
             <a:r>
-              <a:rPr lang="en-US" smtClean="0"/>
+              <a:rPr lang="en-US"/>
               <a:t>Click to edit Master title style</a:t>
             </a:r>
-            <a:endParaRPr lang="en-US"/>
           </a:p>
         </p:txBody>
       </p:sp>
@@ -4376,10 +4169,9 @@
           </a:lstStyle>
           <a:p>
             <a:r>
-              <a:rPr lang="en-US" smtClean="0"/>
+              <a:rPr lang="en-US"/>
               <a:t>Click to edit Master subtitle style</a:t>
             </a:r>
-            <a:endParaRPr lang="en-US"/>
           </a:p>
         </p:txBody>
       </p:sp>
@@ -4400,7 +4192,7 @@
           <a:p>
             <a:fld id="{5BCAD085-E8A6-8845-BD4E-CB4CCA059FC4}" type="datetimeFigureOut">
               <a:rPr lang="en-US" smtClean="0"/>
-              <a:t>1/27/13</a:t>
+              <a:t>8/19/2026</a:t>
             </a:fld>
             <a:endParaRPr lang="en-US"/>
           </a:p>
@@ -4494,10 +4286,9 @@
           <a:lstStyle/>
           <a:p>
             <a:r>
-              <a:rPr lang="en-US" smtClean="0"/>
+              <a:rPr lang="en-US"/>
               <a:t>Click to edit Master title style</a:t>
             </a:r>
-            <a:endParaRPr lang="en-US"/>
           </a:p>
         </p:txBody>
       </p:sp>
@@ -4518,38 +4309,37 @@
           <a:p>
             <a:pPr lvl="0"/>
             <a:r>
-              <a:rPr lang="en-US" smtClean="0"/>
+              <a:rPr lang="en-US"/>
               <a:t>Click to edit Master text styles</a:t>
             </a:r>
           </a:p>
           <a:p>
             <a:pPr lvl="1"/>
             <a:r>
-              <a:rPr lang="en-US" smtClean="0"/>
+              <a:rPr lang="en-US"/>
               <a:t>Second level</a:t>
             </a:r>
           </a:p>
           <a:p>
             <a:pPr lvl="2"/>
             <a:r>
-              <a:rPr lang="en-US" smtClean="0"/>
+              <a:rPr lang="en-US"/>
               <a:t>Third level</a:t>
             </a:r>
           </a:p>
           <a:p>
             <a:pPr lvl="3"/>
             <a:r>
-              <a:rPr lang="en-US" smtClean="0"/>
+              <a:rPr lang="en-US"/>
               <a:t>Fourth level</a:t>
             </a:r>
           </a:p>
           <a:p>
             <a:pPr lvl="4"/>
             <a:r>
-              <a:rPr lang="en-US" smtClean="0"/>
+              <a:rPr lang="en-US"/>
               <a:t>Fifth level</a:t>
             </a:r>
-            <a:endParaRPr lang="en-US"/>
           </a:p>
         </p:txBody>
       </p:sp>
@@ -4570,7 +4360,7 @@
           <a:p>
             <a:fld id="{5BCAD085-E8A6-8845-BD4E-CB4CCA059FC4}" type="datetimeFigureOut">
               <a:rPr lang="en-US" smtClean="0"/>
-              <a:t>1/27/13</a:t>
+              <a:t>8/19/2026</a:t>
             </a:fld>
             <a:endParaRPr lang="en-US"/>
           </a:p>
@@ -4669,10 +4459,9 @@
           <a:lstStyle/>
           <a:p>
             <a:r>
-              <a:rPr lang="en-US" smtClean="0"/>
+              <a:rPr lang="en-US"/>
               <a:t>Click to edit Master title style</a:t>
             </a:r>
-            <a:endParaRPr lang="en-US"/>
           </a:p>
         </p:txBody>
       </p:sp>
@@ -4698,38 +4487,37 @@
           <a:p>
             <a:pPr lvl="0"/>
             <a:r>
-              <a:rPr lang="en-US" smtClean="0"/>
+              <a:rPr lang="en-US"/>
               <a:t>Click to edit Master text styles</a:t>
             </a:r>
           </a:p>
           <a:p>
             <a:pPr lvl="1"/>
             <a:r>
-              <a:rPr lang="en-US" smtClean="0"/>
+              <a:rPr lang="en-US"/>
               <a:t>Second level</a:t>
             </a:r>
           </a:p>
           <a:p>
             <a:pPr lvl="2"/>
             <a:r>
-              <a:rPr lang="en-US" smtClean="0"/>
+              <a:rPr lang="en-US"/>
               <a:t>Third level</a:t>
             </a:r>
           </a:p>
           <a:p>
             <a:pPr lvl="3"/>
             <a:r>
-              <a:rPr lang="en-US" smtClean="0"/>
+              <a:rPr lang="en-US"/>
               <a:t>Fourth level</a:t>
             </a:r>
           </a:p>
           <a:p>
             <a:pPr lvl="4"/>
             <a:r>
-              <a:rPr lang="en-US" smtClean="0"/>
+              <a:rPr lang="en-US"/>
               <a:t>Fifth level</a:t>
             </a:r>
-            <a:endParaRPr lang="en-US"/>
           </a:p>
         </p:txBody>
       </p:sp>
@@ -4750,7 +4538,7 @@
           <a:p>
             <a:fld id="{5BCAD085-E8A6-8845-BD4E-CB4CCA059FC4}" type="datetimeFigureOut">
               <a:rPr lang="en-US" smtClean="0"/>
-              <a:t>1/27/13</a:t>
+              <a:t>8/19/2026</a:t>
             </a:fld>
             <a:endParaRPr lang="en-US"/>
           </a:p>
@@ -4844,10 +4632,9 @@
           <a:lstStyle/>
           <a:p>
             <a:r>
-              <a:rPr lang="en-US" smtClean="0"/>
+              <a:rPr lang="en-US"/>
               <a:t>Click to edit Master title style</a:t>
             </a:r>
-            <a:endParaRPr lang="en-US"/>
           </a:p>
         </p:txBody>
       </p:sp>
@@ -4868,38 +4655,37 @@
           <a:p>
             <a:pPr lvl="0"/>
             <a:r>
-              <a:rPr lang="en-US" smtClean="0"/>
+              <a:rPr lang="en-US"/>
               <a:t>Click to edit Master text styles</a:t>
             </a:r>
           </a:p>
           <a:p>
             <a:pPr lvl="1"/>
             <a:r>
-              <a:rPr lang="en-US" smtClean="0"/>
+              <a:rPr lang="en-US"/>
               <a:t>Second level</a:t>
             </a:r>
           </a:p>
           <a:p>
             <a:pPr lvl="2"/>
             <a:r>
-              <a:rPr lang="en-US" smtClean="0"/>
+              <a:rPr lang="en-US"/>
               <a:t>Third level</a:t>
             </a:r>
           </a:p>
           <a:p>
             <a:pPr lvl="3"/>
             <a:r>
-              <a:rPr lang="en-US" smtClean="0"/>
+              <a:rPr lang="en-US"/>
               <a:t>Fourth level</a:t>
             </a:r>
           </a:p>
           <a:p>
             <a:pPr lvl="4"/>
             <a:r>
-              <a:rPr lang="en-US" smtClean="0"/>
+              <a:rPr lang="en-US"/>
               <a:t>Fifth level</a:t>
             </a:r>
-            <a:endParaRPr lang="en-US"/>
           </a:p>
         </p:txBody>
       </p:sp>
@@ -4920,7 +4706,7 @@
           <a:p>
             <a:fld id="{5BCAD085-E8A6-8845-BD4E-CB4CCA059FC4}" type="datetimeFigureOut">
               <a:rPr lang="en-US" smtClean="0"/>
-              <a:t>1/27/13</a:t>
+              <a:t>8/19/2026</a:t>
             </a:fld>
             <a:endParaRPr lang="en-US"/>
           </a:p>
@@ -5023,10 +4809,9 @@
           </a:lstStyle>
           <a:p>
             <a:r>
-              <a:rPr lang="en-US" smtClean="0"/>
+              <a:rPr lang="en-US"/>
               <a:t>Click to edit Master title style</a:t>
             </a:r>
-            <a:endParaRPr lang="en-US"/>
           </a:p>
         </p:txBody>
       </p:sp>
@@ -5143,7 +4928,7 @@
           <a:p>
             <a:pPr lvl="0"/>
             <a:r>
-              <a:rPr lang="en-US" smtClean="0"/>
+              <a:rPr lang="en-US"/>
               <a:t>Click to edit Master text styles</a:t>
             </a:r>
           </a:p>
@@ -5166,7 +4951,7 @@
           <a:p>
             <a:fld id="{5BCAD085-E8A6-8845-BD4E-CB4CCA059FC4}" type="datetimeFigureOut">
               <a:rPr lang="en-US" smtClean="0"/>
-              <a:t>1/27/13</a:t>
+              <a:t>8/19/2026</a:t>
             </a:fld>
             <a:endParaRPr lang="en-US"/>
           </a:p>
@@ -5260,10 +5045,9 @@
           <a:lstStyle/>
           <a:p>
             <a:r>
-              <a:rPr lang="en-US" smtClean="0"/>
+              <a:rPr lang="en-US"/>
               <a:t>Click to edit Master title style</a:t>
             </a:r>
-            <a:endParaRPr lang="en-US"/>
           </a:p>
         </p:txBody>
       </p:sp>
@@ -5317,38 +5101,37 @@
           <a:p>
             <a:pPr lvl="0"/>
             <a:r>
-              <a:rPr lang="en-US" smtClean="0"/>
+              <a:rPr lang="en-US"/>
               <a:t>Click to edit Master text styles</a:t>
             </a:r>
           </a:p>
           <a:p>
             <a:pPr lvl="1"/>
             <a:r>
-              <a:rPr lang="en-US" smtClean="0"/>
+              <a:rPr lang="en-US"/>
               <a:t>Second level</a:t>
             </a:r>
           </a:p>
           <a:p>
             <a:pPr lvl="2"/>
             <a:r>
-              <a:rPr lang="en-US" smtClean="0"/>
+              <a:rPr lang="en-US"/>
               <a:t>Third level</a:t>
             </a:r>
           </a:p>
           <a:p>
             <a:pPr lvl="3"/>
             <a:r>
-              <a:rPr lang="en-US" smtClean="0"/>
+              <a:rPr lang="en-US"/>
               <a:t>Fourth level</a:t>
             </a:r>
           </a:p>
           <a:p>
             <a:pPr lvl="4"/>
             <a:r>
-              <a:rPr lang="en-US" smtClean="0"/>
+              <a:rPr lang="en-US"/>
               <a:t>Fifth level</a:t>
             </a:r>
-            <a:endParaRPr lang="en-US"/>
           </a:p>
         </p:txBody>
       </p:sp>
@@ -5402,38 +5185,37 @@
           <a:p>
             <a:pPr lvl="0"/>
             <a:r>
-              <a:rPr lang="en-US" smtClean="0"/>
+              <a:rPr lang="en-US"/>
               <a:t>Click to edit Master text styles</a:t>
             </a:r>
           </a:p>
           <a:p>
             <a:pPr lvl="1"/>
             <a:r>
-              <a:rPr lang="en-US" smtClean="0"/>
+              <a:rPr lang="en-US"/>
               <a:t>Second level</a:t>
             </a:r>
           </a:p>
           <a:p>
             <a:pPr lvl="2"/>
             <a:r>
-              <a:rPr lang="en-US" smtClean="0"/>
+              <a:rPr lang="en-US"/>
               <a:t>Third level</a:t>
             </a:r>
           </a:p>
           <a:p>
             <a:pPr lvl="3"/>
             <a:r>
-              <a:rPr lang="en-US" smtClean="0"/>
+              <a:rPr lang="en-US"/>
               <a:t>Fourth level</a:t>
             </a:r>
           </a:p>
           <a:p>
             <a:pPr lvl="4"/>
             <a:r>
-              <a:rPr lang="en-US" smtClean="0"/>
+              <a:rPr lang="en-US"/>
               <a:t>Fifth level</a:t>
             </a:r>
-            <a:endParaRPr lang="en-US"/>
           </a:p>
         </p:txBody>
       </p:sp>
@@ -5454,7 +5236,7 @@
           <a:p>
             <a:fld id="{5BCAD085-E8A6-8845-BD4E-CB4CCA059FC4}" type="datetimeFigureOut">
               <a:rPr lang="en-US" smtClean="0"/>
-              <a:t>1/27/13</a:t>
+              <a:t>8/19/2026</a:t>
             </a:fld>
             <a:endParaRPr lang="en-US"/>
           </a:p>
@@ -5552,10 +5334,9 @@
           </a:lstStyle>
           <a:p>
             <a:r>
-              <a:rPr lang="en-US" smtClean="0"/>
+              <a:rPr lang="en-US"/>
               <a:t>Click to edit Master title style</a:t>
             </a:r>
-            <a:endParaRPr lang="en-US"/>
           </a:p>
         </p:txBody>
       </p:sp>
@@ -5618,7 +5399,7 @@
           <a:p>
             <a:pPr lvl="0"/>
             <a:r>
-              <a:rPr lang="en-US" smtClean="0"/>
+              <a:rPr lang="en-US"/>
               <a:t>Click to edit Master text styles</a:t>
             </a:r>
           </a:p>
@@ -5674,38 +5455,37 @@
           <a:p>
             <a:pPr lvl="0"/>
             <a:r>
-              <a:rPr lang="en-US" smtClean="0"/>
+              <a:rPr lang="en-US"/>
               <a:t>Click to edit Master text styles</a:t>
             </a:r>
           </a:p>
           <a:p>
             <a:pPr lvl="1"/>
             <a:r>
-              <a:rPr lang="en-US" smtClean="0"/>
+              <a:rPr lang="en-US"/>
               <a:t>Second level</a:t>
             </a:r>
           </a:p>
           <a:p>
             <a:pPr lvl="2"/>
             <a:r>
-              <a:rPr lang="en-US" smtClean="0"/>
+              <a:rPr lang="en-US"/>
               <a:t>Third level</a:t>
             </a:r>
           </a:p>
           <a:p>
             <a:pPr lvl="3"/>
             <a:r>
-              <a:rPr lang="en-US" smtClean="0"/>
+              <a:rPr lang="en-US"/>
               <a:t>Fourth level</a:t>
             </a:r>
           </a:p>
           <a:p>
             <a:pPr lvl="4"/>
             <a:r>
-              <a:rPr lang="en-US" smtClean="0"/>
+              <a:rPr lang="en-US"/>
               <a:t>Fifth level</a:t>
             </a:r>
-            <a:endParaRPr lang="en-US"/>
           </a:p>
         </p:txBody>
       </p:sp>
@@ -5768,7 +5548,7 @@
           <a:p>
             <a:pPr lvl="0"/>
             <a:r>
-              <a:rPr lang="en-US" smtClean="0"/>
+              <a:rPr lang="en-US"/>
               <a:t>Click to edit Master text styles</a:t>
             </a:r>
           </a:p>
@@ -5824,38 +5604,37 @@
           <a:p>
             <a:pPr lvl="0"/>
             <a:r>
-              <a:rPr lang="en-US" smtClean="0"/>
+              <a:rPr lang="en-US"/>
               <a:t>Click to edit Master text styles</a:t>
             </a:r>
           </a:p>
           <a:p>
             <a:pPr lvl="1"/>
             <a:r>
-              <a:rPr lang="en-US" smtClean="0"/>
+              <a:rPr lang="en-US"/>
               <a:t>Second level</a:t>
             </a:r>
           </a:p>
           <a:p>
             <a:pPr lvl="2"/>
             <a:r>
-              <a:rPr lang="en-US" smtClean="0"/>
+              <a:rPr lang="en-US"/>
               <a:t>Third level</a:t>
             </a:r>
           </a:p>
           <a:p>
             <a:pPr lvl="3"/>
             <a:r>
-              <a:rPr lang="en-US" smtClean="0"/>
+              <a:rPr lang="en-US"/>
               <a:t>Fourth level</a:t>
             </a:r>
           </a:p>
           <a:p>
             <a:pPr lvl="4"/>
             <a:r>
-              <a:rPr lang="en-US" smtClean="0"/>
+              <a:rPr lang="en-US"/>
               <a:t>Fifth level</a:t>
             </a:r>
-            <a:endParaRPr lang="en-US"/>
           </a:p>
         </p:txBody>
       </p:sp>
@@ -5876,7 +5655,7 @@
           <a:p>
             <a:fld id="{5BCAD085-E8A6-8845-BD4E-CB4CCA059FC4}" type="datetimeFigureOut">
               <a:rPr lang="en-US" smtClean="0"/>
-              <a:t>1/27/13</a:t>
+              <a:t>8/19/2026</a:t>
             </a:fld>
             <a:endParaRPr lang="en-US"/>
           </a:p>
@@ -5970,10 +5749,9 @@
           <a:lstStyle/>
           <a:p>
             <a:r>
-              <a:rPr lang="en-US" smtClean="0"/>
+              <a:rPr lang="en-US"/>
               <a:t>Click to edit Master title style</a:t>
             </a:r>
-            <a:endParaRPr lang="en-US"/>
           </a:p>
         </p:txBody>
       </p:sp>
@@ -5994,7 +5772,7 @@
           <a:p>
             <a:fld id="{5BCAD085-E8A6-8845-BD4E-CB4CCA059FC4}" type="datetimeFigureOut">
               <a:rPr lang="en-US" smtClean="0"/>
-              <a:t>1/27/13</a:t>
+              <a:t>8/19/2026</a:t>
             </a:fld>
             <a:endParaRPr lang="en-US"/>
           </a:p>
@@ -6089,7 +5867,7 @@
           <a:p>
             <a:fld id="{5BCAD085-E8A6-8845-BD4E-CB4CCA059FC4}" type="datetimeFigureOut">
               <a:rPr lang="en-US" smtClean="0"/>
-              <a:t>1/27/13</a:t>
+              <a:t>8/19/2026</a:t>
             </a:fld>
             <a:endParaRPr lang="en-US"/>
           </a:p>
@@ -6192,10 +5970,9 @@
           </a:lstStyle>
           <a:p>
             <a:r>
-              <a:rPr lang="en-US" smtClean="0"/>
+              <a:rPr lang="en-US"/>
               <a:t>Click to edit Master title style</a:t>
             </a:r>
-            <a:endParaRPr lang="en-US"/>
           </a:p>
         </p:txBody>
       </p:sp>
@@ -6249,38 +6026,37 @@
           <a:p>
             <a:pPr lvl="0"/>
             <a:r>
-              <a:rPr lang="en-US" smtClean="0"/>
+              <a:rPr lang="en-US"/>
               <a:t>Click to edit Master text styles</a:t>
             </a:r>
           </a:p>
           <a:p>
             <a:pPr lvl="1"/>
             <a:r>
-              <a:rPr lang="en-US" smtClean="0"/>
+              <a:rPr lang="en-US"/>
               <a:t>Second level</a:t>
             </a:r>
           </a:p>
           <a:p>
             <a:pPr lvl="2"/>
             <a:r>
-              <a:rPr lang="en-US" smtClean="0"/>
+              <a:rPr lang="en-US"/>
               <a:t>Third level</a:t>
             </a:r>
           </a:p>
           <a:p>
             <a:pPr lvl="3"/>
             <a:r>
-              <a:rPr lang="en-US" smtClean="0"/>
+              <a:rPr lang="en-US"/>
               <a:t>Fourth level</a:t>
             </a:r>
           </a:p>
           <a:p>
             <a:pPr lvl="4"/>
             <a:r>
-              <a:rPr lang="en-US" smtClean="0"/>
+              <a:rPr lang="en-US"/>
               <a:t>Fifth level</a:t>
             </a:r>
-            <a:endParaRPr lang="en-US"/>
           </a:p>
         </p:txBody>
       </p:sp>
@@ -6343,7 +6119,7 @@
           <a:p>
             <a:pPr lvl="0"/>
             <a:r>
-              <a:rPr lang="en-US" smtClean="0"/>
+              <a:rPr lang="en-US"/>
               <a:t>Click to edit Master text styles</a:t>
             </a:r>
           </a:p>
@@ -6366,7 +6142,7 @@
           <a:p>
             <a:fld id="{5BCAD085-E8A6-8845-BD4E-CB4CCA059FC4}" type="datetimeFigureOut">
               <a:rPr lang="en-US" smtClean="0"/>
-              <a:t>1/27/13</a:t>
+              <a:t>8/19/2026</a:t>
             </a:fld>
             <a:endParaRPr lang="en-US"/>
           </a:p>
@@ -6469,10 +6245,9 @@
           </a:lstStyle>
           <a:p>
             <a:r>
-              <a:rPr lang="en-US" smtClean="0"/>
+              <a:rPr lang="en-US"/>
               <a:t>Click to edit Master title style</a:t>
             </a:r>
-            <a:endParaRPr lang="en-US"/>
           </a:p>
         </p:txBody>
       </p:sp>
@@ -6596,7 +6371,7 @@
           <a:p>
             <a:pPr lvl="0"/>
             <a:r>
-              <a:rPr lang="en-US" smtClean="0"/>
+              <a:rPr lang="en-US"/>
               <a:t>Click to edit Master text styles</a:t>
             </a:r>
           </a:p>
@@ -6619,7 +6394,7 @@
           <a:p>
             <a:fld id="{5BCAD085-E8A6-8845-BD4E-CB4CCA059FC4}" type="datetimeFigureOut">
               <a:rPr lang="en-US" smtClean="0"/>
-              <a:t>1/27/13</a:t>
+              <a:t>8/19/2026</a:t>
             </a:fld>
             <a:endParaRPr lang="en-US"/>
           </a:p>
@@ -6728,10 +6503,9 @@
           <a:lstStyle/>
           <a:p>
             <a:r>
-              <a:rPr lang="en-US" smtClean="0"/>
+              <a:rPr lang="en-US"/>
               <a:t>Click to edit Master title style</a:t>
             </a:r>
-            <a:endParaRPr lang="en-US"/>
           </a:p>
         </p:txBody>
       </p:sp>
@@ -6762,38 +6536,37 @@
           <a:p>
             <a:pPr lvl="0"/>
             <a:r>
-              <a:rPr lang="en-US" smtClean="0"/>
+              <a:rPr lang="en-US"/>
               <a:t>Click to edit Master text styles</a:t>
             </a:r>
           </a:p>
           <a:p>
             <a:pPr lvl="1"/>
             <a:r>
-              <a:rPr lang="en-US" smtClean="0"/>
+              <a:rPr lang="en-US"/>
               <a:t>Second level</a:t>
             </a:r>
           </a:p>
           <a:p>
             <a:pPr lvl="2"/>
             <a:r>
-              <a:rPr lang="en-US" smtClean="0"/>
+              <a:rPr lang="en-US"/>
               <a:t>Third level</a:t>
             </a:r>
           </a:p>
           <a:p>
             <a:pPr lvl="3"/>
             <a:r>
-              <a:rPr lang="en-US" smtClean="0"/>
+              <a:rPr lang="en-US"/>
               <a:t>Fourth level</a:t>
             </a:r>
           </a:p>
           <a:p>
             <a:pPr lvl="4"/>
             <a:r>
-              <a:rPr lang="en-US" smtClean="0"/>
+              <a:rPr lang="en-US"/>
               <a:t>Fifth level</a:t>
             </a:r>
-            <a:endParaRPr lang="en-US"/>
           </a:p>
         </p:txBody>
       </p:sp>
@@ -6832,7 +6605,7 @@
           <a:p>
             <a:fld id="{5BCAD085-E8A6-8845-BD4E-CB4CCA059FC4}" type="datetimeFigureOut">
               <a:rPr lang="en-US" smtClean="0"/>
-              <a:t>1/27/13</a:t>
+              <a:t>8/19/2026</a:t>
             </a:fld>
             <a:endParaRPr lang="en-US"/>
           </a:p>
@@ -7191,15 +6964,7 @@
 </file>
 
 <file path=ppt/slides/slide1.xml><?xml version="1.0" encoding="utf-8"?>
-<p:sld xmlns:a="http://schemas.openxmlformats.org/drawingml/2006/main" xmlns:p="http://schemas.openxmlformats.org/presentationml/2006/main" xmlns:r="http://schemas.openxmlformats.org/officeDocument/2006/relationships">
-  <p:bg>
-    <p:bgPr>
-      <a:solidFill>
-        <a:srgbClr val="17202A"/>
-      </a:solidFill>
-      <a:effectLst/>
-    </p:bgPr>
-  </p:bg>
+<p:sld xmlns:a="http://schemas.openxmlformats.org/drawingml/2006/main" xmlns:r="http://schemas.openxmlformats.org/officeDocument/2006/relationships" xmlns:p="http://schemas.openxmlformats.org/presentationml/2006/main">
   <p:cSld>
     <p:spTree>
       <p:nvGrpSpPr>
@@ -7207,7 +6972,44 @@
         <p:cNvGrpSpPr/>
         <p:nvPr/>
       </p:nvGrpSpPr>
-      <p:grpSpPr/>
+      <p:grpSpPr>
+        <a:xfrm>
+          <a:off x="0" y="0"/>
+          <a:ext cx="0" cy="0"/>
+          <a:chOff x="0" y="0"/>
+          <a:chExt cx="0" cy="0"/>
+        </a:xfrm>
+      </p:grpSpPr>
+      <p:pic>
+        <p:nvPicPr>
+          <p:cNvPr id="7" name="그림 6">
+            <a:extLst>
+              <a:ext uri="{FF2B5EF4-FFF2-40B4-BE49-F238E27FC236}">
+                <a16:creationId xmlns:a16="http://schemas.microsoft.com/office/drawing/2014/main" id="{A7711EFD-B20A-D039-2CE0-250DBF4D01F6}"/>
+              </a:ext>
+            </a:extLst>
+          </p:cNvPr>
+          <p:cNvPicPr>
+            <a:picLocks noChangeAspect="1"/>
+          </p:cNvPicPr>
+          <p:nvPr/>
+        </p:nvPicPr>
+        <p:blipFill>
+          <a:blip r:embed="rId3"/>
+          <a:stretch>
+            <a:fillRect/>
+          </a:stretch>
+        </p:blipFill>
+        <p:spPr>
+          <a:xfrm>
+            <a:off x="639607" y="1030016"/>
+            <a:ext cx="10912786" cy="4797968"/>
+          </a:xfrm>
+          <a:prstGeom prst="rect">
+            <a:avLst/>
+          </a:prstGeom>
+        </p:spPr>
+      </p:pic>
       <p:sp>
         <p:nvSpPr>
           <p:cNvPr id="2" name="Rectangle 1"/>
@@ -7249,6 +7051,7 @@
           <a:lstStyle/>
           <a:p>
             <a:pPr algn="ctr"/>
+            <a:endParaRPr/>
           </a:p>
         </p:txBody>
       </p:sp>
@@ -7261,7 +7064,7 @@
         <p:spPr>
           <a:xfrm>
             <a:off x="1188720" y="1463040"/>
-            <a:ext cx="10058400" cy="548640"/>
+            <a:ext cx="10058400" cy="369332"/>
           </a:xfrm>
           <a:prstGeom prst="rect">
             <a:avLst/>
@@ -7281,7 +7084,61 @@
                 </a:solidFill>
                 <a:latin typeface="Malgun Gothic"/>
               </a:rPr>
-              <a:t>Oracle PL/SQL 7일 실무·DBA 운영자동화 과정  ·  제6장</a:t>
+              <a:t>Oracle PL/SQL </a:t>
+            </a:r>
+            <a:r>
+              <a:rPr sz="1800" b="1" dirty="0" err="1">
+                <a:solidFill>
+                  <a:srgbClr val="C0392B"/>
+                </a:solidFill>
+                <a:latin typeface="Malgun Gothic"/>
+              </a:rPr>
+              <a:t>실무·DBA</a:t>
+            </a:r>
+            <a:r>
+              <a:rPr sz="1800" b="1" dirty="0">
+                <a:solidFill>
+                  <a:srgbClr val="C0392B"/>
+                </a:solidFill>
+                <a:latin typeface="Malgun Gothic"/>
+              </a:rPr>
+              <a:t> </a:t>
+            </a:r>
+            <a:r>
+              <a:rPr sz="1800" b="1" dirty="0" err="1">
+                <a:solidFill>
+                  <a:srgbClr val="C0392B"/>
+                </a:solidFill>
+                <a:latin typeface="Malgun Gothic"/>
+              </a:rPr>
+              <a:t>운영자동화</a:t>
+            </a:r>
+            <a:r>
+              <a:rPr sz="1800" b="1" dirty="0">
+                <a:solidFill>
+                  <a:srgbClr val="C0392B"/>
+                </a:solidFill>
+                <a:latin typeface="Malgun Gothic"/>
+              </a:rPr>
+              <a:t> </a:t>
+            </a:r>
+            <a:r>
+              <a:rPr sz="1800" b="1" dirty="0" err="1">
+                <a:solidFill>
+                  <a:srgbClr val="C0392B"/>
+                </a:solidFill>
+                <a:latin typeface="Malgun Gothic"/>
+              </a:rPr>
+              <a:t>과정</a:t>
+            </a:r>
+            <a:r>
+              <a:rPr sz="1800" b="1" dirty="0">
+                <a:solidFill>
+                  <a:srgbClr val="C0392B"/>
+                </a:solidFill>
+                <a:latin typeface="Malgun Gothic"/>
+              </a:rPr>
+              <a:t>  ·  제6장</a:t>
             </a:r>
           </a:p>
         </p:txBody>
@@ -7309,14 +7166,56 @@
           <a:lstStyle/>
           <a:p>
             <a:r>
-              <a:rPr sz="4400" b="1">
+              <a:rPr sz="4400" b="1" dirty="0" err="1">
                 <a:solidFill>
                   <a:srgbClr val="FFFFFF"/>
                 </a:solidFill>
                 <a:latin typeface="Malgun Gothic"/>
               </a:rPr>
-              <a:t>동적 SQL과 DBA 자동화</a:t>
-            </a:r>
+              <a:t>동적</a:t>
+            </a:r>
+            <a:r>
+              <a:rPr sz="4400" b="1" dirty="0">
+                <a:solidFill>
+                  <a:srgbClr val="FFFFFF"/>
+                </a:solidFill>
+                <a:latin typeface="Malgun Gothic"/>
+              </a:rPr>
+              <a:t> </a:t>
+            </a:r>
+            <a:r>
+              <a:rPr sz="4400" b="1" dirty="0" err="1">
+                <a:solidFill>
+                  <a:srgbClr val="FFFFFF"/>
+                </a:solidFill>
+                <a:latin typeface="Malgun Gothic"/>
+              </a:rPr>
+              <a:t>SQL과</a:t>
+            </a:r>
+            <a:r>
+              <a:rPr sz="4400" b="1" dirty="0">
+                <a:solidFill>
+                  <a:srgbClr val="FFFFFF"/>
+                </a:solidFill>
+                <a:latin typeface="Malgun Gothic"/>
+              </a:rPr>
+              <a:t> DBA </a:t>
+            </a:r>
+            <a:r>
+              <a:rPr sz="4400" b="1" dirty="0" err="1">
+                <a:solidFill>
+                  <a:srgbClr val="FFFFFF"/>
+                </a:solidFill>
+                <a:latin typeface="Malgun Gothic"/>
+              </a:rPr>
+              <a:t>자동화</a:t>
+            </a:r>
+            <a:endParaRPr sz="4400" b="1" dirty="0">
+              <a:solidFill>
+                <a:srgbClr val="FFFFFF"/>
+              </a:solidFill>
+              <a:latin typeface="Malgun Gothic"/>
+            </a:endParaRPr>
           </a:p>
         </p:txBody>
       </p:sp>
@@ -7363,7 +7262,7 @@
 </file>
 
 <file path=ppt/slides/slide10.xml><?xml version="1.0" encoding="utf-8"?>
-<p:sld xmlns:a="http://schemas.openxmlformats.org/drawingml/2006/main" xmlns:p="http://schemas.openxmlformats.org/presentationml/2006/main" xmlns:r="http://schemas.openxmlformats.org/officeDocument/2006/relationships">
+<p:sld xmlns:a="http://schemas.openxmlformats.org/drawingml/2006/main" xmlns:r="http://schemas.openxmlformats.org/officeDocument/2006/relationships" xmlns:p="http://schemas.openxmlformats.org/presentationml/2006/main">
   <p:cSld>
     <p:spTree>
       <p:nvGrpSpPr>
@@ -7371,7 +7270,14 @@
         <p:cNvGrpSpPr/>
         <p:nvPr/>
       </p:nvGrpSpPr>
-      <p:grpSpPr/>
+      <p:grpSpPr>
+        <a:xfrm>
+          <a:off x="0" y="0"/>
+          <a:ext cx="0" cy="0"/>
+          <a:chOff x="0" y="0"/>
+          <a:chExt cx="0" cy="0"/>
+        </a:xfrm>
+      </p:grpSpPr>
       <p:sp>
         <p:nvSpPr>
           <p:cNvPr id="2" name="Rectangle 1"/>
@@ -7413,6 +7319,7 @@
           <a:lstStyle/>
           <a:p>
             <a:pPr algn="ctr"/>
+            <a:endParaRPr/>
           </a:p>
         </p:txBody>
       </p:sp>
@@ -7491,6 +7398,7 @@
           <a:lstStyle/>
           <a:p>
             <a:pPr algn="ctr"/>
+            <a:endParaRPr/>
           </a:p>
         </p:txBody>
       </p:sp>
@@ -7582,15 +7490,12 @@
             </a:r>
           </a:p>
           <a:p>
-            <a:r>
-              <a:rPr sz="1250" b="0">
-                <a:solidFill>
-                  <a:srgbClr val="E6E6E6"/>
-                </a:solidFill>
-                <a:latin typeface="Consolas"/>
-              </a:rPr>
-              <a:t/>
-            </a:r>
+            <a:endParaRPr sz="1250" b="0">
+              <a:solidFill>
+                <a:srgbClr val="9CDCFE"/>
+              </a:solidFill>
+              <a:latin typeface="Consolas"/>
+            </a:endParaRPr>
           </a:p>
           <a:p>
             <a:r>
@@ -7615,15 +7520,12 @@
             </a:r>
           </a:p>
           <a:p>
-            <a:r>
-              <a:rPr sz="1250" b="0">
-                <a:solidFill>
-                  <a:srgbClr val="E6E6E6"/>
-                </a:solidFill>
-                <a:latin typeface="Consolas"/>
-              </a:rPr>
-              <a:t/>
-            </a:r>
+            <a:endParaRPr sz="1250" b="0">
+              <a:solidFill>
+                <a:srgbClr val="E6E6E6"/>
+              </a:solidFill>
+              <a:latin typeface="Consolas"/>
+            </a:endParaRPr>
           </a:p>
           <a:p>
             <a:r>
@@ -7658,7 +7560,7 @@
 </file>
 
 <file path=ppt/slides/slide11.xml><?xml version="1.0" encoding="utf-8"?>
-<p:sld xmlns:a="http://schemas.openxmlformats.org/drawingml/2006/main" xmlns:p="http://schemas.openxmlformats.org/presentationml/2006/main" xmlns:r="http://schemas.openxmlformats.org/officeDocument/2006/relationships">
+<p:sld xmlns:a="http://schemas.openxmlformats.org/drawingml/2006/main" xmlns:r="http://schemas.openxmlformats.org/officeDocument/2006/relationships" xmlns:p="http://schemas.openxmlformats.org/presentationml/2006/main">
   <p:cSld>
     <p:spTree>
       <p:nvGrpSpPr>
@@ -7666,7 +7568,14 @@
         <p:cNvGrpSpPr/>
         <p:nvPr/>
       </p:nvGrpSpPr>
-      <p:grpSpPr/>
+      <p:grpSpPr>
+        <a:xfrm>
+          <a:off x="0" y="0"/>
+          <a:ext cx="0" cy="0"/>
+          <a:chOff x="0" y="0"/>
+          <a:chExt cx="0" cy="0"/>
+        </a:xfrm>
+      </p:grpSpPr>
       <p:sp>
         <p:nvSpPr>
           <p:cNvPr id="2" name="Rectangle 1"/>
@@ -7708,6 +7617,7 @@
           <a:lstStyle/>
           <a:p>
             <a:pPr algn="ctr"/>
+            <a:endParaRPr/>
           </a:p>
         </p:txBody>
       </p:sp>
@@ -7786,6 +7696,7 @@
           <a:lstStyle/>
           <a:p>
             <a:pPr algn="ctr"/>
+            <a:endParaRPr/>
           </a:p>
         </p:txBody>
       </p:sp>
@@ -7888,15 +7799,12 @@
             </a:r>
           </a:p>
           <a:p>
-            <a:r>
-              <a:rPr sz="1250" b="0">
-                <a:solidFill>
-                  <a:srgbClr val="E6E6E6"/>
-                </a:solidFill>
-                <a:latin typeface="Consolas"/>
-              </a:rPr>
-              <a:t/>
-            </a:r>
+            <a:endParaRPr sz="1250" b="0">
+              <a:solidFill>
+                <a:srgbClr val="9CDCFE"/>
+              </a:solidFill>
+              <a:latin typeface="Consolas"/>
+            </a:endParaRPr>
           </a:p>
           <a:p>
             <a:r>
@@ -7975,7 +7883,7 @@
 </file>
 
 <file path=ppt/slides/slide12.xml><?xml version="1.0" encoding="utf-8"?>
-<p:sld xmlns:a="http://schemas.openxmlformats.org/drawingml/2006/main" xmlns:p="http://schemas.openxmlformats.org/presentationml/2006/main" xmlns:r="http://schemas.openxmlformats.org/officeDocument/2006/relationships">
+<p:sld xmlns:a="http://schemas.openxmlformats.org/drawingml/2006/main" xmlns:r="http://schemas.openxmlformats.org/officeDocument/2006/relationships" xmlns:p="http://schemas.openxmlformats.org/presentationml/2006/main">
   <p:cSld>
     <p:spTree>
       <p:nvGrpSpPr>
@@ -7983,7 +7891,14 @@
         <p:cNvGrpSpPr/>
         <p:nvPr/>
       </p:nvGrpSpPr>
-      <p:grpSpPr/>
+      <p:grpSpPr>
+        <a:xfrm>
+          <a:off x="0" y="0"/>
+          <a:ext cx="0" cy="0"/>
+          <a:chOff x="0" y="0"/>
+          <a:chExt cx="0" cy="0"/>
+        </a:xfrm>
+      </p:grpSpPr>
       <p:sp>
         <p:nvSpPr>
           <p:cNvPr id="2" name="Rectangle 1"/>
@@ -8025,6 +7940,7 @@
           <a:lstStyle/>
           <a:p>
             <a:pPr algn="ctr"/>
+            <a:endParaRPr/>
           </a:p>
         </p:txBody>
       </p:sp>
@@ -8103,6 +8019,7 @@
           <a:lstStyle/>
           <a:p>
             <a:pPr algn="ctr"/>
+            <a:endParaRPr/>
           </a:p>
         </p:txBody>
       </p:sp>
@@ -8150,15 +8067,12 @@
             </a:r>
           </a:p>
           <a:p>
-            <a:r>
-              <a:rPr sz="1250" b="0">
-                <a:solidFill>
-                  <a:srgbClr val="E6E6E6"/>
-                </a:solidFill>
-                <a:latin typeface="Consolas"/>
-              </a:rPr>
-              <a:t/>
-            </a:r>
+            <a:endParaRPr sz="1250" b="0">
+              <a:solidFill>
+                <a:srgbClr val="9CDCFE"/>
+              </a:solidFill>
+              <a:latin typeface="Consolas"/>
+            </a:endParaRPr>
           </a:p>
           <a:p>
             <a:r>
@@ -8216,15 +8130,12 @@
             </a:r>
           </a:p>
           <a:p>
-            <a:r>
-              <a:rPr sz="1250" b="0">
-                <a:solidFill>
-                  <a:srgbClr val="E6E6E6"/>
-                </a:solidFill>
-                <a:latin typeface="Consolas"/>
-              </a:rPr>
-              <a:t/>
-            </a:r>
+            <a:endParaRPr sz="1250" b="0">
+              <a:solidFill>
+                <a:srgbClr val="9CDCFE"/>
+              </a:solidFill>
+              <a:latin typeface="Consolas"/>
+            </a:endParaRPr>
           </a:p>
           <a:p>
             <a:r>
@@ -8270,7 +8181,7 @@
 </file>
 
 <file path=ppt/slides/slide13.xml><?xml version="1.0" encoding="utf-8"?>
-<p:sld xmlns:a="http://schemas.openxmlformats.org/drawingml/2006/main" xmlns:p="http://schemas.openxmlformats.org/presentationml/2006/main" xmlns:r="http://schemas.openxmlformats.org/officeDocument/2006/relationships">
+<p:sld xmlns:a="http://schemas.openxmlformats.org/drawingml/2006/main" xmlns:r="http://schemas.openxmlformats.org/officeDocument/2006/relationships" xmlns:p="http://schemas.openxmlformats.org/presentationml/2006/main">
   <p:cSld>
     <p:spTree>
       <p:nvGrpSpPr>
@@ -8278,7 +8189,14 @@
         <p:cNvGrpSpPr/>
         <p:nvPr/>
       </p:nvGrpSpPr>
-      <p:grpSpPr/>
+      <p:grpSpPr>
+        <a:xfrm>
+          <a:off x="0" y="0"/>
+          <a:ext cx="0" cy="0"/>
+          <a:chOff x="0" y="0"/>
+          <a:chExt cx="0" cy="0"/>
+        </a:xfrm>
+      </p:grpSpPr>
       <p:sp>
         <p:nvSpPr>
           <p:cNvPr id="2" name="Rectangle 1"/>
@@ -8320,6 +8238,7 @@
           <a:lstStyle/>
           <a:p>
             <a:pPr algn="ctr"/>
+            <a:endParaRPr/>
           </a:p>
         </p:txBody>
       </p:sp>
@@ -8502,7 +8421,7 @@
 </file>
 
 <file path=ppt/slides/slide14.xml><?xml version="1.0" encoding="utf-8"?>
-<p:sld xmlns:a="http://schemas.openxmlformats.org/drawingml/2006/main" xmlns:p="http://schemas.openxmlformats.org/presentationml/2006/main" xmlns:r="http://schemas.openxmlformats.org/officeDocument/2006/relationships">
+<p:sld xmlns:a="http://schemas.openxmlformats.org/drawingml/2006/main" xmlns:r="http://schemas.openxmlformats.org/officeDocument/2006/relationships" xmlns:p="http://schemas.openxmlformats.org/presentationml/2006/main">
   <p:cSld>
     <p:spTree>
       <p:nvGrpSpPr>
@@ -8510,7 +8429,14 @@
         <p:cNvGrpSpPr/>
         <p:nvPr/>
       </p:nvGrpSpPr>
-      <p:grpSpPr/>
+      <p:grpSpPr>
+        <a:xfrm>
+          <a:off x="0" y="0"/>
+          <a:ext cx="0" cy="0"/>
+          <a:chOff x="0" y="0"/>
+          <a:chExt cx="0" cy="0"/>
+        </a:xfrm>
+      </p:grpSpPr>
       <p:sp>
         <p:nvSpPr>
           <p:cNvPr id="2" name="Rectangle 1"/>
@@ -8552,6 +8478,7 @@
           <a:lstStyle/>
           <a:p>
             <a:pPr algn="ctr"/>
+            <a:endParaRPr/>
           </a:p>
         </p:txBody>
       </p:sp>
@@ -8630,6 +8557,7 @@
           <a:lstStyle/>
           <a:p>
             <a:pPr algn="ctr"/>
+            <a:endParaRPr/>
           </a:p>
         </p:txBody>
       </p:sp>
@@ -8786,7 +8714,7 @@
 </file>
 
 <file path=ppt/slides/slide15.xml><?xml version="1.0" encoding="utf-8"?>
-<p:sld xmlns:a="http://schemas.openxmlformats.org/drawingml/2006/main" xmlns:p="http://schemas.openxmlformats.org/presentationml/2006/main" xmlns:r="http://schemas.openxmlformats.org/officeDocument/2006/relationships">
+<p:sld xmlns:a="http://schemas.openxmlformats.org/drawingml/2006/main" xmlns:r="http://schemas.openxmlformats.org/officeDocument/2006/relationships" xmlns:p="http://schemas.openxmlformats.org/presentationml/2006/main">
   <p:cSld>
     <p:spTree>
       <p:nvGrpSpPr>
@@ -8794,7 +8722,14 @@
         <p:cNvGrpSpPr/>
         <p:nvPr/>
       </p:nvGrpSpPr>
-      <p:grpSpPr/>
+      <p:grpSpPr>
+        <a:xfrm>
+          <a:off x="0" y="0"/>
+          <a:ext cx="0" cy="0"/>
+          <a:chOff x="0" y="0"/>
+          <a:chExt cx="0" cy="0"/>
+        </a:xfrm>
+      </p:grpSpPr>
       <p:sp>
         <p:nvSpPr>
           <p:cNvPr id="2" name="Rectangle 1"/>
@@ -8836,6 +8771,7 @@
           <a:lstStyle/>
           <a:p>
             <a:pPr algn="ctr"/>
+            <a:endParaRPr/>
           </a:p>
         </p:txBody>
       </p:sp>
@@ -8914,6 +8850,7 @@
           <a:lstStyle/>
           <a:p>
             <a:pPr algn="ctr"/>
+            <a:endParaRPr/>
           </a:p>
         </p:txBody>
       </p:sp>
@@ -9027,15 +8964,12 @@
             </a:r>
           </a:p>
           <a:p>
-            <a:r>
-              <a:rPr sz="1250" b="0">
-                <a:solidFill>
-                  <a:srgbClr val="E6E6E6"/>
-                </a:solidFill>
-                <a:latin typeface="Consolas"/>
-              </a:rPr>
-              <a:t/>
-            </a:r>
+            <a:endParaRPr sz="1250" b="0">
+              <a:solidFill>
+                <a:srgbClr val="E6E6E6"/>
+              </a:solidFill>
+              <a:latin typeface="Consolas"/>
+            </a:endParaRPr>
           </a:p>
           <a:p>
             <a:r>
@@ -9070,7 +9004,7 @@
 </file>
 
 <file path=ppt/slides/slide16.xml><?xml version="1.0" encoding="utf-8"?>
-<p:sld xmlns:a="http://schemas.openxmlformats.org/drawingml/2006/main" xmlns:p="http://schemas.openxmlformats.org/presentationml/2006/main" xmlns:r="http://schemas.openxmlformats.org/officeDocument/2006/relationships">
+<p:sld xmlns:a="http://schemas.openxmlformats.org/drawingml/2006/main" xmlns:r="http://schemas.openxmlformats.org/officeDocument/2006/relationships" xmlns:p="http://schemas.openxmlformats.org/presentationml/2006/main">
   <p:cSld>
     <p:spTree>
       <p:nvGrpSpPr>
@@ -9078,7 +9012,14 @@
         <p:cNvGrpSpPr/>
         <p:nvPr/>
       </p:nvGrpSpPr>
-      <p:grpSpPr/>
+      <p:grpSpPr>
+        <a:xfrm>
+          <a:off x="0" y="0"/>
+          <a:ext cx="0" cy="0"/>
+          <a:chOff x="0" y="0"/>
+          <a:chExt cx="0" cy="0"/>
+        </a:xfrm>
+      </p:grpSpPr>
       <p:sp>
         <p:nvSpPr>
           <p:cNvPr id="2" name="Rectangle 1"/>
@@ -9120,6 +9061,7 @@
           <a:lstStyle/>
           <a:p>
             <a:pPr algn="ctr"/>
+            <a:endParaRPr/>
           </a:p>
         </p:txBody>
       </p:sp>
@@ -9198,6 +9140,7 @@
           <a:lstStyle/>
           <a:p>
             <a:pPr algn="ctr"/>
+            <a:endParaRPr/>
           </a:p>
         </p:txBody>
       </p:sp>
@@ -9365,7 +9308,7 @@
 </file>
 
 <file path=ppt/slides/slide17.xml><?xml version="1.0" encoding="utf-8"?>
-<p:sld xmlns:a="http://schemas.openxmlformats.org/drawingml/2006/main" xmlns:p="http://schemas.openxmlformats.org/presentationml/2006/main" xmlns:r="http://schemas.openxmlformats.org/officeDocument/2006/relationships">
+<p:sld xmlns:a="http://schemas.openxmlformats.org/drawingml/2006/main" xmlns:r="http://schemas.openxmlformats.org/officeDocument/2006/relationships" xmlns:p="http://schemas.openxmlformats.org/presentationml/2006/main">
   <p:cSld>
     <p:spTree>
       <p:nvGrpSpPr>
@@ -9373,7 +9316,14 @@
         <p:cNvGrpSpPr/>
         <p:nvPr/>
       </p:nvGrpSpPr>
-      <p:grpSpPr/>
+      <p:grpSpPr>
+        <a:xfrm>
+          <a:off x="0" y="0"/>
+          <a:ext cx="0" cy="0"/>
+          <a:chOff x="0" y="0"/>
+          <a:chExt cx="0" cy="0"/>
+        </a:xfrm>
+      </p:grpSpPr>
       <p:sp>
         <p:nvSpPr>
           <p:cNvPr id="2" name="Rectangle 1"/>
@@ -9415,6 +9365,7 @@
           <a:lstStyle/>
           <a:p>
             <a:pPr algn="ctr"/>
+            <a:endParaRPr/>
           </a:p>
         </p:txBody>
       </p:sp>
@@ -9597,7 +9548,7 @@
 </file>
 
 <file path=ppt/slides/slide18.xml><?xml version="1.0" encoding="utf-8"?>
-<p:sld xmlns:a="http://schemas.openxmlformats.org/drawingml/2006/main" xmlns:p="http://schemas.openxmlformats.org/presentationml/2006/main" xmlns:r="http://schemas.openxmlformats.org/officeDocument/2006/relationships">
+<p:sld xmlns:a="http://schemas.openxmlformats.org/drawingml/2006/main" xmlns:r="http://schemas.openxmlformats.org/officeDocument/2006/relationships" xmlns:p="http://schemas.openxmlformats.org/presentationml/2006/main">
   <p:cSld>
     <p:spTree>
       <p:nvGrpSpPr>
@@ -9605,7 +9556,14 @@
         <p:cNvGrpSpPr/>
         <p:nvPr/>
       </p:nvGrpSpPr>
-      <p:grpSpPr/>
+      <p:grpSpPr>
+        <a:xfrm>
+          <a:off x="0" y="0"/>
+          <a:ext cx="0" cy="0"/>
+          <a:chOff x="0" y="0"/>
+          <a:chExt cx="0" cy="0"/>
+        </a:xfrm>
+      </p:grpSpPr>
       <p:sp>
         <p:nvSpPr>
           <p:cNvPr id="2" name="Rectangle 1"/>
@@ -9647,6 +9605,7 @@
           <a:lstStyle/>
           <a:p>
             <a:pPr algn="ctr"/>
+            <a:endParaRPr/>
           </a:p>
         </p:txBody>
       </p:sp>
@@ -9725,6 +9684,7 @@
           <a:lstStyle/>
           <a:p>
             <a:pPr algn="ctr"/>
+            <a:endParaRPr/>
           </a:p>
         </p:txBody>
       </p:sp>
@@ -9882,15 +9842,12 @@
             </a:r>
           </a:p>
           <a:p>
-            <a:r>
-              <a:rPr sz="1250" b="0">
-                <a:solidFill>
-                  <a:srgbClr val="E6E6E6"/>
-                </a:solidFill>
-                <a:latin typeface="Consolas"/>
-              </a:rPr>
-              <a:t/>
-            </a:r>
+            <a:endParaRPr sz="1250" b="0">
+              <a:solidFill>
+                <a:srgbClr val="9CDCFE"/>
+              </a:solidFill>
+              <a:latin typeface="Consolas"/>
+            </a:endParaRPr>
           </a:p>
           <a:p>
             <a:r>
@@ -9914,15 +9871,7 @@
 </file>
 
 <file path=ppt/slides/slide19.xml><?xml version="1.0" encoding="utf-8"?>
-<p:sld xmlns:a="http://schemas.openxmlformats.org/drawingml/2006/main" xmlns:p="http://schemas.openxmlformats.org/presentationml/2006/main" xmlns:r="http://schemas.openxmlformats.org/officeDocument/2006/relationships">
-  <p:bg>
-    <p:bgPr>
-      <a:solidFill>
-        <a:srgbClr val="17202A"/>
-      </a:solidFill>
-      <a:effectLst/>
-    </p:bgPr>
-  </p:bg>
+<p:sld xmlns:a="http://schemas.openxmlformats.org/drawingml/2006/main" xmlns:r="http://schemas.openxmlformats.org/officeDocument/2006/relationships" xmlns:p="http://schemas.openxmlformats.org/presentationml/2006/main">
   <p:cSld>
     <p:spTree>
       <p:nvGrpSpPr>
@@ -9930,7 +9879,44 @@
         <p:cNvGrpSpPr/>
         <p:nvPr/>
       </p:nvGrpSpPr>
-      <p:grpSpPr/>
+      <p:grpSpPr>
+        <a:xfrm>
+          <a:off x="0" y="0"/>
+          <a:ext cx="0" cy="0"/>
+          <a:chOff x="0" y="0"/>
+          <a:chExt cx="0" cy="0"/>
+        </a:xfrm>
+      </p:grpSpPr>
+      <p:pic>
+        <p:nvPicPr>
+          <p:cNvPr id="7" name="그림 6">
+            <a:extLst>
+              <a:ext uri="{FF2B5EF4-FFF2-40B4-BE49-F238E27FC236}">
+                <a16:creationId xmlns:a16="http://schemas.microsoft.com/office/drawing/2014/main" id="{CA2A8057-98A7-FE0D-F9B4-DEA2F171DC08}"/>
+              </a:ext>
+            </a:extLst>
+          </p:cNvPr>
+          <p:cNvPicPr>
+            <a:picLocks noChangeAspect="1"/>
+          </p:cNvPicPr>
+          <p:nvPr/>
+        </p:nvPicPr>
+        <p:blipFill>
+          <a:blip r:embed="rId3"/>
+          <a:stretch>
+            <a:fillRect/>
+          </a:stretch>
+        </p:blipFill>
+        <p:spPr>
+          <a:xfrm>
+            <a:off x="639607" y="1030016"/>
+            <a:ext cx="10912786" cy="4797968"/>
+          </a:xfrm>
+          <a:prstGeom prst="rect">
+            <a:avLst/>
+          </a:prstGeom>
+        </p:spPr>
+      </p:pic>
       <p:sp>
         <p:nvSpPr>
           <p:cNvPr id="2" name="TextBox 1"/>
@@ -9940,7 +9926,7 @@
         <p:spPr>
           <a:xfrm>
             <a:off x="822960" y="1371600"/>
-            <a:ext cx="2743200" cy="1371600"/>
+            <a:ext cx="4160520" cy="1107996"/>
           </a:xfrm>
           <a:prstGeom prst="rect">
             <a:avLst/>
@@ -9954,7 +9940,7 @@
           <a:lstStyle/>
           <a:p>
             <a:r>
-              <a:rPr sz="6600" b="1">
+              <a:rPr sz="6600" b="1" dirty="0">
                 <a:solidFill>
                   <a:srgbClr val="C0392B"/>
                 </a:solidFill>
@@ -10040,6 +10026,7 @@
           <a:lstStyle/>
           <a:p>
             <a:pPr algn="ctr"/>
+            <a:endParaRPr/>
           </a:p>
         </p:txBody>
       </p:sp>
@@ -10119,7 +10106,7 @@
 </file>
 
 <file path=ppt/slides/slide2.xml><?xml version="1.0" encoding="utf-8"?>
-<p:sld xmlns:a="http://schemas.openxmlformats.org/drawingml/2006/main" xmlns:p="http://schemas.openxmlformats.org/presentationml/2006/main" xmlns:r="http://schemas.openxmlformats.org/officeDocument/2006/relationships">
+<p:sld xmlns:a="http://schemas.openxmlformats.org/drawingml/2006/main" xmlns:r="http://schemas.openxmlformats.org/officeDocument/2006/relationships" xmlns:p="http://schemas.openxmlformats.org/presentationml/2006/main">
   <p:cSld>
     <p:spTree>
       <p:nvGrpSpPr>
@@ -10127,7 +10114,14 @@
         <p:cNvGrpSpPr/>
         <p:nvPr/>
       </p:nvGrpSpPr>
-      <p:grpSpPr/>
+      <p:grpSpPr>
+        <a:xfrm>
+          <a:off x="0" y="0"/>
+          <a:ext cx="0" cy="0"/>
+          <a:chOff x="0" y="0"/>
+          <a:chExt cx="0" cy="0"/>
+        </a:xfrm>
+      </p:grpSpPr>
       <p:sp>
         <p:nvSpPr>
           <p:cNvPr id="2" name="Rectangle 1"/>
@@ -10169,6 +10163,7 @@
           <a:lstStyle/>
           <a:p>
             <a:pPr algn="ctr"/>
+            <a:endParaRPr/>
           </a:p>
         </p:txBody>
       </p:sp>
@@ -10348,7 +10343,7 @@
 </file>
 
 <file path=ppt/slides/slide20.xml><?xml version="1.0" encoding="utf-8"?>
-<p:sld xmlns:a="http://schemas.openxmlformats.org/drawingml/2006/main" xmlns:p="http://schemas.openxmlformats.org/presentationml/2006/main" xmlns:r="http://schemas.openxmlformats.org/officeDocument/2006/relationships">
+<p:sld xmlns:a="http://schemas.openxmlformats.org/drawingml/2006/main" xmlns:r="http://schemas.openxmlformats.org/officeDocument/2006/relationships" xmlns:p="http://schemas.openxmlformats.org/presentationml/2006/main">
   <p:cSld>
     <p:spTree>
       <p:nvGrpSpPr>
@@ -10356,7 +10351,14 @@
         <p:cNvGrpSpPr/>
         <p:nvPr/>
       </p:nvGrpSpPr>
-      <p:grpSpPr/>
+      <p:grpSpPr>
+        <a:xfrm>
+          <a:off x="0" y="0"/>
+          <a:ext cx="0" cy="0"/>
+          <a:chOff x="0" y="0"/>
+          <a:chExt cx="0" cy="0"/>
+        </a:xfrm>
+      </p:grpSpPr>
       <p:sp>
         <p:nvSpPr>
           <p:cNvPr id="2" name="Rectangle 1"/>
@@ -10398,6 +10400,7 @@
           <a:lstStyle/>
           <a:p>
             <a:pPr algn="ctr"/>
+            <a:endParaRPr/>
           </a:p>
         </p:txBody>
       </p:sp>
@@ -10476,6 +10479,7 @@
           <a:lstStyle/>
           <a:p>
             <a:pPr algn="ctr"/>
+            <a:endParaRPr/>
           </a:p>
         </p:txBody>
       </p:sp>
@@ -10621,7 +10625,7 @@
 </file>
 
 <file path=ppt/slides/slide21.xml><?xml version="1.0" encoding="utf-8"?>
-<p:sld xmlns:a="http://schemas.openxmlformats.org/drawingml/2006/main" xmlns:p="http://schemas.openxmlformats.org/presentationml/2006/main" xmlns:r="http://schemas.openxmlformats.org/officeDocument/2006/relationships">
+<p:sld xmlns:a="http://schemas.openxmlformats.org/drawingml/2006/main" xmlns:r="http://schemas.openxmlformats.org/officeDocument/2006/relationships" xmlns:p="http://schemas.openxmlformats.org/presentationml/2006/main">
   <p:cSld>
     <p:spTree>
       <p:nvGrpSpPr>
@@ -10629,7 +10633,14 @@
         <p:cNvGrpSpPr/>
         <p:nvPr/>
       </p:nvGrpSpPr>
-      <p:grpSpPr/>
+      <p:grpSpPr>
+        <a:xfrm>
+          <a:off x="0" y="0"/>
+          <a:ext cx="0" cy="0"/>
+          <a:chOff x="0" y="0"/>
+          <a:chExt cx="0" cy="0"/>
+        </a:xfrm>
+      </p:grpSpPr>
       <p:sp>
         <p:nvSpPr>
           <p:cNvPr id="2" name="Rectangle 1"/>
@@ -10671,6 +10682,7 @@
           <a:lstStyle/>
           <a:p>
             <a:pPr algn="ctr"/>
+            <a:endParaRPr/>
           </a:p>
         </p:txBody>
       </p:sp>
@@ -10749,6 +10761,7 @@
           <a:lstStyle/>
           <a:p>
             <a:pPr algn="ctr"/>
+            <a:endParaRPr/>
           </a:p>
         </p:txBody>
       </p:sp>
@@ -10840,15 +10853,12 @@
             </a:r>
           </a:p>
           <a:p>
-            <a:r>
-              <a:rPr sz="1250" b="0">
-                <a:solidFill>
-                  <a:srgbClr val="E6E6E6"/>
-                </a:solidFill>
-                <a:latin typeface="Consolas"/>
-              </a:rPr>
-              <a:t/>
-            </a:r>
+            <a:endParaRPr sz="1250" b="0">
+              <a:solidFill>
+                <a:srgbClr val="9CDCFE"/>
+              </a:solidFill>
+              <a:latin typeface="Consolas"/>
+            </a:endParaRPr>
           </a:p>
           <a:p>
             <a:r>
@@ -10905,7 +10915,7 @@
 </file>
 
 <file path=ppt/slides/slide22.xml><?xml version="1.0" encoding="utf-8"?>
-<p:sld xmlns:a="http://schemas.openxmlformats.org/drawingml/2006/main" xmlns:p="http://schemas.openxmlformats.org/presentationml/2006/main" xmlns:r="http://schemas.openxmlformats.org/officeDocument/2006/relationships">
+<p:sld xmlns:a="http://schemas.openxmlformats.org/drawingml/2006/main" xmlns:r="http://schemas.openxmlformats.org/officeDocument/2006/relationships" xmlns:p="http://schemas.openxmlformats.org/presentationml/2006/main">
   <p:cSld>
     <p:spTree>
       <p:nvGrpSpPr>
@@ -10913,7 +10923,14 @@
         <p:cNvGrpSpPr/>
         <p:nvPr/>
       </p:nvGrpSpPr>
-      <p:grpSpPr/>
+      <p:grpSpPr>
+        <a:xfrm>
+          <a:off x="0" y="0"/>
+          <a:ext cx="0" cy="0"/>
+          <a:chOff x="0" y="0"/>
+          <a:chExt cx="0" cy="0"/>
+        </a:xfrm>
+      </p:grpSpPr>
       <p:sp>
         <p:nvSpPr>
           <p:cNvPr id="2" name="Rectangle 1"/>
@@ -10955,6 +10972,7 @@
           <a:lstStyle/>
           <a:p>
             <a:pPr algn="ctr"/>
+            <a:endParaRPr/>
           </a:p>
         </p:txBody>
       </p:sp>
@@ -11126,7 +11144,7 @@
 </file>
 
 <file path=ppt/slides/slide23.xml><?xml version="1.0" encoding="utf-8"?>
-<p:sld xmlns:a="http://schemas.openxmlformats.org/drawingml/2006/main" xmlns:p="http://schemas.openxmlformats.org/presentationml/2006/main" xmlns:r="http://schemas.openxmlformats.org/officeDocument/2006/relationships">
+<p:sld xmlns:a="http://schemas.openxmlformats.org/drawingml/2006/main" xmlns:r="http://schemas.openxmlformats.org/officeDocument/2006/relationships" xmlns:p="http://schemas.openxmlformats.org/presentationml/2006/main">
   <p:cSld>
     <p:spTree>
       <p:nvGrpSpPr>
@@ -11134,7 +11152,14 @@
         <p:cNvGrpSpPr/>
         <p:nvPr/>
       </p:nvGrpSpPr>
-      <p:grpSpPr/>
+      <p:grpSpPr>
+        <a:xfrm>
+          <a:off x="0" y="0"/>
+          <a:ext cx="0" cy="0"/>
+          <a:chOff x="0" y="0"/>
+          <a:chExt cx="0" cy="0"/>
+        </a:xfrm>
+      </p:grpSpPr>
       <p:sp>
         <p:nvSpPr>
           <p:cNvPr id="2" name="Rectangle 1"/>
@@ -11176,6 +11201,7 @@
           <a:lstStyle/>
           <a:p>
             <a:pPr algn="ctr"/>
+            <a:endParaRPr/>
           </a:p>
         </p:txBody>
       </p:sp>
@@ -11254,6 +11280,7 @@
           <a:lstStyle/>
           <a:p>
             <a:pPr algn="ctr"/>
+            <a:endParaRPr/>
           </a:p>
         </p:txBody>
       </p:sp>
@@ -11432,7 +11459,7 @@
 </file>
 
 <file path=ppt/slides/slide24.xml><?xml version="1.0" encoding="utf-8"?>
-<p:sld xmlns:a="http://schemas.openxmlformats.org/drawingml/2006/main" xmlns:p="http://schemas.openxmlformats.org/presentationml/2006/main" xmlns:r="http://schemas.openxmlformats.org/officeDocument/2006/relationships">
+<p:sld xmlns:a="http://schemas.openxmlformats.org/drawingml/2006/main" xmlns:r="http://schemas.openxmlformats.org/officeDocument/2006/relationships" xmlns:p="http://schemas.openxmlformats.org/presentationml/2006/main">
   <p:cSld>
     <p:spTree>
       <p:nvGrpSpPr>
@@ -11440,7 +11467,14 @@
         <p:cNvGrpSpPr/>
         <p:nvPr/>
       </p:nvGrpSpPr>
-      <p:grpSpPr/>
+      <p:grpSpPr>
+        <a:xfrm>
+          <a:off x="0" y="0"/>
+          <a:ext cx="0" cy="0"/>
+          <a:chOff x="0" y="0"/>
+          <a:chExt cx="0" cy="0"/>
+        </a:xfrm>
+      </p:grpSpPr>
       <p:sp>
         <p:nvSpPr>
           <p:cNvPr id="2" name="Rectangle 1"/>
@@ -11482,6 +11516,7 @@
           <a:lstStyle/>
           <a:p>
             <a:pPr algn="ctr"/>
+            <a:endParaRPr/>
           </a:p>
         </p:txBody>
       </p:sp>
@@ -11643,7 +11678,7 @@
 </file>
 
 <file path=ppt/slides/slide25.xml><?xml version="1.0" encoding="utf-8"?>
-<p:sld xmlns:a="http://schemas.openxmlformats.org/drawingml/2006/main" xmlns:p="http://schemas.openxmlformats.org/presentationml/2006/main" xmlns:r="http://schemas.openxmlformats.org/officeDocument/2006/relationships">
+<p:sld xmlns:a="http://schemas.openxmlformats.org/drawingml/2006/main" xmlns:r="http://schemas.openxmlformats.org/officeDocument/2006/relationships" xmlns:p="http://schemas.openxmlformats.org/presentationml/2006/main">
   <p:cSld>
     <p:spTree>
       <p:nvGrpSpPr>
@@ -11651,7 +11686,14 @@
         <p:cNvGrpSpPr/>
         <p:nvPr/>
       </p:nvGrpSpPr>
-      <p:grpSpPr/>
+      <p:grpSpPr>
+        <a:xfrm>
+          <a:off x="0" y="0"/>
+          <a:ext cx="0" cy="0"/>
+          <a:chOff x="0" y="0"/>
+          <a:chExt cx="0" cy="0"/>
+        </a:xfrm>
+      </p:grpSpPr>
       <p:sp>
         <p:nvSpPr>
           <p:cNvPr id="2" name="Rectangle 1"/>
@@ -11693,6 +11735,7 @@
           <a:lstStyle/>
           <a:p>
             <a:pPr algn="ctr"/>
+            <a:endParaRPr/>
           </a:p>
         </p:txBody>
       </p:sp>
@@ -11771,6 +11814,7 @@
           <a:lstStyle/>
           <a:p>
             <a:pPr algn="ctr"/>
+            <a:endParaRPr/>
           </a:p>
         </p:txBody>
       </p:sp>
@@ -12004,7 +12048,7 @@
 </file>
 
 <file path=ppt/slides/slide26.xml><?xml version="1.0" encoding="utf-8"?>
-<p:sld xmlns:a="http://schemas.openxmlformats.org/drawingml/2006/main" xmlns:p="http://schemas.openxmlformats.org/presentationml/2006/main" xmlns:r="http://schemas.openxmlformats.org/officeDocument/2006/relationships">
+<p:sld xmlns:a="http://schemas.openxmlformats.org/drawingml/2006/main" xmlns:r="http://schemas.openxmlformats.org/officeDocument/2006/relationships" xmlns:p="http://schemas.openxmlformats.org/presentationml/2006/main">
   <p:cSld>
     <p:spTree>
       <p:nvGrpSpPr>
@@ -12012,7 +12056,14 @@
         <p:cNvGrpSpPr/>
         <p:nvPr/>
       </p:nvGrpSpPr>
-      <p:grpSpPr/>
+      <p:grpSpPr>
+        <a:xfrm>
+          <a:off x="0" y="0"/>
+          <a:ext cx="0" cy="0"/>
+          <a:chOff x="0" y="0"/>
+          <a:chExt cx="0" cy="0"/>
+        </a:xfrm>
+      </p:grpSpPr>
       <p:sp>
         <p:nvSpPr>
           <p:cNvPr id="2" name="Rectangle 1"/>
@@ -12054,6 +12105,7 @@
           <a:lstStyle/>
           <a:p>
             <a:pPr algn="ctr"/>
+            <a:endParaRPr/>
           </a:p>
         </p:txBody>
       </p:sp>
@@ -12132,6 +12184,7 @@
           <a:lstStyle/>
           <a:p>
             <a:pPr algn="ctr"/>
+            <a:endParaRPr/>
           </a:p>
         </p:txBody>
       </p:sp>
@@ -12245,15 +12298,12 @@
             </a:r>
           </a:p>
           <a:p>
-            <a:r>
-              <a:rPr sz="1250" b="0">
-                <a:solidFill>
-                  <a:srgbClr val="E6E6E6"/>
-                </a:solidFill>
-                <a:latin typeface="Consolas"/>
-              </a:rPr>
-              <a:t/>
-            </a:r>
+            <a:endParaRPr sz="1250" b="0">
+              <a:solidFill>
+                <a:srgbClr val="9CDCFE"/>
+              </a:solidFill>
+              <a:latin typeface="Consolas"/>
+            </a:endParaRPr>
           </a:p>
           <a:p>
             <a:r>
@@ -12299,7 +12349,7 @@
 </file>
 
 <file path=ppt/slides/slide27.xml><?xml version="1.0" encoding="utf-8"?>
-<p:sld xmlns:a="http://schemas.openxmlformats.org/drawingml/2006/main" xmlns:p="http://schemas.openxmlformats.org/presentationml/2006/main" xmlns:r="http://schemas.openxmlformats.org/officeDocument/2006/relationships">
+<p:sld xmlns:a="http://schemas.openxmlformats.org/drawingml/2006/main" xmlns:r="http://schemas.openxmlformats.org/officeDocument/2006/relationships" xmlns:p="http://schemas.openxmlformats.org/presentationml/2006/main">
   <p:cSld>
     <p:spTree>
       <p:nvGrpSpPr>
@@ -12307,7 +12357,14 @@
         <p:cNvGrpSpPr/>
         <p:nvPr/>
       </p:nvGrpSpPr>
-      <p:grpSpPr/>
+      <p:grpSpPr>
+        <a:xfrm>
+          <a:off x="0" y="0"/>
+          <a:ext cx="0" cy="0"/>
+          <a:chOff x="0" y="0"/>
+          <a:chExt cx="0" cy="0"/>
+        </a:xfrm>
+      </p:grpSpPr>
       <p:sp>
         <p:nvSpPr>
           <p:cNvPr id="2" name="Rectangle 1"/>
@@ -12349,6 +12406,7 @@
           <a:lstStyle/>
           <a:p>
             <a:pPr algn="ctr"/>
+            <a:endParaRPr/>
           </a:p>
         </p:txBody>
       </p:sp>
@@ -12521,7 +12579,7 @@
 </file>
 
 <file path=ppt/slides/slide28.xml><?xml version="1.0" encoding="utf-8"?>
-<p:sld xmlns:a="http://schemas.openxmlformats.org/drawingml/2006/main" xmlns:p="http://schemas.openxmlformats.org/presentationml/2006/main" xmlns:r="http://schemas.openxmlformats.org/officeDocument/2006/relationships">
+<p:sld xmlns:a="http://schemas.openxmlformats.org/drawingml/2006/main" xmlns:r="http://schemas.openxmlformats.org/officeDocument/2006/relationships" xmlns:p="http://schemas.openxmlformats.org/presentationml/2006/main">
   <p:cSld>
     <p:spTree>
       <p:nvGrpSpPr>
@@ -12529,7 +12587,14 @@
         <p:cNvGrpSpPr/>
         <p:nvPr/>
       </p:nvGrpSpPr>
-      <p:grpSpPr/>
+      <p:grpSpPr>
+        <a:xfrm>
+          <a:off x="0" y="0"/>
+          <a:ext cx="0" cy="0"/>
+          <a:chOff x="0" y="0"/>
+          <a:chExt cx="0" cy="0"/>
+        </a:xfrm>
+      </p:grpSpPr>
       <p:sp>
         <p:nvSpPr>
           <p:cNvPr id="2" name="Rectangle 1"/>
@@ -12571,6 +12636,7 @@
           <a:lstStyle/>
           <a:p>
             <a:pPr algn="ctr"/>
+            <a:endParaRPr/>
           </a:p>
         </p:txBody>
       </p:sp>
@@ -12649,6 +12715,7 @@
           <a:lstStyle/>
           <a:p>
             <a:pPr algn="ctr"/>
+            <a:endParaRPr/>
           </a:p>
         </p:txBody>
       </p:sp>
@@ -12849,7 +12916,7 @@
 </file>
 
 <file path=ppt/slides/slide29.xml><?xml version="1.0" encoding="utf-8"?>
-<p:sld xmlns:a="http://schemas.openxmlformats.org/drawingml/2006/main" xmlns:p="http://schemas.openxmlformats.org/presentationml/2006/main" xmlns:r="http://schemas.openxmlformats.org/officeDocument/2006/relationships">
+<p:sld xmlns:a="http://schemas.openxmlformats.org/drawingml/2006/main" xmlns:r="http://schemas.openxmlformats.org/officeDocument/2006/relationships" xmlns:p="http://schemas.openxmlformats.org/presentationml/2006/main">
   <p:cSld>
     <p:spTree>
       <p:nvGrpSpPr>
@@ -12857,7 +12924,14 @@
         <p:cNvGrpSpPr/>
         <p:nvPr/>
       </p:nvGrpSpPr>
-      <p:grpSpPr/>
+      <p:grpSpPr>
+        <a:xfrm>
+          <a:off x="0" y="0"/>
+          <a:ext cx="0" cy="0"/>
+          <a:chOff x="0" y="0"/>
+          <a:chExt cx="0" cy="0"/>
+        </a:xfrm>
+      </p:grpSpPr>
       <p:sp>
         <p:nvSpPr>
           <p:cNvPr id="2" name="Rectangle 1"/>
@@ -12899,6 +12973,7 @@
           <a:lstStyle/>
           <a:p>
             <a:pPr algn="ctr"/>
+            <a:endParaRPr/>
           </a:p>
         </p:txBody>
       </p:sp>
@@ -12977,6 +13052,7 @@
           <a:lstStyle/>
           <a:p>
             <a:pPr algn="ctr"/>
+            <a:endParaRPr/>
           </a:p>
         </p:txBody>
       </p:sp>
@@ -13134,15 +13210,12 @@
             </a:r>
           </a:p>
           <a:p>
-            <a:r>
-              <a:rPr sz="1250" b="0">
-                <a:solidFill>
-                  <a:srgbClr val="E6E6E6"/>
-                </a:solidFill>
-                <a:latin typeface="Consolas"/>
-              </a:rPr>
-              <a:t/>
-            </a:r>
+            <a:endParaRPr sz="1250" b="0">
+              <a:solidFill>
+                <a:srgbClr val="9CDCFE"/>
+              </a:solidFill>
+              <a:latin typeface="Consolas"/>
+            </a:endParaRPr>
           </a:p>
           <a:p>
             <a:r>
@@ -13166,7 +13239,7 @@
 </file>
 
 <file path=ppt/slides/slide3.xml><?xml version="1.0" encoding="utf-8"?>
-<p:sld xmlns:a="http://schemas.openxmlformats.org/drawingml/2006/main" xmlns:p="http://schemas.openxmlformats.org/presentationml/2006/main" xmlns:r="http://schemas.openxmlformats.org/officeDocument/2006/relationships">
+<p:sld xmlns:a="http://schemas.openxmlformats.org/drawingml/2006/main" xmlns:r="http://schemas.openxmlformats.org/officeDocument/2006/relationships" xmlns:p="http://schemas.openxmlformats.org/presentationml/2006/main">
   <p:cSld>
     <p:spTree>
       <p:nvGrpSpPr>
@@ -13174,7 +13247,14 @@
         <p:cNvGrpSpPr/>
         <p:nvPr/>
       </p:nvGrpSpPr>
-      <p:grpSpPr/>
+      <p:grpSpPr>
+        <a:xfrm>
+          <a:off x="0" y="0"/>
+          <a:ext cx="0" cy="0"/>
+          <a:chOff x="0" y="0"/>
+          <a:chExt cx="0" cy="0"/>
+        </a:xfrm>
+      </p:grpSpPr>
       <p:sp>
         <p:nvSpPr>
           <p:cNvPr id="2" name="Rectangle 1"/>
@@ -13216,6 +13296,7 @@
           <a:lstStyle/>
           <a:p>
             <a:pPr algn="ctr"/>
+            <a:endParaRPr/>
           </a:p>
         </p:txBody>
       </p:sp>
@@ -13424,7 +13505,7 @@
 </file>
 
 <file path=ppt/slides/slide30.xml><?xml version="1.0" encoding="utf-8"?>
-<p:sld xmlns:a="http://schemas.openxmlformats.org/drawingml/2006/main" xmlns:p="http://schemas.openxmlformats.org/presentationml/2006/main" xmlns:r="http://schemas.openxmlformats.org/officeDocument/2006/relationships">
+<p:sld xmlns:a="http://schemas.openxmlformats.org/drawingml/2006/main" xmlns:r="http://schemas.openxmlformats.org/officeDocument/2006/relationships" xmlns:p="http://schemas.openxmlformats.org/presentationml/2006/main">
   <p:cSld>
     <p:spTree>
       <p:nvGrpSpPr>
@@ -13432,7 +13513,14 @@
         <p:cNvGrpSpPr/>
         <p:nvPr/>
       </p:nvGrpSpPr>
-      <p:grpSpPr/>
+      <p:grpSpPr>
+        <a:xfrm>
+          <a:off x="0" y="0"/>
+          <a:ext cx="0" cy="0"/>
+          <a:chOff x="0" y="0"/>
+          <a:chExt cx="0" cy="0"/>
+        </a:xfrm>
+      </p:grpSpPr>
       <p:sp>
         <p:nvSpPr>
           <p:cNvPr id="2" name="Rectangle 1"/>
@@ -13474,6 +13562,7 @@
           <a:lstStyle/>
           <a:p>
             <a:pPr algn="ctr"/>
+            <a:endParaRPr/>
           </a:p>
         </p:txBody>
       </p:sp>
@@ -13651,15 +13740,7 @@
 </file>
 
 <file path=ppt/slides/slide31.xml><?xml version="1.0" encoding="utf-8"?>
-<p:sld xmlns:a="http://schemas.openxmlformats.org/drawingml/2006/main" xmlns:p="http://schemas.openxmlformats.org/presentationml/2006/main" xmlns:r="http://schemas.openxmlformats.org/officeDocument/2006/relationships">
-  <p:bg>
-    <p:bgPr>
-      <a:solidFill>
-        <a:srgbClr val="17202A"/>
-      </a:solidFill>
-      <a:effectLst/>
-    </p:bgPr>
-  </p:bg>
+<p:sld xmlns:a="http://schemas.openxmlformats.org/drawingml/2006/main" xmlns:r="http://schemas.openxmlformats.org/officeDocument/2006/relationships" xmlns:p="http://schemas.openxmlformats.org/presentationml/2006/main">
   <p:cSld>
     <p:spTree>
       <p:nvGrpSpPr>
@@ -13667,7 +13748,44 @@
         <p:cNvGrpSpPr/>
         <p:nvPr/>
       </p:nvGrpSpPr>
-      <p:grpSpPr/>
+      <p:grpSpPr>
+        <a:xfrm>
+          <a:off x="0" y="0"/>
+          <a:ext cx="0" cy="0"/>
+          <a:chOff x="0" y="0"/>
+          <a:chExt cx="0" cy="0"/>
+        </a:xfrm>
+      </p:grpSpPr>
+      <p:pic>
+        <p:nvPicPr>
+          <p:cNvPr id="7" name="그림 6">
+            <a:extLst>
+              <a:ext uri="{FF2B5EF4-FFF2-40B4-BE49-F238E27FC236}">
+                <a16:creationId xmlns:a16="http://schemas.microsoft.com/office/drawing/2014/main" id="{8229FFD8-84AA-3E79-58C8-1856C1F59F2B}"/>
+              </a:ext>
+            </a:extLst>
+          </p:cNvPr>
+          <p:cNvPicPr>
+            <a:picLocks noChangeAspect="1"/>
+          </p:cNvPicPr>
+          <p:nvPr/>
+        </p:nvPicPr>
+        <p:blipFill>
+          <a:blip r:embed="rId3"/>
+          <a:stretch>
+            <a:fillRect/>
+          </a:stretch>
+        </p:blipFill>
+        <p:spPr>
+          <a:xfrm>
+            <a:off x="639607" y="1030016"/>
+            <a:ext cx="10912786" cy="4797968"/>
+          </a:xfrm>
+          <a:prstGeom prst="rect">
+            <a:avLst/>
+          </a:prstGeom>
+        </p:spPr>
+      </p:pic>
       <p:sp>
         <p:nvSpPr>
           <p:cNvPr id="2" name="TextBox 1"/>
@@ -13677,7 +13795,7 @@
         <p:spPr>
           <a:xfrm>
             <a:off x="822960" y="1371600"/>
-            <a:ext cx="2743200" cy="1371600"/>
+            <a:ext cx="4820458" cy="1107996"/>
           </a:xfrm>
           <a:prstGeom prst="rect">
             <a:avLst/>
@@ -13777,6 +13895,7 @@
           <a:lstStyle/>
           <a:p>
             <a:pPr algn="ctr"/>
+            <a:endParaRPr/>
           </a:p>
         </p:txBody>
       </p:sp>
@@ -13856,7 +13975,7 @@
 </file>
 
 <file path=ppt/slides/slide32.xml><?xml version="1.0" encoding="utf-8"?>
-<p:sld xmlns:a="http://schemas.openxmlformats.org/drawingml/2006/main" xmlns:p="http://schemas.openxmlformats.org/presentationml/2006/main" xmlns:r="http://schemas.openxmlformats.org/officeDocument/2006/relationships">
+<p:sld xmlns:a="http://schemas.openxmlformats.org/drawingml/2006/main" xmlns:r="http://schemas.openxmlformats.org/officeDocument/2006/relationships" xmlns:p="http://schemas.openxmlformats.org/presentationml/2006/main">
   <p:cSld>
     <p:spTree>
       <p:nvGrpSpPr>
@@ -13864,7 +13983,14 @@
         <p:cNvGrpSpPr/>
         <p:nvPr/>
       </p:nvGrpSpPr>
-      <p:grpSpPr/>
+      <p:grpSpPr>
+        <a:xfrm>
+          <a:off x="0" y="0"/>
+          <a:ext cx="0" cy="0"/>
+          <a:chOff x="0" y="0"/>
+          <a:chExt cx="0" cy="0"/>
+        </a:xfrm>
+      </p:grpSpPr>
       <p:sp>
         <p:nvSpPr>
           <p:cNvPr id="2" name="Rectangle 1"/>
@@ -13906,6 +14032,7 @@
           <a:lstStyle/>
           <a:p>
             <a:pPr algn="ctr"/>
+            <a:endParaRPr/>
           </a:p>
         </p:txBody>
       </p:sp>
@@ -13984,6 +14111,7 @@
           <a:lstStyle/>
           <a:p>
             <a:pPr algn="ctr"/>
+            <a:endParaRPr/>
           </a:p>
         </p:txBody>
       </p:sp>
@@ -14173,7 +14301,7 @@
 </file>
 
 <file path=ppt/slides/slide33.xml><?xml version="1.0" encoding="utf-8"?>
-<p:sld xmlns:a="http://schemas.openxmlformats.org/drawingml/2006/main" xmlns:p="http://schemas.openxmlformats.org/presentationml/2006/main" xmlns:r="http://schemas.openxmlformats.org/officeDocument/2006/relationships">
+<p:sld xmlns:a="http://schemas.openxmlformats.org/drawingml/2006/main" xmlns:r="http://schemas.openxmlformats.org/officeDocument/2006/relationships" xmlns:p="http://schemas.openxmlformats.org/presentationml/2006/main">
   <p:cSld>
     <p:spTree>
       <p:nvGrpSpPr>
@@ -14181,7 +14309,14 @@
         <p:cNvGrpSpPr/>
         <p:nvPr/>
       </p:nvGrpSpPr>
-      <p:grpSpPr/>
+      <p:grpSpPr>
+        <a:xfrm>
+          <a:off x="0" y="0"/>
+          <a:ext cx="0" cy="0"/>
+          <a:chOff x="0" y="0"/>
+          <a:chExt cx="0" cy="0"/>
+        </a:xfrm>
+      </p:grpSpPr>
       <p:sp>
         <p:nvSpPr>
           <p:cNvPr id="2" name="Rectangle 1"/>
@@ -14223,6 +14358,7 @@
           <a:lstStyle/>
           <a:p>
             <a:pPr algn="ctr"/>
+            <a:endParaRPr/>
           </a:p>
         </p:txBody>
       </p:sp>
@@ -14395,7 +14531,7 @@
 </file>
 
 <file path=ppt/slides/slide34.xml><?xml version="1.0" encoding="utf-8"?>
-<p:sld xmlns:a="http://schemas.openxmlformats.org/drawingml/2006/main" xmlns:p="http://schemas.openxmlformats.org/presentationml/2006/main" xmlns:r="http://schemas.openxmlformats.org/officeDocument/2006/relationships">
+<p:sld xmlns:a="http://schemas.openxmlformats.org/drawingml/2006/main" xmlns:r="http://schemas.openxmlformats.org/officeDocument/2006/relationships" xmlns:p="http://schemas.openxmlformats.org/presentationml/2006/main">
   <p:cSld>
     <p:spTree>
       <p:nvGrpSpPr>
@@ -14403,7 +14539,14 @@
         <p:cNvGrpSpPr/>
         <p:nvPr/>
       </p:nvGrpSpPr>
-      <p:grpSpPr/>
+      <p:grpSpPr>
+        <a:xfrm>
+          <a:off x="0" y="0"/>
+          <a:ext cx="0" cy="0"/>
+          <a:chOff x="0" y="0"/>
+          <a:chExt cx="0" cy="0"/>
+        </a:xfrm>
+      </p:grpSpPr>
       <p:sp>
         <p:nvSpPr>
           <p:cNvPr id="2" name="Rectangle 1"/>
@@ -14445,6 +14588,7 @@
           <a:lstStyle/>
           <a:p>
             <a:pPr algn="ctr"/>
+            <a:endParaRPr/>
           </a:p>
         </p:txBody>
       </p:sp>
@@ -14523,6 +14667,7 @@
           <a:lstStyle/>
           <a:p>
             <a:pPr algn="ctr"/>
+            <a:endParaRPr/>
           </a:p>
         </p:txBody>
       </p:sp>
@@ -14701,7 +14846,7 @@
 </file>
 
 <file path=ppt/slides/slide35.xml><?xml version="1.0" encoding="utf-8"?>
-<p:sld xmlns:a="http://schemas.openxmlformats.org/drawingml/2006/main" xmlns:p="http://schemas.openxmlformats.org/presentationml/2006/main" xmlns:r="http://schemas.openxmlformats.org/officeDocument/2006/relationships">
+<p:sld xmlns:a="http://schemas.openxmlformats.org/drawingml/2006/main" xmlns:r="http://schemas.openxmlformats.org/officeDocument/2006/relationships" xmlns:p="http://schemas.openxmlformats.org/presentationml/2006/main">
   <p:cSld>
     <p:spTree>
       <p:nvGrpSpPr>
@@ -14709,7 +14854,14 @@
         <p:cNvGrpSpPr/>
         <p:nvPr/>
       </p:nvGrpSpPr>
-      <p:grpSpPr/>
+      <p:grpSpPr>
+        <a:xfrm>
+          <a:off x="0" y="0"/>
+          <a:ext cx="0" cy="0"/>
+          <a:chOff x="0" y="0"/>
+          <a:chExt cx="0" cy="0"/>
+        </a:xfrm>
+      </p:grpSpPr>
       <p:sp>
         <p:nvSpPr>
           <p:cNvPr id="2" name="Rectangle 1"/>
@@ -14751,6 +14903,7 @@
           <a:lstStyle/>
           <a:p>
             <a:pPr algn="ctr"/>
+            <a:endParaRPr/>
           </a:p>
         </p:txBody>
       </p:sp>
@@ -14943,7 +15096,7 @@
 </file>
 
 <file path=ppt/slides/slide36.xml><?xml version="1.0" encoding="utf-8"?>
-<p:sld xmlns:a="http://schemas.openxmlformats.org/drawingml/2006/main" xmlns:p="http://schemas.openxmlformats.org/presentationml/2006/main" xmlns:r="http://schemas.openxmlformats.org/officeDocument/2006/relationships">
+<p:sld xmlns:a="http://schemas.openxmlformats.org/drawingml/2006/main" xmlns:r="http://schemas.openxmlformats.org/officeDocument/2006/relationships" xmlns:p="http://schemas.openxmlformats.org/presentationml/2006/main">
   <p:cSld>
     <p:spTree>
       <p:nvGrpSpPr>
@@ -14951,7 +15104,14 @@
         <p:cNvGrpSpPr/>
         <p:nvPr/>
       </p:nvGrpSpPr>
-      <p:grpSpPr/>
+      <p:grpSpPr>
+        <a:xfrm>
+          <a:off x="0" y="0"/>
+          <a:ext cx="0" cy="0"/>
+          <a:chOff x="0" y="0"/>
+          <a:chExt cx="0" cy="0"/>
+        </a:xfrm>
+      </p:grpSpPr>
       <p:sp>
         <p:nvSpPr>
           <p:cNvPr id="2" name="Rectangle 1"/>
@@ -14993,6 +15153,7 @@
           <a:lstStyle/>
           <a:p>
             <a:pPr algn="ctr"/>
+            <a:endParaRPr/>
           </a:p>
         </p:txBody>
       </p:sp>
@@ -15071,6 +15232,7 @@
           <a:lstStyle/>
           <a:p>
             <a:pPr algn="ctr"/>
+            <a:endParaRPr/>
           </a:p>
         </p:txBody>
       </p:sp>
@@ -15162,15 +15324,12 @@
             </a:r>
           </a:p>
           <a:p>
-            <a:r>
-              <a:rPr sz="1250" b="0">
-                <a:solidFill>
-                  <a:srgbClr val="E6E6E6"/>
-                </a:solidFill>
-                <a:latin typeface="Consolas"/>
-              </a:rPr>
-              <a:t/>
-            </a:r>
+            <a:endParaRPr sz="1250" b="0">
+              <a:solidFill>
+                <a:srgbClr val="E6E6E6"/>
+              </a:solidFill>
+              <a:latin typeface="Consolas"/>
+            </a:endParaRPr>
           </a:p>
           <a:p>
             <a:r>
@@ -15271,7 +15430,7 @@
 </file>
 
 <file path=ppt/slides/slide37.xml><?xml version="1.0" encoding="utf-8"?>
-<p:sld xmlns:a="http://schemas.openxmlformats.org/drawingml/2006/main" xmlns:p="http://schemas.openxmlformats.org/presentationml/2006/main" xmlns:r="http://schemas.openxmlformats.org/officeDocument/2006/relationships">
+<p:sld xmlns:a="http://schemas.openxmlformats.org/drawingml/2006/main" xmlns:r="http://schemas.openxmlformats.org/officeDocument/2006/relationships" xmlns:p="http://schemas.openxmlformats.org/presentationml/2006/main">
   <p:cSld>
     <p:spTree>
       <p:nvGrpSpPr>
@@ -15279,7 +15438,14 @@
         <p:cNvGrpSpPr/>
         <p:nvPr/>
       </p:nvGrpSpPr>
-      <p:grpSpPr/>
+      <p:grpSpPr>
+        <a:xfrm>
+          <a:off x="0" y="0"/>
+          <a:ext cx="0" cy="0"/>
+          <a:chOff x="0" y="0"/>
+          <a:chExt cx="0" cy="0"/>
+        </a:xfrm>
+      </p:grpSpPr>
       <p:sp>
         <p:nvSpPr>
           <p:cNvPr id="2" name="Rectangle 1"/>
@@ -15321,6 +15487,7 @@
           <a:lstStyle/>
           <a:p>
             <a:pPr algn="ctr"/>
+            <a:endParaRPr/>
           </a:p>
         </p:txBody>
       </p:sp>
@@ -15492,7 +15659,7 @@
 </file>
 
 <file path=ppt/slides/slide38.xml><?xml version="1.0" encoding="utf-8"?>
-<p:sld xmlns:a="http://schemas.openxmlformats.org/drawingml/2006/main" xmlns:p="http://schemas.openxmlformats.org/presentationml/2006/main" xmlns:r="http://schemas.openxmlformats.org/officeDocument/2006/relationships">
+<p:sld xmlns:a="http://schemas.openxmlformats.org/drawingml/2006/main" xmlns:r="http://schemas.openxmlformats.org/officeDocument/2006/relationships" xmlns:p="http://schemas.openxmlformats.org/presentationml/2006/main">
   <p:cSld>
     <p:spTree>
       <p:nvGrpSpPr>
@@ -15500,7 +15667,14 @@
         <p:cNvGrpSpPr/>
         <p:nvPr/>
       </p:nvGrpSpPr>
-      <p:grpSpPr/>
+      <p:grpSpPr>
+        <a:xfrm>
+          <a:off x="0" y="0"/>
+          <a:ext cx="0" cy="0"/>
+          <a:chOff x="0" y="0"/>
+          <a:chExt cx="0" cy="0"/>
+        </a:xfrm>
+      </p:grpSpPr>
       <p:sp>
         <p:nvSpPr>
           <p:cNvPr id="2" name="Rectangle 1"/>
@@ -15542,6 +15716,7 @@
           <a:lstStyle/>
           <a:p>
             <a:pPr algn="ctr"/>
+            <a:endParaRPr/>
           </a:p>
         </p:txBody>
       </p:sp>
@@ -15713,7 +15888,7 @@
 </file>
 
 <file path=ppt/slides/slide39.xml><?xml version="1.0" encoding="utf-8"?>
-<p:sld xmlns:a="http://schemas.openxmlformats.org/drawingml/2006/main" xmlns:p="http://schemas.openxmlformats.org/presentationml/2006/main" xmlns:r="http://schemas.openxmlformats.org/officeDocument/2006/relationships">
+<p:sld xmlns:a="http://schemas.openxmlformats.org/drawingml/2006/main" xmlns:r="http://schemas.openxmlformats.org/officeDocument/2006/relationships" xmlns:p="http://schemas.openxmlformats.org/presentationml/2006/main">
   <p:cSld>
     <p:spTree>
       <p:nvGrpSpPr>
@@ -15721,7 +15896,14 @@
         <p:cNvGrpSpPr/>
         <p:nvPr/>
       </p:nvGrpSpPr>
-      <p:grpSpPr/>
+      <p:grpSpPr>
+        <a:xfrm>
+          <a:off x="0" y="0"/>
+          <a:ext cx="0" cy="0"/>
+          <a:chOff x="0" y="0"/>
+          <a:chExt cx="0" cy="0"/>
+        </a:xfrm>
+      </p:grpSpPr>
       <p:sp>
         <p:nvSpPr>
           <p:cNvPr id="2" name="Rectangle 1"/>
@@ -15763,6 +15945,7 @@
           <a:lstStyle/>
           <a:p>
             <a:pPr algn="ctr"/>
+            <a:endParaRPr/>
           </a:p>
         </p:txBody>
       </p:sp>
@@ -15841,6 +16024,7 @@
           <a:lstStyle/>
           <a:p>
             <a:pPr algn="ctr"/>
+            <a:endParaRPr/>
           </a:p>
         </p:txBody>
       </p:sp>
@@ -15888,15 +16072,12 @@
             </a:r>
           </a:p>
           <a:p>
-            <a:r>
-              <a:rPr sz="1250" b="0">
-                <a:solidFill>
-                  <a:srgbClr val="E6E6E6"/>
-                </a:solidFill>
-                <a:latin typeface="Consolas"/>
-              </a:rPr>
-              <a:t/>
-            </a:r>
+            <a:endParaRPr sz="1250" b="0">
+              <a:solidFill>
+                <a:srgbClr val="E6E6E6"/>
+              </a:solidFill>
+              <a:latin typeface="Consolas"/>
+            </a:endParaRPr>
           </a:p>
           <a:p>
             <a:r>
@@ -15943,15 +16124,12 @@
             </a:r>
           </a:p>
           <a:p>
-            <a:r>
-              <a:rPr sz="1250" b="0">
-                <a:solidFill>
-                  <a:srgbClr val="E6E6E6"/>
-                </a:solidFill>
-                <a:latin typeface="Consolas"/>
-              </a:rPr>
-              <a:t/>
-            </a:r>
+            <a:endParaRPr sz="1250" b="0">
+              <a:solidFill>
+                <a:srgbClr val="E6E6E6"/>
+              </a:solidFill>
+              <a:latin typeface="Consolas"/>
+            </a:endParaRPr>
           </a:p>
           <a:p>
             <a:r>
@@ -16074,15 +16252,7 @@
 </file>
 
 <file path=ppt/slides/slide4.xml><?xml version="1.0" encoding="utf-8"?>
-<p:sld xmlns:a="http://schemas.openxmlformats.org/drawingml/2006/main" xmlns:p="http://schemas.openxmlformats.org/presentationml/2006/main" xmlns:r="http://schemas.openxmlformats.org/officeDocument/2006/relationships">
-  <p:bg>
-    <p:bgPr>
-      <a:solidFill>
-        <a:srgbClr val="17202A"/>
-      </a:solidFill>
-      <a:effectLst/>
-    </p:bgPr>
-  </p:bg>
+<p:sld xmlns:a="http://schemas.openxmlformats.org/drawingml/2006/main" xmlns:r="http://schemas.openxmlformats.org/officeDocument/2006/relationships" xmlns:p="http://schemas.openxmlformats.org/presentationml/2006/main">
   <p:cSld>
     <p:spTree>
       <p:nvGrpSpPr>
@@ -16090,7 +16260,44 @@
         <p:cNvGrpSpPr/>
         <p:nvPr/>
       </p:nvGrpSpPr>
-      <p:grpSpPr/>
+      <p:grpSpPr>
+        <a:xfrm>
+          <a:off x="0" y="0"/>
+          <a:ext cx="0" cy="0"/>
+          <a:chOff x="0" y="0"/>
+          <a:chExt cx="0" cy="0"/>
+        </a:xfrm>
+      </p:grpSpPr>
+      <p:pic>
+        <p:nvPicPr>
+          <p:cNvPr id="7" name="그림 6">
+            <a:extLst>
+              <a:ext uri="{FF2B5EF4-FFF2-40B4-BE49-F238E27FC236}">
+                <a16:creationId xmlns:a16="http://schemas.microsoft.com/office/drawing/2014/main" id="{C1BE4BF5-623C-E5F6-1484-3A1B4D2FCE1B}"/>
+              </a:ext>
+            </a:extLst>
+          </p:cNvPr>
+          <p:cNvPicPr>
+            <a:picLocks noChangeAspect="1"/>
+          </p:cNvPicPr>
+          <p:nvPr/>
+        </p:nvPicPr>
+        <p:blipFill>
+          <a:blip r:embed="rId3"/>
+          <a:stretch>
+            <a:fillRect/>
+          </a:stretch>
+        </p:blipFill>
+        <p:spPr>
+          <a:xfrm>
+            <a:off x="639607" y="1030016"/>
+            <a:ext cx="10912786" cy="4797968"/>
+          </a:xfrm>
+          <a:prstGeom prst="rect">
+            <a:avLst/>
+          </a:prstGeom>
+        </p:spPr>
+      </p:pic>
       <p:sp>
         <p:nvSpPr>
           <p:cNvPr id="2" name="TextBox 1"/>
@@ -16100,7 +16307,7 @@
         <p:spPr>
           <a:xfrm>
             <a:off x="822960" y="1371600"/>
-            <a:ext cx="2743200" cy="1371600"/>
+            <a:ext cx="4114800" cy="1107996"/>
           </a:xfrm>
           <a:prstGeom prst="rect">
             <a:avLst/>
@@ -16114,7 +16321,7 @@
           <a:lstStyle/>
           <a:p>
             <a:r>
-              <a:rPr sz="6600" b="1">
+              <a:rPr sz="6600" b="1" dirty="0">
                 <a:solidFill>
                   <a:srgbClr val="C0392B"/>
                 </a:solidFill>
@@ -16200,6 +16407,7 @@
           <a:lstStyle/>
           <a:p>
             <a:pPr algn="ctr"/>
+            <a:endParaRPr/>
           </a:p>
         </p:txBody>
       </p:sp>
@@ -16279,7 +16487,7 @@
 </file>
 
 <file path=ppt/slides/slide40.xml><?xml version="1.0" encoding="utf-8"?>
-<p:sld xmlns:a="http://schemas.openxmlformats.org/drawingml/2006/main" xmlns:p="http://schemas.openxmlformats.org/presentationml/2006/main" xmlns:r="http://schemas.openxmlformats.org/officeDocument/2006/relationships">
+<p:sld xmlns:a="http://schemas.openxmlformats.org/drawingml/2006/main" xmlns:r="http://schemas.openxmlformats.org/officeDocument/2006/relationships" xmlns:p="http://schemas.openxmlformats.org/presentationml/2006/main">
   <p:cSld>
     <p:spTree>
       <p:nvGrpSpPr>
@@ -16287,7 +16495,14 @@
         <p:cNvGrpSpPr/>
         <p:nvPr/>
       </p:nvGrpSpPr>
-      <p:grpSpPr/>
+      <p:grpSpPr>
+        <a:xfrm>
+          <a:off x="0" y="0"/>
+          <a:ext cx="0" cy="0"/>
+          <a:chOff x="0" y="0"/>
+          <a:chExt cx="0" cy="0"/>
+        </a:xfrm>
+      </p:grpSpPr>
       <p:sp>
         <p:nvSpPr>
           <p:cNvPr id="2" name="Rectangle 1"/>
@@ -16329,6 +16544,7 @@
           <a:lstStyle/>
           <a:p>
             <a:pPr algn="ctr"/>
+            <a:endParaRPr/>
           </a:p>
         </p:txBody>
       </p:sp>
@@ -16407,6 +16623,7 @@
           <a:lstStyle/>
           <a:p>
             <a:pPr algn="ctr"/>
+            <a:endParaRPr/>
           </a:p>
         </p:txBody>
       </p:sp>
@@ -16465,15 +16682,12 @@
             </a:r>
           </a:p>
           <a:p>
-            <a:r>
-              <a:rPr sz="1250" b="0">
-                <a:solidFill>
-                  <a:srgbClr val="E6E6E6"/>
-                </a:solidFill>
-                <a:latin typeface="Consolas"/>
-              </a:rPr>
-              <a:t/>
-            </a:r>
+            <a:endParaRPr sz="1250" b="0">
+              <a:solidFill>
+                <a:srgbClr val="E6E6E6"/>
+              </a:solidFill>
+              <a:latin typeface="Consolas"/>
+            </a:endParaRPr>
           </a:p>
           <a:p>
             <a:r>
@@ -16520,15 +16734,12 @@
             </a:r>
           </a:p>
           <a:p>
-            <a:r>
-              <a:rPr sz="1250" b="0">
-                <a:solidFill>
-                  <a:srgbClr val="E6E6E6"/>
-                </a:solidFill>
-                <a:latin typeface="Consolas"/>
-              </a:rPr>
-              <a:t/>
-            </a:r>
+            <a:endParaRPr sz="1250" b="0">
+              <a:solidFill>
+                <a:srgbClr val="E6E6E6"/>
+              </a:solidFill>
+              <a:latin typeface="Consolas"/>
+            </a:endParaRPr>
           </a:p>
           <a:p>
             <a:r>
@@ -16553,15 +16764,12 @@
             </a:r>
           </a:p>
           <a:p>
-            <a:r>
-              <a:rPr sz="1250" b="0">
-                <a:solidFill>
-                  <a:srgbClr val="E6E6E6"/>
-                </a:solidFill>
-                <a:latin typeface="Consolas"/>
-              </a:rPr>
-              <a:t/>
-            </a:r>
+            <a:endParaRPr sz="1250" b="0">
+              <a:solidFill>
+                <a:srgbClr val="E6E6E6"/>
+              </a:solidFill>
+              <a:latin typeface="Consolas"/>
+            </a:endParaRPr>
           </a:p>
           <a:p>
             <a:r>
@@ -16618,7 +16826,7 @@
 </file>
 
 <file path=ppt/slides/slide41.xml><?xml version="1.0" encoding="utf-8"?>
-<p:sld xmlns:a="http://schemas.openxmlformats.org/drawingml/2006/main" xmlns:p="http://schemas.openxmlformats.org/presentationml/2006/main" xmlns:r="http://schemas.openxmlformats.org/officeDocument/2006/relationships">
+<p:sld xmlns:a="http://schemas.openxmlformats.org/drawingml/2006/main" xmlns:r="http://schemas.openxmlformats.org/officeDocument/2006/relationships" xmlns:p="http://schemas.openxmlformats.org/presentationml/2006/main">
   <p:cSld>
     <p:spTree>
       <p:nvGrpSpPr>
@@ -16626,7 +16834,14 @@
         <p:cNvGrpSpPr/>
         <p:nvPr/>
       </p:nvGrpSpPr>
-      <p:grpSpPr/>
+      <p:grpSpPr>
+        <a:xfrm>
+          <a:off x="0" y="0"/>
+          <a:ext cx="0" cy="0"/>
+          <a:chOff x="0" y="0"/>
+          <a:chExt cx="0" cy="0"/>
+        </a:xfrm>
+      </p:grpSpPr>
       <p:sp>
         <p:nvSpPr>
           <p:cNvPr id="2" name="Rectangle 1"/>
@@ -16668,6 +16883,7 @@
           <a:lstStyle/>
           <a:p>
             <a:pPr algn="ctr"/>
+            <a:endParaRPr/>
           </a:p>
         </p:txBody>
       </p:sp>
@@ -16829,7 +17045,7 @@
 </file>
 
 <file path=ppt/slides/slide42.xml><?xml version="1.0" encoding="utf-8"?>
-<p:sld xmlns:a="http://schemas.openxmlformats.org/drawingml/2006/main" xmlns:p="http://schemas.openxmlformats.org/presentationml/2006/main" xmlns:r="http://schemas.openxmlformats.org/officeDocument/2006/relationships">
+<p:sld xmlns:a="http://schemas.openxmlformats.org/drawingml/2006/main" xmlns:r="http://schemas.openxmlformats.org/officeDocument/2006/relationships" xmlns:p="http://schemas.openxmlformats.org/presentationml/2006/main">
   <p:cSld>
     <p:spTree>
       <p:nvGrpSpPr>
@@ -16837,7 +17053,14 @@
         <p:cNvGrpSpPr/>
         <p:nvPr/>
       </p:nvGrpSpPr>
-      <p:grpSpPr/>
+      <p:grpSpPr>
+        <a:xfrm>
+          <a:off x="0" y="0"/>
+          <a:ext cx="0" cy="0"/>
+          <a:chOff x="0" y="0"/>
+          <a:chExt cx="0" cy="0"/>
+        </a:xfrm>
+      </p:grpSpPr>
       <p:sp>
         <p:nvSpPr>
           <p:cNvPr id="2" name="Rectangle 1"/>
@@ -16879,6 +17102,7 @@
           <a:lstStyle/>
           <a:p>
             <a:pPr algn="ctr"/>
+            <a:endParaRPr/>
           </a:p>
         </p:txBody>
       </p:sp>
@@ -16957,6 +17181,7 @@
           <a:lstStyle/>
           <a:p>
             <a:pPr algn="ctr"/>
+            <a:endParaRPr/>
           </a:p>
         </p:txBody>
       </p:sp>
@@ -17048,15 +17273,12 @@
             </a:r>
           </a:p>
           <a:p>
-            <a:r>
-              <a:rPr sz="1250" b="0">
-                <a:solidFill>
-                  <a:srgbClr val="E6E6E6"/>
-                </a:solidFill>
-                <a:latin typeface="Consolas"/>
-              </a:rPr>
-              <a:t/>
-            </a:r>
+            <a:endParaRPr sz="1250" b="0">
+              <a:solidFill>
+                <a:srgbClr val="E6E6E6"/>
+              </a:solidFill>
+              <a:latin typeface="Consolas"/>
+            </a:endParaRPr>
           </a:p>
           <a:p>
             <a:r>
@@ -17135,7 +17357,7 @@
 </file>
 
 <file path=ppt/slides/slide43.xml><?xml version="1.0" encoding="utf-8"?>
-<p:sld xmlns:a="http://schemas.openxmlformats.org/drawingml/2006/main" xmlns:p="http://schemas.openxmlformats.org/presentationml/2006/main" xmlns:r="http://schemas.openxmlformats.org/officeDocument/2006/relationships">
+<p:sld xmlns:a="http://schemas.openxmlformats.org/drawingml/2006/main" xmlns:r="http://schemas.openxmlformats.org/officeDocument/2006/relationships" xmlns:p="http://schemas.openxmlformats.org/presentationml/2006/main">
   <p:cSld>
     <p:spTree>
       <p:nvGrpSpPr>
@@ -17143,7 +17365,14 @@
         <p:cNvGrpSpPr/>
         <p:nvPr/>
       </p:nvGrpSpPr>
-      <p:grpSpPr/>
+      <p:grpSpPr>
+        <a:xfrm>
+          <a:off x="0" y="0"/>
+          <a:ext cx="0" cy="0"/>
+          <a:chOff x="0" y="0"/>
+          <a:chExt cx="0" cy="0"/>
+        </a:xfrm>
+      </p:grpSpPr>
       <p:sp>
         <p:nvSpPr>
           <p:cNvPr id="2" name="Rectangle 1"/>
@@ -17185,6 +17414,7 @@
           <a:lstStyle/>
           <a:p>
             <a:pPr algn="ctr"/>
+            <a:endParaRPr/>
           </a:p>
         </p:txBody>
       </p:sp>
@@ -17263,6 +17493,7 @@
           <a:lstStyle/>
           <a:p>
             <a:pPr algn="ctr"/>
+            <a:endParaRPr/>
           </a:p>
         </p:txBody>
       </p:sp>
@@ -17310,15 +17541,12 @@
             </a:r>
           </a:p>
           <a:p>
-            <a:r>
-              <a:rPr sz="1250" b="0">
-                <a:solidFill>
-                  <a:srgbClr val="E6E6E6"/>
-                </a:solidFill>
-                <a:latin typeface="Consolas"/>
-              </a:rPr>
-              <a:t/>
-            </a:r>
+            <a:endParaRPr sz="1250" b="0">
+              <a:solidFill>
+                <a:srgbClr val="E6E6E6"/>
+              </a:solidFill>
+              <a:latin typeface="Consolas"/>
+            </a:endParaRPr>
           </a:p>
           <a:p>
             <a:r>
@@ -17376,15 +17604,12 @@
             </a:r>
           </a:p>
           <a:p>
-            <a:r>
-              <a:rPr sz="1250" b="0">
-                <a:solidFill>
-                  <a:srgbClr val="E6E6E6"/>
-                </a:solidFill>
-                <a:latin typeface="Consolas"/>
-              </a:rPr>
-              <a:t/>
-            </a:r>
+            <a:endParaRPr sz="1250" b="0">
+              <a:solidFill>
+                <a:srgbClr val="9CDCFE"/>
+              </a:solidFill>
+              <a:latin typeface="Consolas"/>
+            </a:endParaRPr>
           </a:p>
           <a:p>
             <a:r>
@@ -17420,15 +17645,12 @@
             </a:r>
           </a:p>
           <a:p>
-            <a:r>
-              <a:rPr sz="1250" b="0">
-                <a:solidFill>
-                  <a:srgbClr val="E6E6E6"/>
-                </a:solidFill>
-                <a:latin typeface="Consolas"/>
-              </a:rPr>
-              <a:t/>
-            </a:r>
+            <a:endParaRPr sz="1250" b="0">
+              <a:solidFill>
+                <a:srgbClr val="7EC699"/>
+              </a:solidFill>
+              <a:latin typeface="Consolas"/>
+            </a:endParaRPr>
           </a:p>
           <a:p>
             <a:r>
@@ -17463,7 +17685,7 @@
 </file>
 
 <file path=ppt/slides/slide44.xml><?xml version="1.0" encoding="utf-8"?>
-<p:sld xmlns:a="http://schemas.openxmlformats.org/drawingml/2006/main" xmlns:p="http://schemas.openxmlformats.org/presentationml/2006/main" xmlns:r="http://schemas.openxmlformats.org/officeDocument/2006/relationships">
+<p:sld xmlns:a="http://schemas.openxmlformats.org/drawingml/2006/main" xmlns:r="http://schemas.openxmlformats.org/officeDocument/2006/relationships" xmlns:p="http://schemas.openxmlformats.org/presentationml/2006/main">
   <p:cSld>
     <p:spTree>
       <p:nvGrpSpPr>
@@ -17471,7 +17693,14 @@
         <p:cNvGrpSpPr/>
         <p:nvPr/>
       </p:nvGrpSpPr>
-      <p:grpSpPr/>
+      <p:grpSpPr>
+        <a:xfrm>
+          <a:off x="0" y="0"/>
+          <a:ext cx="0" cy="0"/>
+          <a:chOff x="0" y="0"/>
+          <a:chExt cx="0" cy="0"/>
+        </a:xfrm>
+      </p:grpSpPr>
       <p:sp>
         <p:nvSpPr>
           <p:cNvPr id="2" name="Rectangle 1"/>
@@ -17513,6 +17742,7 @@
           <a:lstStyle/>
           <a:p>
             <a:pPr algn="ctr"/>
+            <a:endParaRPr/>
           </a:p>
         </p:txBody>
       </p:sp>
@@ -17591,6 +17821,7 @@
           <a:lstStyle/>
           <a:p>
             <a:pPr algn="ctr"/>
+            <a:endParaRPr/>
           </a:p>
         </p:txBody>
       </p:sp>
@@ -17693,15 +17924,12 @@
             </a:r>
           </a:p>
           <a:p>
-            <a:r>
-              <a:rPr sz="1250" b="0">
-                <a:solidFill>
-                  <a:srgbClr val="E6E6E6"/>
-                </a:solidFill>
-                <a:latin typeface="Consolas"/>
-              </a:rPr>
-              <a:t/>
-            </a:r>
+            <a:endParaRPr sz="1250" b="0">
+              <a:solidFill>
+                <a:srgbClr val="E6E6E6"/>
+              </a:solidFill>
+              <a:latin typeface="Consolas"/>
+            </a:endParaRPr>
           </a:p>
           <a:p>
             <a:r>
@@ -17791,7 +18019,7 @@
 </file>
 
 <file path=ppt/slides/slide45.xml><?xml version="1.0" encoding="utf-8"?>
-<p:sld xmlns:a="http://schemas.openxmlformats.org/drawingml/2006/main" xmlns:p="http://schemas.openxmlformats.org/presentationml/2006/main" xmlns:r="http://schemas.openxmlformats.org/officeDocument/2006/relationships">
+<p:sld xmlns:a="http://schemas.openxmlformats.org/drawingml/2006/main" xmlns:r="http://schemas.openxmlformats.org/officeDocument/2006/relationships" xmlns:p="http://schemas.openxmlformats.org/presentationml/2006/main">
   <p:cSld>
     <p:spTree>
       <p:nvGrpSpPr>
@@ -17799,7 +18027,14 @@
         <p:cNvGrpSpPr/>
         <p:nvPr/>
       </p:nvGrpSpPr>
-      <p:grpSpPr/>
+      <p:grpSpPr>
+        <a:xfrm>
+          <a:off x="0" y="0"/>
+          <a:ext cx="0" cy="0"/>
+          <a:chOff x="0" y="0"/>
+          <a:chExt cx="0" cy="0"/>
+        </a:xfrm>
+      </p:grpSpPr>
       <p:sp>
         <p:nvSpPr>
           <p:cNvPr id="2" name="Rectangle 1"/>
@@ -17841,6 +18076,7 @@
           <a:lstStyle/>
           <a:p>
             <a:pPr algn="ctr"/>
+            <a:endParaRPr/>
           </a:p>
         </p:txBody>
       </p:sp>
@@ -17919,6 +18155,7 @@
           <a:lstStyle/>
           <a:p>
             <a:pPr algn="ctr"/>
+            <a:endParaRPr/>
           </a:p>
         </p:txBody>
       </p:sp>
@@ -18097,7 +18334,7 @@
 </file>
 
 <file path=ppt/slides/slide46.xml><?xml version="1.0" encoding="utf-8"?>
-<p:sld xmlns:a="http://schemas.openxmlformats.org/drawingml/2006/main" xmlns:p="http://schemas.openxmlformats.org/presentationml/2006/main" xmlns:r="http://schemas.openxmlformats.org/officeDocument/2006/relationships">
+<p:sld xmlns:a="http://schemas.openxmlformats.org/drawingml/2006/main" xmlns:r="http://schemas.openxmlformats.org/officeDocument/2006/relationships" xmlns:p="http://schemas.openxmlformats.org/presentationml/2006/main">
   <p:cSld>
     <p:spTree>
       <p:nvGrpSpPr>
@@ -18105,7 +18342,14 @@
         <p:cNvGrpSpPr/>
         <p:nvPr/>
       </p:nvGrpSpPr>
-      <p:grpSpPr/>
+      <p:grpSpPr>
+        <a:xfrm>
+          <a:off x="0" y="0"/>
+          <a:ext cx="0" cy="0"/>
+          <a:chOff x="0" y="0"/>
+          <a:chExt cx="0" cy="0"/>
+        </a:xfrm>
+      </p:grpSpPr>
       <p:sp>
         <p:nvSpPr>
           <p:cNvPr id="2" name="Rectangle 1"/>
@@ -18147,6 +18391,7 @@
           <a:lstStyle/>
           <a:p>
             <a:pPr algn="ctr"/>
+            <a:endParaRPr/>
           </a:p>
         </p:txBody>
       </p:sp>
@@ -18225,6 +18470,7 @@
           <a:lstStyle/>
           <a:p>
             <a:pPr algn="ctr"/>
+            <a:endParaRPr/>
           </a:p>
         </p:txBody>
       </p:sp>
@@ -18414,7 +18660,7 @@
 </file>
 
 <file path=ppt/slides/slide47.xml><?xml version="1.0" encoding="utf-8"?>
-<p:sld xmlns:a="http://schemas.openxmlformats.org/drawingml/2006/main" xmlns:p="http://schemas.openxmlformats.org/presentationml/2006/main" xmlns:r="http://schemas.openxmlformats.org/officeDocument/2006/relationships">
+<p:sld xmlns:a="http://schemas.openxmlformats.org/drawingml/2006/main" xmlns:r="http://schemas.openxmlformats.org/officeDocument/2006/relationships" xmlns:p="http://schemas.openxmlformats.org/presentationml/2006/main">
   <p:cSld>
     <p:spTree>
       <p:nvGrpSpPr>
@@ -18422,7 +18668,14 @@
         <p:cNvGrpSpPr/>
         <p:nvPr/>
       </p:nvGrpSpPr>
-      <p:grpSpPr/>
+      <p:grpSpPr>
+        <a:xfrm>
+          <a:off x="0" y="0"/>
+          <a:ext cx="0" cy="0"/>
+          <a:chOff x="0" y="0"/>
+          <a:chExt cx="0" cy="0"/>
+        </a:xfrm>
+      </p:grpSpPr>
       <p:sp>
         <p:nvSpPr>
           <p:cNvPr id="2" name="Rectangle 1"/>
@@ -18464,6 +18717,7 @@
           <a:lstStyle/>
           <a:p>
             <a:pPr algn="ctr"/>
+            <a:endParaRPr/>
           </a:p>
         </p:txBody>
       </p:sp>
@@ -18542,6 +18796,7 @@
           <a:lstStyle/>
           <a:p>
             <a:pPr algn="ctr"/>
+            <a:endParaRPr/>
           </a:p>
         </p:txBody>
       </p:sp>
@@ -18819,7 +19074,7 @@
 </file>
 
 <file path=ppt/slides/slide48.xml><?xml version="1.0" encoding="utf-8"?>
-<p:sld xmlns:a="http://schemas.openxmlformats.org/drawingml/2006/main" xmlns:p="http://schemas.openxmlformats.org/presentationml/2006/main" xmlns:r="http://schemas.openxmlformats.org/officeDocument/2006/relationships">
+<p:sld xmlns:a="http://schemas.openxmlformats.org/drawingml/2006/main" xmlns:r="http://schemas.openxmlformats.org/officeDocument/2006/relationships" xmlns:p="http://schemas.openxmlformats.org/presentationml/2006/main">
   <p:cSld>
     <p:spTree>
       <p:nvGrpSpPr>
@@ -18827,7 +19082,14 @@
         <p:cNvGrpSpPr/>
         <p:nvPr/>
       </p:nvGrpSpPr>
-      <p:grpSpPr/>
+      <p:grpSpPr>
+        <a:xfrm>
+          <a:off x="0" y="0"/>
+          <a:ext cx="0" cy="0"/>
+          <a:chOff x="0" y="0"/>
+          <a:chExt cx="0" cy="0"/>
+        </a:xfrm>
+      </p:grpSpPr>
       <p:sp>
         <p:nvSpPr>
           <p:cNvPr id="2" name="Rectangle 1"/>
@@ -18869,6 +19131,7 @@
           <a:lstStyle/>
           <a:p>
             <a:pPr algn="ctr"/>
+            <a:endParaRPr/>
           </a:p>
         </p:txBody>
       </p:sp>
@@ -19051,7 +19314,7 @@
 </file>
 
 <file path=ppt/slides/slide49.xml><?xml version="1.0" encoding="utf-8"?>
-<p:sld xmlns:a="http://schemas.openxmlformats.org/drawingml/2006/main" xmlns:p="http://schemas.openxmlformats.org/presentationml/2006/main" xmlns:r="http://schemas.openxmlformats.org/officeDocument/2006/relationships">
+<p:sld xmlns:a="http://schemas.openxmlformats.org/drawingml/2006/main" xmlns:r="http://schemas.openxmlformats.org/officeDocument/2006/relationships" xmlns:p="http://schemas.openxmlformats.org/presentationml/2006/main">
   <p:cSld>
     <p:spTree>
       <p:nvGrpSpPr>
@@ -19059,7 +19322,14 @@
         <p:cNvGrpSpPr/>
         <p:nvPr/>
       </p:nvGrpSpPr>
-      <p:grpSpPr/>
+      <p:grpSpPr>
+        <a:xfrm>
+          <a:off x="0" y="0"/>
+          <a:ext cx="0" cy="0"/>
+          <a:chOff x="0" y="0"/>
+          <a:chExt cx="0" cy="0"/>
+        </a:xfrm>
+      </p:grpSpPr>
       <p:sp>
         <p:nvSpPr>
           <p:cNvPr id="2" name="Rectangle 1"/>
@@ -19101,6 +19371,7 @@
           <a:lstStyle/>
           <a:p>
             <a:pPr algn="ctr"/>
+            <a:endParaRPr/>
           </a:p>
         </p:txBody>
       </p:sp>
@@ -19325,7 +19596,7 @@
 </file>
 
 <file path=ppt/slides/slide5.xml><?xml version="1.0" encoding="utf-8"?>
-<p:sld xmlns:a="http://schemas.openxmlformats.org/drawingml/2006/main" xmlns:p="http://schemas.openxmlformats.org/presentationml/2006/main" xmlns:r="http://schemas.openxmlformats.org/officeDocument/2006/relationships">
+<p:sld xmlns:a="http://schemas.openxmlformats.org/drawingml/2006/main" xmlns:r="http://schemas.openxmlformats.org/officeDocument/2006/relationships" xmlns:p="http://schemas.openxmlformats.org/presentationml/2006/main">
   <p:cSld>
     <p:spTree>
       <p:nvGrpSpPr>
@@ -19333,7 +19604,14 @@
         <p:cNvGrpSpPr/>
         <p:nvPr/>
       </p:nvGrpSpPr>
-      <p:grpSpPr/>
+      <p:grpSpPr>
+        <a:xfrm>
+          <a:off x="0" y="0"/>
+          <a:ext cx="0" cy="0"/>
+          <a:chOff x="0" y="0"/>
+          <a:chExt cx="0" cy="0"/>
+        </a:xfrm>
+      </p:grpSpPr>
       <p:sp>
         <p:nvSpPr>
           <p:cNvPr id="2" name="Rectangle 1"/>
@@ -19375,6 +19653,7 @@
           <a:lstStyle/>
           <a:p>
             <a:pPr algn="ctr"/>
+            <a:endParaRPr/>
           </a:p>
         </p:txBody>
       </p:sp>
@@ -19542,7 +19821,7 @@
 </file>
 
 <file path=ppt/slides/slide50.xml><?xml version="1.0" encoding="utf-8"?>
-<p:sld xmlns:a="http://schemas.openxmlformats.org/drawingml/2006/main" xmlns:p="http://schemas.openxmlformats.org/presentationml/2006/main" xmlns:r="http://schemas.openxmlformats.org/officeDocument/2006/relationships">
+<p:sld xmlns:a="http://schemas.openxmlformats.org/drawingml/2006/main" xmlns:r="http://schemas.openxmlformats.org/officeDocument/2006/relationships" xmlns:p="http://schemas.openxmlformats.org/presentationml/2006/main">
   <p:cSld>
     <p:spTree>
       <p:nvGrpSpPr>
@@ -19550,7 +19829,14 @@
         <p:cNvGrpSpPr/>
         <p:nvPr/>
       </p:nvGrpSpPr>
-      <p:grpSpPr/>
+      <p:grpSpPr>
+        <a:xfrm>
+          <a:off x="0" y="0"/>
+          <a:ext cx="0" cy="0"/>
+          <a:chOff x="0" y="0"/>
+          <a:chExt cx="0" cy="0"/>
+        </a:xfrm>
+      </p:grpSpPr>
       <p:sp>
         <p:nvSpPr>
           <p:cNvPr id="2" name="Rectangle 1"/>
@@ -19592,6 +19878,7 @@
           <a:lstStyle/>
           <a:p>
             <a:pPr algn="ctr"/>
+            <a:endParaRPr/>
           </a:p>
         </p:txBody>
       </p:sp>
@@ -19737,7 +20024,7 @@
 </file>
 
 <file path=ppt/slides/slide51.xml><?xml version="1.0" encoding="utf-8"?>
-<p:sld xmlns:a="http://schemas.openxmlformats.org/drawingml/2006/main" xmlns:p="http://schemas.openxmlformats.org/presentationml/2006/main" xmlns:r="http://schemas.openxmlformats.org/officeDocument/2006/relationships">
+<p:sld xmlns:a="http://schemas.openxmlformats.org/drawingml/2006/main" xmlns:r="http://schemas.openxmlformats.org/officeDocument/2006/relationships" xmlns:p="http://schemas.openxmlformats.org/presentationml/2006/main">
   <p:cSld>
     <p:spTree>
       <p:nvGrpSpPr>
@@ -19745,7 +20032,14 @@
         <p:cNvGrpSpPr/>
         <p:nvPr/>
       </p:nvGrpSpPr>
-      <p:grpSpPr/>
+      <p:grpSpPr>
+        <a:xfrm>
+          <a:off x="0" y="0"/>
+          <a:ext cx="0" cy="0"/>
+          <a:chOff x="0" y="0"/>
+          <a:chExt cx="0" cy="0"/>
+        </a:xfrm>
+      </p:grpSpPr>
       <p:sp>
         <p:nvSpPr>
           <p:cNvPr id="2" name="Rectangle 1"/>
@@ -19787,6 +20081,7 @@
           <a:lstStyle/>
           <a:p>
             <a:pPr algn="ctr"/>
+            <a:endParaRPr/>
           </a:p>
         </p:txBody>
       </p:sp>
@@ -19921,7 +20216,7 @@
 </file>
 
 <file path=ppt/slides/slide52.xml><?xml version="1.0" encoding="utf-8"?>
-<p:sld xmlns:a="http://schemas.openxmlformats.org/drawingml/2006/main" xmlns:p="http://schemas.openxmlformats.org/presentationml/2006/main" xmlns:r="http://schemas.openxmlformats.org/officeDocument/2006/relationships">
+<p:sld xmlns:a="http://schemas.openxmlformats.org/drawingml/2006/main" xmlns:r="http://schemas.openxmlformats.org/officeDocument/2006/relationships" xmlns:p="http://schemas.openxmlformats.org/presentationml/2006/main">
   <p:cSld>
     <p:spTree>
       <p:nvGrpSpPr>
@@ -19929,7 +20224,14 @@
         <p:cNvGrpSpPr/>
         <p:nvPr/>
       </p:nvGrpSpPr>
-      <p:grpSpPr/>
+      <p:grpSpPr>
+        <a:xfrm>
+          <a:off x="0" y="0"/>
+          <a:ext cx="0" cy="0"/>
+          <a:chOff x="0" y="0"/>
+          <a:chExt cx="0" cy="0"/>
+        </a:xfrm>
+      </p:grpSpPr>
       <p:sp>
         <p:nvSpPr>
           <p:cNvPr id="2" name="Rectangle 1"/>
@@ -19971,6 +20273,7 @@
           <a:lstStyle/>
           <a:p>
             <a:pPr algn="ctr"/>
+            <a:endParaRPr/>
           </a:p>
         </p:txBody>
       </p:sp>
@@ -20195,7 +20498,7 @@
 </file>
 
 <file path=ppt/slides/slide53.xml><?xml version="1.0" encoding="utf-8"?>
-<p:sld xmlns:a="http://schemas.openxmlformats.org/drawingml/2006/main" xmlns:p="http://schemas.openxmlformats.org/presentationml/2006/main" xmlns:r="http://schemas.openxmlformats.org/officeDocument/2006/relationships">
+<p:sld xmlns:a="http://schemas.openxmlformats.org/drawingml/2006/main" xmlns:r="http://schemas.openxmlformats.org/officeDocument/2006/relationships" xmlns:p="http://schemas.openxmlformats.org/presentationml/2006/main">
   <p:cSld>
     <p:spTree>
       <p:nvGrpSpPr>
@@ -20203,7 +20506,14 @@
         <p:cNvGrpSpPr/>
         <p:nvPr/>
       </p:nvGrpSpPr>
-      <p:grpSpPr/>
+      <p:grpSpPr>
+        <a:xfrm>
+          <a:off x="0" y="0"/>
+          <a:ext cx="0" cy="0"/>
+          <a:chOff x="0" y="0"/>
+          <a:chExt cx="0" cy="0"/>
+        </a:xfrm>
+      </p:grpSpPr>
       <p:sp>
         <p:nvSpPr>
           <p:cNvPr id="2" name="Rectangle 1"/>
@@ -20245,6 +20555,7 @@
           <a:lstStyle/>
           <a:p>
             <a:pPr algn="ctr"/>
+            <a:endParaRPr/>
           </a:p>
         </p:txBody>
       </p:sp>
@@ -20448,7 +20759,7 @@
 </file>
 
 <file path=ppt/slides/slide6.xml><?xml version="1.0" encoding="utf-8"?>
-<p:sld xmlns:a="http://schemas.openxmlformats.org/drawingml/2006/main" xmlns:p="http://schemas.openxmlformats.org/presentationml/2006/main" xmlns:r="http://schemas.openxmlformats.org/officeDocument/2006/relationships">
+<p:sld xmlns:a="http://schemas.openxmlformats.org/drawingml/2006/main" xmlns:r="http://schemas.openxmlformats.org/officeDocument/2006/relationships" xmlns:p="http://schemas.openxmlformats.org/presentationml/2006/main">
   <p:cSld>
     <p:spTree>
       <p:nvGrpSpPr>
@@ -20456,7 +20767,14 @@
         <p:cNvGrpSpPr/>
         <p:nvPr/>
       </p:nvGrpSpPr>
-      <p:grpSpPr/>
+      <p:grpSpPr>
+        <a:xfrm>
+          <a:off x="0" y="0"/>
+          <a:ext cx="0" cy="0"/>
+          <a:chOff x="0" y="0"/>
+          <a:chExt cx="0" cy="0"/>
+        </a:xfrm>
+      </p:grpSpPr>
       <p:sp>
         <p:nvSpPr>
           <p:cNvPr id="2" name="Rectangle 1"/>
@@ -20498,6 +20816,7 @@
           <a:lstStyle/>
           <a:p>
             <a:pPr algn="ctr"/>
+            <a:endParaRPr/>
           </a:p>
         </p:txBody>
       </p:sp>
@@ -20639,7 +20958,7 @@
                 </a:solidFill>
                 <a:latin typeface="Malgun Gothic"/>
               </a:rPr>
-              <a:t>    –  동적 SQL 은 실행 시점의 세션 권한 체계를 따르므로 롤 권한도 사용한다</a:t>
+              <a:t>    –  동적 SQL 도 롤 권한은 쓰지 못한다 — 실패가 실행 시점으로 옮겨질 뿐이다</a:t>
             </a:r>
           </a:p>
           <a:p>
@@ -20669,7 +20988,7 @@
 </file>
 
 <file path=ppt/slides/slide7.xml><?xml version="1.0" encoding="utf-8"?>
-<p:sld xmlns:a="http://schemas.openxmlformats.org/drawingml/2006/main" xmlns:p="http://schemas.openxmlformats.org/presentationml/2006/main" xmlns:r="http://schemas.openxmlformats.org/officeDocument/2006/relationships">
+<p:sld xmlns:a="http://schemas.openxmlformats.org/drawingml/2006/main" xmlns:r="http://schemas.openxmlformats.org/officeDocument/2006/relationships" xmlns:p="http://schemas.openxmlformats.org/presentationml/2006/main">
   <p:cSld>
     <p:spTree>
       <p:nvGrpSpPr>
@@ -20677,7 +20996,14 @@
         <p:cNvGrpSpPr/>
         <p:nvPr/>
       </p:nvGrpSpPr>
-      <p:grpSpPr/>
+      <p:grpSpPr>
+        <a:xfrm>
+          <a:off x="0" y="0"/>
+          <a:ext cx="0" cy="0"/>
+          <a:chOff x="0" y="0"/>
+          <a:chExt cx="0" cy="0"/>
+        </a:xfrm>
+      </p:grpSpPr>
       <p:sp>
         <p:nvSpPr>
           <p:cNvPr id="2" name="Rectangle 1"/>
@@ -20719,6 +21045,7 @@
           <a:lstStyle/>
           <a:p>
             <a:pPr algn="ctr"/>
+            <a:endParaRPr/>
           </a:p>
         </p:txBody>
       </p:sp>
@@ -20912,7 +21239,7 @@
 </file>
 
 <file path=ppt/slides/slide8.xml><?xml version="1.0" encoding="utf-8"?>
-<p:sld xmlns:a="http://schemas.openxmlformats.org/drawingml/2006/main" xmlns:p="http://schemas.openxmlformats.org/presentationml/2006/main" xmlns:r="http://schemas.openxmlformats.org/officeDocument/2006/relationships">
+<p:sld xmlns:a="http://schemas.openxmlformats.org/drawingml/2006/main" xmlns:r="http://schemas.openxmlformats.org/officeDocument/2006/relationships" xmlns:p="http://schemas.openxmlformats.org/presentationml/2006/main">
   <p:cSld>
     <p:spTree>
       <p:nvGrpSpPr>
@@ -20920,7 +21247,14 @@
         <p:cNvGrpSpPr/>
         <p:nvPr/>
       </p:nvGrpSpPr>
-      <p:grpSpPr/>
+      <p:grpSpPr>
+        <a:xfrm>
+          <a:off x="0" y="0"/>
+          <a:ext cx="0" cy="0"/>
+          <a:chOff x="0" y="0"/>
+          <a:chExt cx="0" cy="0"/>
+        </a:xfrm>
+      </p:grpSpPr>
       <p:sp>
         <p:nvSpPr>
           <p:cNvPr id="2" name="Rectangle 1"/>
@@ -20962,6 +21296,7 @@
           <a:lstStyle/>
           <a:p>
             <a:pPr algn="ctr"/>
+            <a:endParaRPr/>
           </a:p>
         </p:txBody>
       </p:sp>
@@ -21040,6 +21375,7 @@
           <a:lstStyle/>
           <a:p>
             <a:pPr algn="ctr"/>
+            <a:endParaRPr/>
           </a:p>
         </p:txBody>
       </p:sp>
@@ -21109,15 +21445,12 @@
             </a:r>
           </a:p>
           <a:p>
-            <a:r>
-              <a:rPr sz="1250" b="0">
-                <a:solidFill>
-                  <a:srgbClr val="E6E6E6"/>
-                </a:solidFill>
-                <a:latin typeface="Consolas"/>
-              </a:rPr>
-              <a:t/>
-            </a:r>
+            <a:endParaRPr sz="1250" b="0">
+              <a:solidFill>
+                <a:srgbClr val="7EC699"/>
+              </a:solidFill>
+              <a:latin typeface="Consolas"/>
+            </a:endParaRPr>
           </a:p>
           <a:p>
             <a:r>
@@ -21174,7 +21507,7 @@
 </file>
 
 <file path=ppt/slides/slide9.xml><?xml version="1.0" encoding="utf-8"?>
-<p:sld xmlns:a="http://schemas.openxmlformats.org/drawingml/2006/main" xmlns:p="http://schemas.openxmlformats.org/presentationml/2006/main" xmlns:r="http://schemas.openxmlformats.org/officeDocument/2006/relationships">
+<p:sld xmlns:a="http://schemas.openxmlformats.org/drawingml/2006/main" xmlns:r="http://schemas.openxmlformats.org/officeDocument/2006/relationships" xmlns:p="http://schemas.openxmlformats.org/presentationml/2006/main">
   <p:cSld>
     <p:spTree>
       <p:nvGrpSpPr>
@@ -21182,7 +21515,14 @@
         <p:cNvGrpSpPr/>
         <p:nvPr/>
       </p:nvGrpSpPr>
-      <p:grpSpPr/>
+      <p:grpSpPr>
+        <a:xfrm>
+          <a:off x="0" y="0"/>
+          <a:ext cx="0" cy="0"/>
+          <a:chOff x="0" y="0"/>
+          <a:chExt cx="0" cy="0"/>
+        </a:xfrm>
+      </p:grpSpPr>
       <p:sp>
         <p:nvSpPr>
           <p:cNvPr id="2" name="Rectangle 1"/>
@@ -21224,6 +21564,7 @@
           <a:lstStyle/>
           <a:p>
             <a:pPr algn="ctr"/>
+            <a:endParaRPr/>
           </a:p>
         </p:txBody>
       </p:sp>
@@ -21302,6 +21643,7 @@
           <a:lstStyle/>
           <a:p>
             <a:pPr algn="ctr"/>
+            <a:endParaRPr/>
           </a:p>
         </p:txBody>
       </p:sp>
@@ -21371,15 +21713,12 @@
             </a:r>
           </a:p>
           <a:p>
-            <a:r>
-              <a:rPr sz="1250" b="0">
-                <a:solidFill>
-                  <a:srgbClr val="E6E6E6"/>
-                </a:solidFill>
-                <a:latin typeface="Consolas"/>
-              </a:rPr>
-              <a:t/>
-            </a:r>
+            <a:endParaRPr sz="1250" b="0">
+              <a:solidFill>
+                <a:srgbClr val="E6E6E6"/>
+              </a:solidFill>
+              <a:latin typeface="Consolas"/>
+            </a:endParaRPr>
           </a:p>
           <a:p>
             <a:r>
@@ -21756,7 +22095,7 @@
 </file>
 
 <file path=ppt/theme/theme2.xml><?xml version="1.0" encoding="utf-8"?>
-<a:theme xmlns:a="http://schemas.openxmlformats.org/drawingml/2006/main" name="Office Theme">
+<a:theme xmlns:a="http://schemas.openxmlformats.org/drawingml/2006/main" name="Office 테마">
   <a:themeElements>
     <a:clrScheme name="Office">
       <a:dk1>
@@ -21766,44 +22105,44 @@
         <a:sysClr val="window" lastClr="FFFFFF"/>
       </a:lt1>
       <a:dk2>
-        <a:srgbClr val="1F497D"/>
+        <a:srgbClr val="0E2841"/>
       </a:dk2>
       <a:lt2>
-        <a:srgbClr val="EEECE1"/>
+        <a:srgbClr val="E8E8E8"/>
       </a:lt2>
       <a:accent1>
-        <a:srgbClr val="4F81BD"/>
+        <a:srgbClr val="156082"/>
       </a:accent1>
       <a:accent2>
-        <a:srgbClr val="C0504D"/>
+        <a:srgbClr val="E97132"/>
       </a:accent2>
       <a:accent3>
-        <a:srgbClr val="9BBB59"/>
+        <a:srgbClr val="196B24"/>
       </a:accent3>
       <a:accent4>
-        <a:srgbClr val="8064A2"/>
+        <a:srgbClr val="0F9ED5"/>
       </a:accent4>
       <a:accent5>
-        <a:srgbClr val="4BACC6"/>
+        <a:srgbClr val="A02B93"/>
       </a:accent5>
       <a:accent6>
-        <a:srgbClr val="F79646"/>
+        <a:srgbClr val="4EA72E"/>
       </a:accent6>
       <a:hlink>
-        <a:srgbClr val="0000FF"/>
+        <a:srgbClr val="467886"/>
       </a:hlink>
       <a:folHlink>
-        <a:srgbClr val="800080"/>
+        <a:srgbClr val="96607D"/>
       </a:folHlink>
     </a:clrScheme>
     <a:fontScheme name="Office">
       <a:majorFont>
-        <a:latin typeface="Calibri"/>
+        <a:latin typeface="맑은 고딕" panose="02110004020202020204"/>
         <a:ea typeface=""/>
         <a:cs typeface=""/>
-        <a:font script="Jpan" typeface="ＭＳ Ｐゴシック"/>
+        <a:font script="Jpan" typeface="游ゴシック Light"/>
         <a:font script="Hang" typeface="맑은 고딕"/>
-        <a:font script="Hans" typeface="宋体"/>
+        <a:font script="Hans" typeface="等线 Light"/>
         <a:font script="Hant" typeface="新細明體"/>
         <a:font script="Arab" typeface="Times New Roman"/>
         <a:font script="Hebr" typeface="Times New Roman"/>
@@ -21831,14 +22170,31 @@
         <a:font script="Viet" typeface="Times New Roman"/>
         <a:font script="Uigh" typeface="Microsoft Uighur"/>
         <a:font script="Geor" typeface="Sylfaen"/>
+        <a:font script="Armn" typeface="Arial"/>
+        <a:font script="Bugi" typeface="Leelawadee UI"/>
+        <a:font script="Bopo" typeface="Microsoft JhengHei"/>
+        <a:font script="Java" typeface="Javanese Text"/>
+        <a:font script="Lisu" typeface="Segoe UI"/>
+        <a:font script="Mymr" typeface="Myanmar Text"/>
+        <a:font script="Nkoo" typeface="Ebrima"/>
+        <a:font script="Olck" typeface="Nirmala UI"/>
+        <a:font script="Osma" typeface="Ebrima"/>
+        <a:font script="Phag" typeface="Phagspa"/>
+        <a:font script="Syrn" typeface="Estrangelo Edessa"/>
+        <a:font script="Syrj" typeface="Estrangelo Edessa"/>
+        <a:font script="Syre" typeface="Estrangelo Edessa"/>
+        <a:font script="Sora" typeface="Nirmala UI"/>
+        <a:font script="Tale" typeface="Microsoft Tai Le"/>
+        <a:font script="Talu" typeface="Microsoft New Tai Lue"/>
+        <a:font script="Tfng" typeface="Ebrima"/>
       </a:majorFont>
       <a:minorFont>
-        <a:latin typeface="Calibri"/>
+        <a:latin typeface="맑은 고딕" panose="02110004020202020204"/>
         <a:ea typeface=""/>
         <a:cs typeface=""/>
-        <a:font script="Jpan" typeface="ＭＳ Ｐゴシック"/>
+        <a:font script="Jpan" typeface="游ゴシック"/>
         <a:font script="Hang" typeface="맑은 고딕"/>
-        <a:font script="Hans" typeface="宋体"/>
+        <a:font script="Hans" typeface="等线"/>
         <a:font script="Hant" typeface="新細明體"/>
         <a:font script="Arab" typeface="Arial"/>
         <a:font script="Hebr" typeface="Arial"/>
@@ -21866,6 +22222,23 @@
         <a:font script="Viet" typeface="Arial"/>
         <a:font script="Uigh" typeface="Microsoft Uighur"/>
         <a:font script="Geor" typeface="Sylfaen"/>
+        <a:font script="Armn" typeface="Arial"/>
+        <a:font script="Bugi" typeface="Leelawadee UI"/>
+        <a:font script="Bopo" typeface="Microsoft JhengHei"/>
+        <a:font script="Java" typeface="Javanese Text"/>
+        <a:font script="Lisu" typeface="Segoe UI"/>
+        <a:font script="Mymr" typeface="Myanmar Text"/>
+        <a:font script="Nkoo" typeface="Ebrima"/>
+        <a:font script="Olck" typeface="Nirmala UI"/>
+        <a:font script="Osma" typeface="Ebrima"/>
+        <a:font script="Phag" typeface="Phagspa"/>
+        <a:font script="Syrn" typeface="Estrangelo Edessa"/>
+        <a:font script="Syrj" typeface="Estrangelo Edessa"/>
+        <a:font script="Syre" typeface="Estrangelo Edessa"/>
+        <a:font script="Sora" typeface="Nirmala UI"/>
+        <a:font script="Tale" typeface="Microsoft Tai Le"/>
+        <a:font script="Talu" typeface="Microsoft New Tai Lue"/>
+        <a:font script="Tfng" typeface="Ebrima"/>
       </a:minorFont>
     </a:fontScheme>
     <a:fmtScheme name="Office">
@@ -21877,180 +22250,136 @@
           <a:gsLst>
             <a:gs pos="0">
               <a:schemeClr val="phClr">
-                <a:tint val="50000"/>
-                <a:satMod val="300000"/>
+                <a:lumMod val="110000"/>
+                <a:satMod val="105000"/>
+                <a:tint val="67000"/>
               </a:schemeClr>
             </a:gs>
-            <a:gs pos="35000">
+            <a:gs pos="50000">
               <a:schemeClr val="phClr">
-                <a:tint val="37000"/>
-                <a:satMod val="300000"/>
+                <a:lumMod val="105000"/>
+                <a:satMod val="103000"/>
+                <a:tint val="73000"/>
               </a:schemeClr>
             </a:gs>
             <a:gs pos="100000">
               <a:schemeClr val="phClr">
-                <a:tint val="15000"/>
-                <a:satMod val="350000"/>
+                <a:lumMod val="105000"/>
+                <a:satMod val="109000"/>
+                <a:tint val="81000"/>
               </a:schemeClr>
             </a:gs>
           </a:gsLst>
-          <a:lin ang="16200000" scaled="1"/>
+          <a:lin ang="5400000" scaled="0"/>
         </a:gradFill>
         <a:gradFill rotWithShape="1">
           <a:gsLst>
             <a:gs pos="0">
               <a:schemeClr val="phClr">
-                <a:tint val="100000"/>
+                <a:satMod val="103000"/>
+                <a:lumMod val="102000"/>
+                <a:tint val="94000"/>
+              </a:schemeClr>
+            </a:gs>
+            <a:gs pos="50000">
+              <a:schemeClr val="phClr">
+                <a:satMod val="110000"/>
+                <a:lumMod val="100000"/>
                 <a:shade val="100000"/>
-                <a:satMod val="130000"/>
               </a:schemeClr>
             </a:gs>
             <a:gs pos="100000">
               <a:schemeClr val="phClr">
-                <a:tint val="50000"/>
-                <a:shade val="100000"/>
-                <a:satMod val="350000"/>
+                <a:lumMod val="99000"/>
+                <a:satMod val="120000"/>
+                <a:shade val="78000"/>
               </a:schemeClr>
             </a:gs>
           </a:gsLst>
-          <a:lin ang="16200000" scaled="0"/>
+          <a:lin ang="5400000" scaled="0"/>
         </a:gradFill>
       </a:fillStyleLst>
       <a:lnStyleLst>
-        <a:ln w="9525" cap="flat" cmpd="sng" algn="ctr">
+        <a:ln w="12700" cap="flat" cmpd="sng" algn="ctr">
           <a:solidFill>
-            <a:schemeClr val="phClr">
-              <a:shade val="95000"/>
-              <a:satMod val="105000"/>
-            </a:schemeClr>
+            <a:schemeClr val="phClr"/>
           </a:solidFill>
           <a:prstDash val="solid"/>
+          <a:miter lim="800000"/>
+        </a:ln>
+        <a:ln w="19050" cap="flat" cmpd="sng" algn="ctr">
+          <a:solidFill>
+            <a:schemeClr val="phClr"/>
+          </a:solidFill>
+          <a:prstDash val="solid"/>
+          <a:miter lim="800000"/>
         </a:ln>
         <a:ln w="25400" cap="flat" cmpd="sng" algn="ctr">
           <a:solidFill>
             <a:schemeClr val="phClr"/>
           </a:solidFill>
           <a:prstDash val="solid"/>
-        </a:ln>
-        <a:ln w="38100" cap="flat" cmpd="sng" algn="ctr">
-          <a:solidFill>
-            <a:schemeClr val="phClr"/>
-          </a:solidFill>
-          <a:prstDash val="solid"/>
+          <a:miter lim="800000"/>
         </a:ln>
       </a:lnStyleLst>
       <a:effectStyleLst>
         <a:effectStyle>
+          <a:effectLst/>
+        </a:effectStyle>
+        <a:effectStyle>
+          <a:effectLst/>
+        </a:effectStyle>
+        <a:effectStyle>
           <a:effectLst>
-            <a:outerShdw blurRad="40000" dist="20000" dir="5400000" rotWithShape="0">
+            <a:outerShdw blurRad="57150" dist="19050" dir="5400000" algn="ctr" rotWithShape="0">
               <a:srgbClr val="000000">
-                <a:alpha val="38000"/>
+                <a:alpha val="63000"/>
               </a:srgbClr>
             </a:outerShdw>
           </a:effectLst>
-        </a:effectStyle>
-        <a:effectStyle>
-          <a:effectLst>
-            <a:outerShdw blurRad="40000" dist="23000" dir="5400000" rotWithShape="0">
-              <a:srgbClr val="000000">
-                <a:alpha val="35000"/>
-              </a:srgbClr>
-            </a:outerShdw>
-          </a:effectLst>
-        </a:effectStyle>
-        <a:effectStyle>
-          <a:effectLst>
-            <a:outerShdw blurRad="40000" dist="23000" dir="5400000" rotWithShape="0">
-              <a:srgbClr val="000000">
-                <a:alpha val="35000"/>
-              </a:srgbClr>
-            </a:outerShdw>
-          </a:effectLst>
-          <a:scene3d>
-            <a:camera prst="orthographicFront">
-              <a:rot lat="0" lon="0" rev="0"/>
-            </a:camera>
-            <a:lightRig rig="threePt" dir="t">
-              <a:rot lat="0" lon="0" rev="1200000"/>
-            </a:lightRig>
-          </a:scene3d>
-          <a:sp3d>
-            <a:bevelT w="63500" h="25400"/>
-          </a:sp3d>
         </a:effectStyle>
       </a:effectStyleLst>
       <a:bgFillStyleLst>
         <a:solidFill>
           <a:schemeClr val="phClr"/>
         </a:solidFill>
+        <a:solidFill>
+          <a:schemeClr val="phClr">
+            <a:tint val="95000"/>
+            <a:satMod val="170000"/>
+          </a:schemeClr>
+        </a:solidFill>
         <a:gradFill rotWithShape="1">
           <a:gsLst>
             <a:gs pos="0">
               <a:schemeClr val="phClr">
-                <a:tint val="40000"/>
-                <a:satMod val="350000"/>
+                <a:tint val="93000"/>
+                <a:satMod val="150000"/>
+                <a:shade val="98000"/>
+                <a:lumMod val="102000"/>
               </a:schemeClr>
             </a:gs>
-            <a:gs pos="40000">
+            <a:gs pos="50000">
               <a:schemeClr val="phClr">
-                <a:tint val="45000"/>
-                <a:shade val="99000"/>
-                <a:satMod val="350000"/>
+                <a:tint val="98000"/>
+                <a:satMod val="130000"/>
+                <a:shade val="90000"/>
+                <a:lumMod val="103000"/>
               </a:schemeClr>
             </a:gs>
             <a:gs pos="100000">
               <a:schemeClr val="phClr">
-                <a:shade val="20000"/>
-                <a:satMod val="255000"/>
+                <a:shade val="63000"/>
+                <a:satMod val="120000"/>
               </a:schemeClr>
             </a:gs>
           </a:gsLst>
-          <a:path path="circle">
-            <a:fillToRect l="50000" t="-80000" r="50000" b="180000"/>
-          </a:path>
-        </a:gradFill>
-        <a:gradFill rotWithShape="1">
-          <a:gsLst>
-            <a:gs pos="0">
-              <a:schemeClr val="phClr">
-                <a:tint val="80000"/>
-                <a:satMod val="300000"/>
-              </a:schemeClr>
-            </a:gs>
-            <a:gs pos="100000">
-              <a:schemeClr val="phClr">
-                <a:shade val="30000"/>
-                <a:satMod val="200000"/>
-              </a:schemeClr>
-            </a:gs>
-          </a:gsLst>
-          <a:path path="circle">
-            <a:fillToRect l="50000" t="50000" r="50000" b="50000"/>
-          </a:path>
+          <a:lin ang="5400000" scaled="0"/>
         </a:gradFill>
       </a:bgFillStyleLst>
     </a:fmtScheme>
   </a:themeElements>
   <a:objectDefaults>
-    <a:spDef>
-      <a:spPr/>
-      <a:bodyPr/>
-      <a:lstStyle/>
-      <a:style>
-        <a:lnRef idx="1">
-          <a:schemeClr val="accent1"/>
-        </a:lnRef>
-        <a:fillRef idx="3">
-          <a:schemeClr val="accent1"/>
-        </a:fillRef>
-        <a:effectRef idx="2">
-          <a:schemeClr val="accent1"/>
-        </a:effectRef>
-        <a:fontRef idx="minor">
-          <a:schemeClr val="lt1"/>
-        </a:fontRef>
-      </a:style>
-    </a:spDef>
     <a:lnDef>
       <a:spPr/>
       <a:bodyPr/>
@@ -22072,5 +22401,10 @@
     </a:lnDef>
   </a:objectDefaults>
   <a:extraClrSchemeLst/>
+  <a:extLst>
+    <a:ext uri="{05A4C25C-085E-4340-85A3-A5531E510DB2}">
+      <thm15:themeFamily xmlns:thm15="http://schemas.microsoft.com/office/thememl/2012/main" name="Office Theme" id="{2E142A2C-CD16-42D6-873A-C26D2A0506FA}" vid="{1BDDFF52-6CD6-40A5-AB3C-68EB2F1E4D0A}"/>
+    </a:ext>
+  </a:extLst>
 </a:theme>
 </file>